--- a/clases/4/teoria/clase-04.pptx
+++ b/clases/4/teoria/clase-04.pptx
@@ -5,7 +5,7 @@
     <p:sldMasterId id="2147483699" r:id="rId1"/>
   </p:sldMasterIdLst>
   <p:notesMasterIdLst>
-    <p:notesMasterId r:id="rId28"/>
+    <p:notesMasterId r:id="rId34"/>
   </p:notesMasterIdLst>
   <p:sldIdLst>
     <p:sldId id="281" r:id="rId2"/>
@@ -32,8 +32,14 @@
     <p:sldId id="394" r:id="rId23"/>
     <p:sldId id="333" r:id="rId24"/>
     <p:sldId id="334" r:id="rId25"/>
-    <p:sldId id="310" r:id="rId26"/>
-    <p:sldId id="277" r:id="rId27"/>
+    <p:sldId id="398" r:id="rId26"/>
+    <p:sldId id="399" r:id="rId27"/>
+    <p:sldId id="400" r:id="rId28"/>
+    <p:sldId id="401" r:id="rId29"/>
+    <p:sldId id="402" r:id="rId30"/>
+    <p:sldId id="403" r:id="rId31"/>
+    <p:sldId id="310" r:id="rId32"/>
+    <p:sldId id="277" r:id="rId33"/>
   </p:sldIdLst>
   <p:sldSz cx="9144000" cy="6858000" type="screen4x3"/>
   <p:notesSz cx="6858000" cy="9144000"/>
@@ -3653,7 +3659,7 @@
           <a:p>
             <a:fld id="{30943A3E-55B9-4706-BA6E-9364B5247742}" type="datetimeFigureOut">
               <a:rPr lang="es-CO" smtClean="0"/>
-              <a:t>10/08/2026</a:t>
+              <a:t>17/08/2026</a:t>
             </a:fld>
             <a:endParaRPr lang="es-CO"/>
           </a:p>
@@ -4223,7 +4229,7 @@
           <a:p>
             <a:fld id="{78FAE389-1891-4C1C-AE7B-96446A92669F}" type="datetime1">
               <a:rPr lang="es-CO" smtClean="0"/>
-              <a:t>10/08/2026</a:t>
+              <a:t>17/08/2026</a:t>
             </a:fld>
             <a:endParaRPr lang="es-CO" dirty="0"/>
           </a:p>
@@ -4395,7 +4401,7 @@
           <a:p>
             <a:fld id="{169921E5-6957-4C84-BD80-156D13F58C59}" type="datetime1">
               <a:rPr lang="es-CO" smtClean="0"/>
-              <a:t>10/08/2026</a:t>
+              <a:t>17/08/2026</a:t>
             </a:fld>
             <a:endParaRPr lang="es-CO"/>
           </a:p>
@@ -4575,7 +4581,7 @@
           <a:p>
             <a:fld id="{A7BB61D7-E979-4A0B-B106-A9203ABD6AA5}" type="datetime1">
               <a:rPr lang="es-CO" smtClean="0"/>
-              <a:t>10/08/2026</a:t>
+              <a:t>17/08/2026</a:t>
             </a:fld>
             <a:endParaRPr lang="es-CO"/>
           </a:p>
@@ -4745,7 +4751,7 @@
           <a:p>
             <a:fld id="{BC197211-2E02-4E34-9D1C-742DBBA2E713}" type="datetime1">
               <a:rPr lang="es-CO" smtClean="0"/>
-              <a:t>10/08/2026</a:t>
+              <a:t>17/08/2026</a:t>
             </a:fld>
             <a:endParaRPr lang="es-CO"/>
           </a:p>
@@ -4915,7 +4921,7 @@
           <a:p>
             <a:fld id="{BC197211-2E02-4E34-9D1C-742DBBA2E713}" type="datetime1">
               <a:rPr lang="es-CO" smtClean="0"/>
-              <a:t>10/08/2026</a:t>
+              <a:t>17/08/2026</a:t>
             </a:fld>
             <a:endParaRPr lang="es-CO"/>
           </a:p>
@@ -5159,7 +5165,7 @@
           <a:p>
             <a:fld id="{F84A16AA-8F92-4F8D-9FF5-AE4F5F025475}" type="datetime1">
               <a:rPr lang="es-CO" smtClean="0"/>
-              <a:t>10/08/2026</a:t>
+              <a:t>17/08/2026</a:t>
             </a:fld>
             <a:endParaRPr lang="es-CO"/>
           </a:p>
@@ -5391,7 +5397,7 @@
           <a:p>
             <a:fld id="{58A2889A-C4A3-4C6C-A514-E9566A95FF0B}" type="datetime1">
               <a:rPr lang="es-CO" smtClean="0"/>
-              <a:t>10/08/2026</a:t>
+              <a:t>17/08/2026</a:t>
             </a:fld>
             <a:endParaRPr lang="es-CO"/>
           </a:p>
@@ -5758,7 +5764,7 @@
           <a:p>
             <a:fld id="{CFC549B8-F78E-4015-8DD3-99AC842EEF5C}" type="datetime1">
               <a:rPr lang="es-CO" smtClean="0"/>
-              <a:t>10/08/2026</a:t>
+              <a:t>17/08/2026</a:t>
             </a:fld>
             <a:endParaRPr lang="es-CO"/>
           </a:p>
@@ -5876,7 +5882,7 @@
           <a:p>
             <a:fld id="{78FAE389-1891-4C1C-AE7B-96446A92669F}" type="datetime1">
               <a:rPr lang="es-CO" smtClean="0"/>
-              <a:t>10/08/2026</a:t>
+              <a:t>17/08/2026</a:t>
             </a:fld>
             <a:endParaRPr lang="es-CO" dirty="0"/>
           </a:p>
@@ -5973,7 +5979,7 @@
           <a:p>
             <a:fld id="{C2375FDE-4F9B-4FF4-9D4F-6D3ED15F62CE}" type="datetime1">
               <a:rPr lang="es-CO" smtClean="0"/>
-              <a:t>10/08/2026</a:t>
+              <a:t>17/08/2026</a:t>
             </a:fld>
             <a:endParaRPr lang="es-CO"/>
           </a:p>
@@ -6250,7 +6256,7 @@
           <a:p>
             <a:fld id="{7AF392FA-6414-43D4-857F-1D16849F2AFB}" type="datetime1">
               <a:rPr lang="es-CO" smtClean="0"/>
-              <a:t>10/08/2026</a:t>
+              <a:t>17/08/2026</a:t>
             </a:fld>
             <a:endParaRPr lang="es-CO"/>
           </a:p>
@@ -6507,7 +6513,7 @@
           <a:p>
             <a:fld id="{E2F1ADB1-43E6-4CC5-8BA6-A3F5A7E6EF55}" type="datetime1">
               <a:rPr lang="es-CO" smtClean="0"/>
-              <a:t>10/08/2026</a:t>
+              <a:t>17/08/2026</a:t>
             </a:fld>
             <a:endParaRPr lang="es-CO"/>
           </a:p>
@@ -6720,7 +6726,7 @@
           <a:p>
             <a:fld id="{78FAE389-1891-4C1C-AE7B-96446A92669F}" type="datetime1">
               <a:rPr lang="es-CO" smtClean="0"/>
-              <a:t>10/08/2026</a:t>
+              <a:t>17/08/2026</a:t>
             </a:fld>
             <a:endParaRPr lang="es-CO" dirty="0"/>
           </a:p>
@@ -9567,8 +9573,8 @@
           </a:p>
         </p:txBody>
       </p:sp>
-      <mc:AlternateContent xmlns:mc="http://schemas.openxmlformats.org/markup-compatibility/2006">
-        <mc:Choice xmlns:a14="http://schemas.microsoft.com/office/drawing/2010/main" Requires="a14">
+      <mc:AlternateContent xmlns:mc="http://schemas.openxmlformats.org/markup-compatibility/2006" xmlns:a14="http://schemas.microsoft.com/office/drawing/2010/main">
+        <mc:Choice Requires="a14">
           <p:sp>
             <p:nvSpPr>
               <p:cNvPr id="3" name="2 CuadroTexto"/>
@@ -9791,7 +9797,7 @@
             </p:txBody>
           </p:sp>
         </mc:Choice>
-        <mc:Fallback>
+        <mc:Fallback xmlns="">
           <p:sp>
             <p:nvSpPr>
               <p:cNvPr id="3" name="2 CuadroTexto"/>
@@ -9935,8 +9941,8 @@
             <a:chExt cx="2004395" cy="1200329"/>
           </a:xfrm>
         </p:grpSpPr>
-        <mc:AlternateContent xmlns:mc="http://schemas.openxmlformats.org/markup-compatibility/2006" xmlns:a14="http://schemas.microsoft.com/office/drawing/2010/main">
-          <mc:Choice Requires="a14">
+        <mc:AlternateContent xmlns:mc="http://schemas.openxmlformats.org/markup-compatibility/2006">
+          <mc:Choice xmlns:a14="http://schemas.microsoft.com/office/drawing/2010/main" Requires="a14">
             <p:sp>
               <p:nvSpPr>
                 <p:cNvPr id="3" name="2 CuadroTexto"/>
@@ -10071,9 +10077,9 @@
                             <a:solidFill>
                               <a:srgbClr val="00B050"/>
                             </a:solidFill>
-                            <a:latin typeface="Cambria Math"/>
+                            <a:latin typeface="Cambria Math" panose="02040503050406030204" pitchFamily="18" charset="0"/>
                           </a:rPr>
-                          <m:t>1</m:t>
+                          <m:t>7</m:t>
                         </m:r>
                       </m:oMath>
                     </m:oMathPara>
@@ -10087,7 +10093,7 @@
               </p:txBody>
             </p:sp>
           </mc:Choice>
-          <mc:Fallback xmlns="">
+          <mc:Fallback>
             <p:sp>
               <p:nvSpPr>
                 <p:cNvPr id="3" name="2 CuadroTexto"/>
@@ -10171,8 +10177,8 @@
             <a:chExt cx="2195985" cy="1200329"/>
           </a:xfrm>
         </p:grpSpPr>
-        <mc:AlternateContent xmlns:mc="http://schemas.openxmlformats.org/markup-compatibility/2006">
-          <mc:Choice xmlns:a14="http://schemas.microsoft.com/office/drawing/2010/main" Requires="a14">
+        <mc:AlternateContent xmlns:mc="http://schemas.openxmlformats.org/markup-compatibility/2006" xmlns:a14="http://schemas.microsoft.com/office/drawing/2010/main">
+          <mc:Choice Requires="a14">
             <p:sp>
               <p:nvSpPr>
                 <p:cNvPr id="25" name="24 CuadroTexto"/>
@@ -10348,7 +10354,7 @@
               </p:txBody>
             </p:sp>
           </mc:Choice>
-          <mc:Fallback>
+          <mc:Fallback xmlns="">
             <p:sp>
               <p:nvSpPr>
                 <p:cNvPr id="25" name="24 CuadroTexto"/>
@@ -10432,8 +10438,8 @@
             <a:chExt cx="2246448" cy="1477328"/>
           </a:xfrm>
         </p:grpSpPr>
-        <mc:AlternateContent xmlns:mc="http://schemas.openxmlformats.org/markup-compatibility/2006">
-          <mc:Choice xmlns:a14="http://schemas.microsoft.com/office/drawing/2010/main" Requires="a14">
+        <mc:AlternateContent xmlns:mc="http://schemas.openxmlformats.org/markup-compatibility/2006" xmlns:a14="http://schemas.microsoft.com/office/drawing/2010/main">
+          <mc:Choice Requires="a14">
             <p:sp>
               <p:nvSpPr>
                 <p:cNvPr id="28" name="27 CuadroTexto"/>
@@ -10633,7 +10639,7 @@
               </p:txBody>
             </p:sp>
           </mc:Choice>
-          <mc:Fallback>
+          <mc:Fallback xmlns="">
             <p:sp>
               <p:nvSpPr>
                 <p:cNvPr id="28" name="27 CuadroTexto"/>
@@ -10717,8 +10723,8 @@
             <a:chExt cx="2477281" cy="1477328"/>
           </a:xfrm>
         </p:grpSpPr>
-        <mc:AlternateContent xmlns:mc="http://schemas.openxmlformats.org/markup-compatibility/2006">
-          <mc:Choice xmlns:a14="http://schemas.microsoft.com/office/drawing/2010/main" Requires="a14">
+        <mc:AlternateContent xmlns:mc="http://schemas.openxmlformats.org/markup-compatibility/2006" xmlns:a14="http://schemas.microsoft.com/office/drawing/2010/main">
+          <mc:Choice Requires="a14">
             <p:sp>
               <p:nvSpPr>
                 <p:cNvPr id="31" name="30 CuadroTexto"/>
@@ -10910,7 +10916,7 @@
               </p:txBody>
             </p:sp>
           </mc:Choice>
-          <mc:Fallback>
+          <mc:Fallback xmlns="">
             <p:sp>
               <p:nvSpPr>
                 <p:cNvPr id="31" name="30 CuadroTexto"/>
@@ -10994,8 +11000,8 @@
             <a:chExt cx="2470869" cy="1477328"/>
           </a:xfrm>
         </p:grpSpPr>
-        <mc:AlternateContent xmlns:mc="http://schemas.openxmlformats.org/markup-compatibility/2006">
-          <mc:Choice xmlns:a14="http://schemas.microsoft.com/office/drawing/2010/main" Requires="a14">
+        <mc:AlternateContent xmlns:mc="http://schemas.openxmlformats.org/markup-compatibility/2006" xmlns:a14="http://schemas.microsoft.com/office/drawing/2010/main">
+          <mc:Choice Requires="a14">
             <p:sp>
               <p:nvSpPr>
                 <p:cNvPr id="34" name="33 CuadroTexto"/>
@@ -11199,7 +11205,7 @@
               </p:txBody>
             </p:sp>
           </mc:Choice>
-          <mc:Fallback>
+          <mc:Fallback xmlns="">
             <p:sp>
               <p:nvSpPr>
                 <p:cNvPr id="34" name="33 CuadroTexto"/>
@@ -11283,8 +11289,8 @@
             <a:chExt cx="1712648" cy="923330"/>
           </a:xfrm>
         </p:grpSpPr>
-        <mc:AlternateContent xmlns:mc="http://schemas.openxmlformats.org/markup-compatibility/2006">
-          <mc:Choice xmlns:a14="http://schemas.microsoft.com/office/drawing/2010/main" Requires="a14">
+        <mc:AlternateContent xmlns:mc="http://schemas.openxmlformats.org/markup-compatibility/2006" xmlns:a14="http://schemas.microsoft.com/office/drawing/2010/main">
+          <mc:Choice Requires="a14">
             <p:sp>
               <p:nvSpPr>
                 <p:cNvPr id="37" name="36 CuadroTexto"/>
@@ -11393,7 +11399,7 @@
               </p:txBody>
             </p:sp>
           </mc:Choice>
-          <mc:Fallback>
+          <mc:Fallback xmlns="">
             <p:sp>
               <p:nvSpPr>
                 <p:cNvPr id="37" name="36 CuadroTexto"/>
@@ -11481,8 +11487,8 @@
             <a:chExt cx="1904239" cy="923330"/>
           </a:xfrm>
         </p:grpSpPr>
-        <mc:AlternateContent xmlns:mc="http://schemas.openxmlformats.org/markup-compatibility/2006">
-          <mc:Choice xmlns:a14="http://schemas.microsoft.com/office/drawing/2010/main" Requires="a14">
+        <mc:AlternateContent xmlns:mc="http://schemas.openxmlformats.org/markup-compatibility/2006" xmlns:a14="http://schemas.microsoft.com/office/drawing/2010/main">
+          <mc:Choice Requires="a14">
             <p:sp>
               <p:nvSpPr>
                 <p:cNvPr id="40" name="2 CuadroTexto">
@@ -11617,7 +11623,7 @@
               </p:txBody>
             </p:sp>
           </mc:Choice>
-          <mc:Fallback>
+          <mc:Fallback xmlns="">
             <p:sp>
               <p:nvSpPr>
                 <p:cNvPr id="40" name="2 CuadroTexto">
@@ -11719,8 +11725,8 @@
             <a:chExt cx="2004395" cy="1200329"/>
           </a:xfrm>
         </p:grpSpPr>
-        <mc:AlternateContent xmlns:mc="http://schemas.openxmlformats.org/markup-compatibility/2006">
-          <mc:Choice xmlns:a14="http://schemas.microsoft.com/office/drawing/2010/main" Requires="a14">
+        <mc:AlternateContent xmlns:mc="http://schemas.openxmlformats.org/markup-compatibility/2006" xmlns:a14="http://schemas.microsoft.com/office/drawing/2010/main">
+          <mc:Choice Requires="a14">
             <p:sp>
               <p:nvSpPr>
                 <p:cNvPr id="43" name="24 CuadroTexto">
@@ -11878,7 +11884,7 @@
               </p:txBody>
             </p:sp>
           </mc:Choice>
-          <mc:Fallback>
+          <mc:Fallback xmlns="">
             <p:sp>
               <p:nvSpPr>
                 <p:cNvPr id="43" name="24 CuadroTexto">
@@ -11980,8 +11986,8 @@
             <a:chExt cx="2389115" cy="1200329"/>
           </a:xfrm>
         </p:grpSpPr>
-        <mc:AlternateContent xmlns:mc="http://schemas.openxmlformats.org/markup-compatibility/2006">
-          <mc:Choice xmlns:a14="http://schemas.microsoft.com/office/drawing/2010/main" Requires="a14">
+        <mc:AlternateContent xmlns:mc="http://schemas.openxmlformats.org/markup-compatibility/2006" xmlns:a14="http://schemas.microsoft.com/office/drawing/2010/main">
+          <mc:Choice Requires="a14">
             <p:sp>
               <p:nvSpPr>
                 <p:cNvPr id="46" name="27 CuadroTexto">
@@ -12135,7 +12141,7 @@
               </p:txBody>
             </p:sp>
           </mc:Choice>
-          <mc:Fallback>
+          <mc:Fallback xmlns="">
             <p:sp>
               <p:nvSpPr>
                 <p:cNvPr id="46" name="27 CuadroTexto">
@@ -12344,8 +12350,8 @@
           </a:p>
         </p:txBody>
       </p:sp>
-      <mc:AlternateContent xmlns:mc="http://schemas.openxmlformats.org/markup-compatibility/2006">
-        <mc:Choice xmlns:a14="http://schemas.microsoft.com/office/drawing/2010/main" Requires="a14">
+      <mc:AlternateContent xmlns:mc="http://schemas.openxmlformats.org/markup-compatibility/2006" xmlns:a14="http://schemas.microsoft.com/office/drawing/2010/main">
+        <mc:Choice Requires="a14">
           <p:sp>
             <p:nvSpPr>
               <p:cNvPr id="8" name="7 CuadroTexto"/>
@@ -12468,7 +12474,7 @@
             </p:txBody>
           </p:sp>
         </mc:Choice>
-        <mc:Fallback>
+        <mc:Fallback xmlns="">
           <p:sp>
             <p:nvSpPr>
               <p:cNvPr id="8" name="7 CuadroTexto"/>
@@ -12573,8 +12579,8 @@
           </a:p>
         </p:txBody>
       </p:sp>
-      <mc:AlternateContent xmlns:mc="http://schemas.openxmlformats.org/markup-compatibility/2006">
-        <mc:Choice xmlns:a14="http://schemas.microsoft.com/office/drawing/2010/main" Requires="a14">
+      <mc:AlternateContent xmlns:mc="http://schemas.openxmlformats.org/markup-compatibility/2006" xmlns:a14="http://schemas.microsoft.com/office/drawing/2010/main">
+        <mc:Choice Requires="a14">
           <p:sp>
             <p:nvSpPr>
               <p:cNvPr id="23" name="22 CuadroTexto"/>
@@ -12684,7 +12690,7 @@
             </p:txBody>
           </p:sp>
         </mc:Choice>
-        <mc:Fallback>
+        <mc:Fallback xmlns="">
           <p:sp>
             <p:nvSpPr>
               <p:cNvPr id="23" name="22 CuadroTexto"/>
@@ -12842,8 +12848,8 @@
           </a:extLst>
         </p:spPr>
       </p:pic>
-      <mc:AlternateContent xmlns:mc="http://schemas.openxmlformats.org/markup-compatibility/2006">
-        <mc:Choice xmlns:a14="http://schemas.microsoft.com/office/drawing/2010/main" Requires="a14">
+      <mc:AlternateContent xmlns:mc="http://schemas.openxmlformats.org/markup-compatibility/2006" xmlns:a14="http://schemas.microsoft.com/office/drawing/2010/main">
+        <mc:Choice Requires="a14">
           <p:sp>
             <p:nvSpPr>
               <p:cNvPr id="28" name="27 CuadroTexto"/>
@@ -12953,7 +12959,7 @@
             </p:txBody>
           </p:sp>
         </mc:Choice>
-        <mc:Fallback>
+        <mc:Fallback xmlns="">
           <p:sp>
             <p:nvSpPr>
               <p:cNvPr id="28" name="27 CuadroTexto"/>
@@ -14117,7 +14123,7 @@
               <p:nvPr>
                 <p:extLst>
                   <p:ext uri="{D42A27DB-BD31-4B8C-83A1-F6EECF244321}">
-                    <p14:modId xmlns:p14="http://schemas.microsoft.com/office/powerpoint/2010/main" val="3541916920"/>
+                    <p14:modId xmlns:p14="http://schemas.microsoft.com/office/powerpoint/2010/main" val="3244667591"/>
                   </p:ext>
                 </p:extLst>
               </p:nvPr>
@@ -14387,7 +14393,7 @@
                                     <m:ctrlPr>
                                       <a:rPr lang="es-CO" sz="1600" b="0" i="1" smtClean="0">
                                         <a:solidFill>
-                                          <a:srgbClr val="00B050"/>
+                                          <a:srgbClr val="0070C0"/>
                                         </a:solidFill>
                                         <a:latin typeface="Cambria Math" panose="02040503050406030204" pitchFamily="18" charset="0"/>
                                       </a:rPr>
@@ -14397,7 +14403,7 @@
                                     <m:r>
                                       <a:rPr lang="es-MX" sz="1600" b="0" i="1" smtClean="0">
                                         <a:solidFill>
-                                          <a:srgbClr val="00B050"/>
+                                          <a:srgbClr val="0070C0"/>
                                         </a:solidFill>
                                         <a:latin typeface="Cambria Math"/>
                                       </a:rPr>
@@ -14409,7 +14415,7 @@
                                         <m:ctrlPr>
                                           <a:rPr lang="es-MX" sz="1600" b="0" i="1" smtClean="0">
                                             <a:solidFill>
-                                              <a:srgbClr val="00B050"/>
+                                              <a:srgbClr val="0070C0"/>
                                             </a:solidFill>
                                             <a:latin typeface="Cambria Math" panose="02040503050406030204" pitchFamily="18" charset="0"/>
                                           </a:rPr>
@@ -14421,7 +14427,7 @@
                                             <m:ctrlPr>
                                               <a:rPr lang="es-MX" sz="1600" b="0" i="1" smtClean="0">
                                                 <a:solidFill>
-                                                  <a:srgbClr val="00B050"/>
+                                                  <a:srgbClr val="0070C0"/>
                                                 </a:solidFill>
                                                 <a:latin typeface="Cambria Math" panose="02040503050406030204" pitchFamily="18" charset="0"/>
                                               </a:rPr>
@@ -14431,7 +14437,7 @@
                                             <m:r>
                                               <a:rPr lang="es-MX" sz="1600" b="0" i="1" smtClean="0">
                                                 <a:solidFill>
-                                                  <a:srgbClr val="00B050"/>
+                                                  <a:srgbClr val="0070C0"/>
                                                 </a:solidFill>
                                                 <a:latin typeface="Cambria Math"/>
                                               </a:rPr>
@@ -14440,7 +14446,7 @@
                                             <m:r>
                                               <a:rPr lang="es-MX" sz="1600" b="0" i="1" smtClean="0">
                                                 <a:solidFill>
-                                                  <a:srgbClr val="00B050"/>
+                                                  <a:srgbClr val="0070C0"/>
                                                 </a:solidFill>
                                                 <a:latin typeface="Cambria Math"/>
                                               </a:rPr>
@@ -14453,7 +14459,7 @@
                                         <m:r>
                                           <a:rPr lang="es-MX" sz="1600" b="0" i="1" smtClean="0">
                                             <a:solidFill>
-                                              <a:srgbClr val="00B050"/>
+                                              <a:srgbClr val="0070C0"/>
                                             </a:solidFill>
                                             <a:latin typeface="Cambria Math"/>
                                           </a:rPr>
@@ -14464,7 +14470,7 @@
                                     <m:r>
                                       <a:rPr lang="es-MX" sz="1600" b="0" i="1" smtClean="0">
                                         <a:solidFill>
-                                          <a:srgbClr val="00B050"/>
+                                          <a:srgbClr val="0070C0"/>
                                         </a:solidFill>
                                         <a:latin typeface="Cambria Math"/>
                                       </a:rPr>
@@ -14477,7 +14483,7 @@
                                         <m:ctrlPr>
                                           <a:rPr lang="es-MX" sz="1600" b="0" i="1" smtClean="0">
                                             <a:solidFill>
-                                              <a:srgbClr val="00B050"/>
+                                              <a:srgbClr val="0070C0"/>
                                             </a:solidFill>
                                             <a:latin typeface="Cambria Math" panose="02040503050406030204" pitchFamily="18" charset="0"/>
                                           </a:rPr>
@@ -14490,7 +14496,7 @@
                                             <m:ctrlPr>
                                               <a:rPr lang="es-MX" sz="1600" b="0" i="1" smtClean="0">
                                                 <a:solidFill>
-                                                  <a:srgbClr val="00B050"/>
+                                                  <a:srgbClr val="0070C0"/>
                                                 </a:solidFill>
                                                 <a:latin typeface="Cambria Math" panose="02040503050406030204" pitchFamily="18" charset="0"/>
                                               </a:rPr>
@@ -14500,7 +14506,7 @@
                                             <m:r>
                                               <a:rPr lang="es-MX" sz="1600" b="0" i="1" smtClean="0">
                                                 <a:solidFill>
-                                                  <a:srgbClr val="00B050"/>
+                                                  <a:srgbClr val="0070C0"/>
                                                 </a:solidFill>
                                                 <a:latin typeface="Cambria Math"/>
                                               </a:rPr>
@@ -14509,7 +14515,7 @@
                                             <m:r>
                                               <a:rPr lang="es-MX" sz="1600" b="0" i="1" smtClean="0">
                                                 <a:solidFill>
-                                                  <a:srgbClr val="00B050"/>
+                                                  <a:srgbClr val="0070C0"/>
                                                 </a:solidFill>
                                                 <a:latin typeface="Cambria Math"/>
                                               </a:rPr>
@@ -14518,7 +14524,7 @@
                                             <m:r>
                                               <a:rPr lang="es-MX" sz="1600" b="0" i="1" smtClean="0">
                                                 <a:solidFill>
-                                                  <a:srgbClr val="00B050"/>
+                                                  <a:srgbClr val="0070C0"/>
                                                 </a:solidFill>
                                                 <a:latin typeface="Cambria Math"/>
                                               </a:rPr>
@@ -14529,7 +14535,7 @@
                                             <m:r>
                                               <a:rPr lang="es-MX" sz="1600" b="0" i="1" smtClean="0">
                                                 <a:solidFill>
-                                                  <a:srgbClr val="00B050"/>
+                                                  <a:srgbClr val="0070C0"/>
                                                 </a:solidFill>
                                                 <a:latin typeface="Cambria Math"/>
                                               </a:rPr>
@@ -14538,7 +14544,7 @@
                                             <m:r>
                                               <a:rPr lang="es-MX" sz="1600" b="0" i="1" smtClean="0">
                                                 <a:solidFill>
-                                                  <a:srgbClr val="00B050"/>
+                                                  <a:srgbClr val="0070C0"/>
                                                 </a:solidFill>
                                                 <a:latin typeface="Cambria Math"/>
                                               </a:rPr>
@@ -14547,7 +14553,7 @@
                                             <m:r>
                                               <a:rPr lang="es-MX" sz="1600" b="0" i="1" smtClean="0">
                                                 <a:solidFill>
-                                                  <a:srgbClr val="00B050"/>
+                                                  <a:srgbClr val="0070C0"/>
                                                 </a:solidFill>
                                                 <a:latin typeface="Cambria Math"/>
                                               </a:rPr>
@@ -14556,7 +14562,7 @@
                                             <m:r>
                                               <a:rPr lang="es-MX" sz="1600" b="0" i="1" smtClean="0">
                                                 <a:solidFill>
-                                                  <a:srgbClr val="00B050"/>
+                                                  <a:srgbClr val="0070C0"/>
                                                 </a:solidFill>
                                                 <a:latin typeface="Cambria Math"/>
                                               </a:rPr>
@@ -14565,7 +14571,7 @@
                                             <m:r>
                                               <a:rPr lang="es-MX" sz="1600" b="0" i="1" smtClean="0">
                                                 <a:solidFill>
-                                                  <a:srgbClr val="00B050"/>
+                                                  <a:srgbClr val="0070C0"/>
                                                 </a:solidFill>
                                                 <a:latin typeface="Cambria Math"/>
                                               </a:rPr>
@@ -14574,7 +14580,7 @@
                                             <m:r>
                                               <a:rPr lang="es-MX" sz="1600" b="0" i="1" smtClean="0">
                                                 <a:solidFill>
-                                                  <a:srgbClr val="00B050"/>
+                                                  <a:srgbClr val="0070C0"/>
                                                 </a:solidFill>
                                                 <a:latin typeface="Cambria Math"/>
                                               </a:rPr>
@@ -14583,7 +14589,7 @@
                                             <m:r>
                                               <a:rPr lang="es-MX" sz="1600" b="0" i="1" smtClean="0">
                                                 <a:solidFill>
-                                                  <a:srgbClr val="00B050"/>
+                                                  <a:srgbClr val="0070C0"/>
                                                 </a:solidFill>
                                                 <a:latin typeface="Cambria Math"/>
                                               </a:rPr>
@@ -14592,7 +14598,7 @@
                                             <m:r>
                                               <a:rPr lang="es-MX" sz="1600" b="0" i="1" smtClean="0">
                                                 <a:solidFill>
-                                                  <a:srgbClr val="00B050"/>
+                                                  <a:srgbClr val="0070C0"/>
                                                 </a:solidFill>
                                                 <a:latin typeface="Cambria Math"/>
                                               </a:rPr>
@@ -14601,7 +14607,7 @@
                                             <m:r>
                                               <a:rPr lang="es-MX" sz="1600" b="0" i="1" smtClean="0">
                                                 <a:solidFill>
-                                                  <a:srgbClr val="00B050"/>
+                                                  <a:srgbClr val="0070C0"/>
                                                 </a:solidFill>
                                                 <a:latin typeface="Cambria Math"/>
                                               </a:rPr>
@@ -14614,7 +14620,7 @@
                                     <m:r>
                                       <a:rPr lang="es-MX" sz="1600" b="0" i="1" smtClean="0">
                                         <a:solidFill>
-                                          <a:srgbClr val="00B050"/>
+                                          <a:srgbClr val="0070C0"/>
                                         </a:solidFill>
                                         <a:latin typeface="Cambria Math"/>
                                       </a:rPr>
@@ -14623,7 +14629,7 @@
                                     <m:r>
                                       <a:rPr lang="es-MX" sz="1600" b="0" i="1" smtClean="0">
                                         <a:solidFill>
-                                          <a:srgbClr val="00B050"/>
+                                          <a:srgbClr val="0070C0"/>
                                         </a:solidFill>
                                         <a:latin typeface="Cambria Math"/>
                                       </a:rPr>
@@ -14636,7 +14642,7 @@
                           </a14:m>
                           <a:endParaRPr lang="es-CO" sz="1600" b="0" dirty="0">
                             <a:solidFill>
-                              <a:srgbClr val="00B050"/>
+                              <a:srgbClr val="0070C0"/>
                             </a:solidFill>
                           </a:endParaRPr>
                         </a:p>
@@ -14667,7 +14673,7 @@
                                     <m:ctrlPr>
                                       <a:rPr lang="es-CO" sz="1600" b="0" i="1" smtClean="0">
                                         <a:solidFill>
-                                          <a:srgbClr val="00B050"/>
+                                          <a:srgbClr val="0070C0"/>
                                         </a:solidFill>
                                         <a:latin typeface="Cambria Math" panose="02040503050406030204" pitchFamily="18" charset="0"/>
                                       </a:rPr>
@@ -14677,7 +14683,7 @@
                                     <m:r>
                                       <a:rPr lang="es-MX" sz="1600" b="0" i="1" smtClean="0">
                                         <a:solidFill>
-                                          <a:srgbClr val="00B050"/>
+                                          <a:srgbClr val="0070C0"/>
                                         </a:solidFill>
                                         <a:latin typeface="Cambria Math"/>
                                       </a:rPr>
@@ -14690,7 +14696,7 @@
                                         <m:ctrlPr>
                                           <a:rPr lang="es-CO" sz="1600" b="0" i="1" smtClean="0">
                                             <a:solidFill>
-                                              <a:srgbClr val="00B050"/>
+                                              <a:srgbClr val="0070C0"/>
                                             </a:solidFill>
                                             <a:latin typeface="Cambria Math" panose="02040503050406030204" pitchFamily="18" charset="0"/>
                                           </a:rPr>
@@ -14700,7 +14706,16 @@
                                         <m:r>
                                           <a:rPr lang="es-MX" sz="1600" b="0" i="1" smtClean="0">
                                             <a:solidFill>
-                                              <a:srgbClr val="00B050"/>
+                                              <a:srgbClr val="0070C0"/>
+                                            </a:solidFill>
+                                            <a:latin typeface="Cambria Math" panose="02040503050406030204" pitchFamily="18" charset="0"/>
+                                          </a:rPr>
+                                          <m:t>(</m:t>
+                                        </m:r>
+                                        <m:r>
+                                          <a:rPr lang="es-MX" sz="1600" b="0" i="1" smtClean="0">
+                                            <a:solidFill>
+                                              <a:srgbClr val="0070C0"/>
                                             </a:solidFill>
                                             <a:latin typeface="Cambria Math"/>
                                           </a:rPr>
@@ -14711,7 +14726,7 @@
                                         <m:r>
                                           <a:rPr lang="es-MX" sz="1600" b="0" i="1" smtClean="0">
                                             <a:solidFill>
-                                              <a:srgbClr val="00B050"/>
+                                              <a:srgbClr val="0070C0"/>
                                             </a:solidFill>
                                             <a:latin typeface="Cambria Math"/>
                                           </a:rPr>
@@ -14719,12 +14734,21 @@
                                         </m:r>
                                       </m:sup>
                                     </m:sSup>
+                                    <m:r>
+                                      <a:rPr lang="es-MX" sz="1600" b="0" i="1" smtClean="0">
+                                        <a:solidFill>
+                                          <a:srgbClr val="0070C0"/>
+                                        </a:solidFill>
+                                        <a:latin typeface="Cambria Math" panose="02040503050406030204" pitchFamily="18" charset="0"/>
+                                      </a:rPr>
+                                      <m:t>)</m:t>
+                                    </m:r>
                                   </m:sup>
                                 </m:sSup>
                                 <m:r>
                                   <a:rPr lang="es-MX" sz="1600" b="0" i="1" smtClean="0">
                                     <a:solidFill>
-                                      <a:srgbClr val="00B050"/>
+                                      <a:srgbClr val="0070C0"/>
                                     </a:solidFill>
                                     <a:latin typeface="Cambria Math"/>
                                   </a:rPr>
@@ -14733,7 +14757,7 @@
                                 <m:r>
                                   <a:rPr lang="es-MX" sz="1600" b="0" i="1" smtClean="0">
                                     <a:solidFill>
-                                      <a:srgbClr val="00B050"/>
+                                      <a:srgbClr val="0070C0"/>
                                     </a:solidFill>
                                     <a:latin typeface="Cambria Math"/>
                                   </a:rPr>
@@ -14742,7 +14766,7 @@
                                 <m:r>
                                   <a:rPr lang="es-MX" sz="1600" b="0" i="1" smtClean="0">
                                     <a:solidFill>
-                                      <a:srgbClr val="00B050"/>
+                                      <a:srgbClr val="0070C0"/>
                                     </a:solidFill>
                                     <a:latin typeface="Cambria Math"/>
                                   </a:rPr>
@@ -14753,7 +14777,7 @@
                                     <m:ctrlPr>
                                       <a:rPr lang="es-MX" sz="1600" b="0" i="1" smtClean="0">
                                         <a:solidFill>
-                                          <a:srgbClr val="00B050"/>
+                                          <a:srgbClr val="0070C0"/>
                                         </a:solidFill>
                                         <a:latin typeface="Cambria Math" panose="02040503050406030204" pitchFamily="18" charset="0"/>
                                       </a:rPr>
@@ -14763,7 +14787,7 @@
                                     <m:r>
                                       <a:rPr lang="es-MX" sz="1600" b="0" i="1" smtClean="0">
                                         <a:solidFill>
-                                          <a:srgbClr val="00B050"/>
+                                          <a:srgbClr val="0070C0"/>
                                         </a:solidFill>
                                         <a:latin typeface="Cambria Math"/>
                                       </a:rPr>
@@ -14776,7 +14800,7 @@
                                         <m:ctrlPr>
                                           <a:rPr lang="es-MX" sz="1600" b="0" i="1" smtClean="0">
                                             <a:solidFill>
-                                              <a:srgbClr val="00B050"/>
+                                              <a:srgbClr val="0070C0"/>
                                             </a:solidFill>
                                             <a:latin typeface="Cambria Math" panose="02040503050406030204" pitchFamily="18" charset="0"/>
                                           </a:rPr>
@@ -14786,7 +14810,7 @@
                                         <m:r>
                                           <a:rPr lang="es-MX" sz="1600" b="0" i="1" smtClean="0">
                                             <a:solidFill>
-                                              <a:srgbClr val="00B050"/>
+                                              <a:srgbClr val="0070C0"/>
                                             </a:solidFill>
                                             <a:latin typeface="Cambria Math"/>
                                           </a:rPr>
@@ -14797,7 +14821,7 @@
                                         <m:r>
                                           <a:rPr lang="es-MX" sz="1600" b="0" i="1" smtClean="0">
                                             <a:solidFill>
-                                              <a:srgbClr val="00B050"/>
+                                              <a:srgbClr val="0070C0"/>
                                             </a:solidFill>
                                             <a:latin typeface="Cambria Math"/>
                                           </a:rPr>
@@ -14806,7 +14830,7 @@
                                         <m:r>
                                           <a:rPr lang="es-MX" sz="1600" b="0" i="1" smtClean="0">
                                             <a:solidFill>
-                                              <a:srgbClr val="00B050"/>
+                                              <a:srgbClr val="0070C0"/>
                                             </a:solidFill>
                                             <a:latin typeface="Cambria Math"/>
                                           </a:rPr>
@@ -14819,7 +14843,7 @@
                                 <m:r>
                                   <a:rPr lang="es-MX" sz="1600" b="0" i="1" smtClean="0">
                                     <a:solidFill>
-                                      <a:srgbClr val="00B050"/>
+                                      <a:srgbClr val="0070C0"/>
                                     </a:solidFill>
                                     <a:latin typeface="Cambria Math"/>
                                   </a:rPr>
@@ -14830,7 +14854,7 @@
                           </a14:m>
                           <a:endParaRPr lang="es-CO" sz="1600" b="0" dirty="0">
                             <a:solidFill>
-                              <a:srgbClr val="00B050"/>
+                              <a:srgbClr val="0070C0"/>
                             </a:solidFill>
                           </a:endParaRPr>
                         </a:p>
@@ -14972,7 +14996,7 @@
                                     <m:ctrlPr>
                                       <a:rPr lang="es-CO" sz="1600" b="0" i="1" smtClean="0">
                                         <a:solidFill>
-                                          <a:srgbClr val="00B050"/>
+                                          <a:srgbClr val="0070C0"/>
                                         </a:solidFill>
                                         <a:latin typeface="Cambria Math" panose="02040503050406030204" pitchFamily="18" charset="0"/>
                                       </a:rPr>
@@ -14984,7 +15008,7 @@
                                         <m:ctrlPr>
                                           <a:rPr lang="es-MX" sz="1600" b="0" i="1" smtClean="0">
                                             <a:solidFill>
-                                              <a:srgbClr val="00B050"/>
+                                              <a:srgbClr val="0070C0"/>
                                             </a:solidFill>
                                             <a:latin typeface="Cambria Math" panose="02040503050406030204" pitchFamily="18" charset="0"/>
                                           </a:rPr>
@@ -14996,7 +15020,7 @@
                                             <m:ctrlPr>
                                               <a:rPr lang="es-MX" sz="1600" b="0" i="1" smtClean="0">
                                                 <a:solidFill>
-                                                  <a:srgbClr val="00B050"/>
+                                                  <a:srgbClr val="0070C0"/>
                                                 </a:solidFill>
                                                 <a:latin typeface="Cambria Math" panose="02040503050406030204" pitchFamily="18" charset="0"/>
                                               </a:rPr>
@@ -15006,7 +15030,7 @@
                                             <m:r>
                                               <a:rPr lang="es-MX" sz="1600" b="0" i="1" smtClean="0">
                                                 <a:solidFill>
-                                                  <a:srgbClr val="00B050"/>
+                                                  <a:srgbClr val="0070C0"/>
                                                 </a:solidFill>
                                                 <a:latin typeface="Cambria Math"/>
                                               </a:rPr>
@@ -15017,7 +15041,7 @@
                                             <m:r>
                                               <a:rPr lang="es-MX" sz="1600" b="0" i="1" smtClean="0">
                                                 <a:solidFill>
-                                                  <a:srgbClr val="00B050"/>
+                                                  <a:srgbClr val="0070C0"/>
                                                 </a:solidFill>
                                                 <a:latin typeface="Cambria Math"/>
                                               </a:rPr>
@@ -15032,7 +15056,7 @@
                                     <m:r>
                                       <a:rPr lang="es-MX" sz="1600" b="0" i="1" smtClean="0">
                                         <a:solidFill>
-                                          <a:srgbClr val="00B050"/>
+                                          <a:srgbClr val="0070C0"/>
                                         </a:solidFill>
                                         <a:latin typeface="Cambria Math"/>
                                       </a:rPr>
@@ -15043,7 +15067,7 @@
                                 <m:r>
                                   <a:rPr lang="es-MX" sz="1600" b="0" i="1" smtClean="0">
                                     <a:solidFill>
-                                      <a:srgbClr val="00B050"/>
+                                      <a:srgbClr val="0070C0"/>
                                     </a:solidFill>
                                     <a:latin typeface="Cambria Math"/>
                                   </a:rPr>
@@ -15052,7 +15076,7 @@
                                 <m:r>
                                   <a:rPr lang="es-MX" sz="1600" b="0" i="1" smtClean="0">
                                     <a:solidFill>
-                                      <a:srgbClr val="00B050"/>
+                                      <a:srgbClr val="0070C0"/>
                                     </a:solidFill>
                                     <a:latin typeface="Cambria Math"/>
                                   </a:rPr>
@@ -15061,7 +15085,7 @@
                                 <m:r>
                                   <a:rPr lang="es-MX" sz="1600" b="0" i="1" smtClean="0">
                                     <a:solidFill>
-                                      <a:srgbClr val="00B050"/>
+                                      <a:srgbClr val="0070C0"/>
                                     </a:solidFill>
                                     <a:latin typeface="Cambria Math"/>
                                   </a:rPr>
@@ -15072,7 +15096,7 @@
                           </a14:m>
                           <a:endParaRPr lang="es-CO" sz="1600" b="0" dirty="0">
                             <a:solidFill>
-                              <a:srgbClr val="00B050"/>
+                              <a:srgbClr val="0070C0"/>
                             </a:solidFill>
                           </a:endParaRPr>
                         </a:p>
@@ -15288,7 +15312,7 @@
                                 <m:r>
                                   <a:rPr lang="es-MX" sz="1600" b="0" i="1" smtClean="0">
                                     <a:solidFill>
-                                      <a:srgbClr val="00B050"/>
+                                      <a:srgbClr val="0070C0"/>
                                     </a:solidFill>
                                     <a:latin typeface="Cambria Math"/>
                                   </a:rPr>
@@ -15297,7 +15321,7 @@
                                 <m:r>
                                   <a:rPr lang="es-MX" sz="1600" b="0" i="1" smtClean="0">
                                     <a:solidFill>
-                                      <a:srgbClr val="00B050"/>
+                                      <a:srgbClr val="0070C0"/>
                                     </a:solidFill>
                                     <a:latin typeface="Cambria Math"/>
                                   </a:rPr>
@@ -15306,7 +15330,7 @@
                                 <m:r>
                                   <a:rPr lang="es-MX" sz="1600" b="0" i="1" smtClean="0">
                                     <a:solidFill>
-                                      <a:srgbClr val="00B050"/>
+                                      <a:srgbClr val="0070C0"/>
                                     </a:solidFill>
                                     <a:latin typeface="Cambria Math"/>
                                   </a:rPr>
@@ -15315,7 +15339,7 @@
                                 <m:r>
                                   <a:rPr lang="es-MX" sz="1600" b="0" i="1" smtClean="0">
                                     <a:solidFill>
-                                      <a:srgbClr val="00B050"/>
+                                      <a:srgbClr val="0070C0"/>
                                     </a:solidFill>
                                     <a:latin typeface="Cambria Math"/>
                                   </a:rPr>
@@ -15326,7 +15350,7 @@
                                     <m:ctrlPr>
                                       <a:rPr lang="es-MX" sz="1600" b="0" i="1" smtClean="0">
                                         <a:solidFill>
-                                          <a:srgbClr val="00B050"/>
+                                          <a:srgbClr val="0070C0"/>
                                         </a:solidFill>
                                         <a:latin typeface="Cambria Math" panose="02040503050406030204" pitchFamily="18" charset="0"/>
                                       </a:rPr>
@@ -15336,7 +15360,7 @@
                                     <m:r>
                                       <a:rPr lang="es-MX" sz="1600" b="0" i="1" smtClean="0">
                                         <a:solidFill>
-                                          <a:srgbClr val="00B050"/>
+                                          <a:srgbClr val="0070C0"/>
                                         </a:solidFill>
                                         <a:latin typeface="Cambria Math"/>
                                       </a:rPr>
@@ -15345,7 +15369,7 @@
                                     <m:r>
                                       <a:rPr lang="es-MX" sz="1600" b="0" i="1" smtClean="0">
                                         <a:solidFill>
-                                          <a:srgbClr val="00B050"/>
+                                          <a:srgbClr val="0070C0"/>
                                         </a:solidFill>
                                         <a:latin typeface="Cambria Math"/>
                                       </a:rPr>
@@ -15354,7 +15378,7 @@
                                     <m:r>
                                       <a:rPr lang="es-MX" sz="1600" b="0" i="1" smtClean="0">
                                         <a:solidFill>
-                                          <a:srgbClr val="00B050"/>
+                                          <a:srgbClr val="0070C0"/>
                                         </a:solidFill>
                                         <a:latin typeface="Cambria Math"/>
                                       </a:rPr>
@@ -15365,7 +15389,7 @@
                                         <m:ctrlPr>
                                           <a:rPr lang="es-MX" sz="1600" b="0" i="1" smtClean="0">
                                             <a:solidFill>
-                                              <a:srgbClr val="00B050"/>
+                                              <a:srgbClr val="0070C0"/>
                                             </a:solidFill>
                                             <a:latin typeface="Cambria Math" panose="02040503050406030204" pitchFamily="18" charset="0"/>
                                           </a:rPr>
@@ -15375,7 +15399,7 @@
                                         <m:r>
                                           <a:rPr lang="es-MX" sz="1600" b="0" i="1" smtClean="0">
                                             <a:solidFill>
-                                              <a:srgbClr val="00B050"/>
+                                              <a:srgbClr val="0070C0"/>
                                             </a:solidFill>
                                             <a:latin typeface="Cambria Math"/>
                                           </a:rPr>
@@ -15384,7 +15408,7 @@
                                         <m:r>
                                           <a:rPr lang="es-MX" sz="1600" b="0" i="1" smtClean="0">
                                             <a:solidFill>
-                                              <a:srgbClr val="00B050"/>
+                                              <a:srgbClr val="0070C0"/>
                                             </a:solidFill>
                                             <a:latin typeface="Cambria Math"/>
                                           </a:rPr>
@@ -15397,7 +15421,7 @@
                                 <m:r>
                                   <a:rPr lang="es-MX" sz="1600" b="0" i="1" smtClean="0">
                                     <a:solidFill>
-                                      <a:srgbClr val="00B050"/>
+                                      <a:srgbClr val="0070C0"/>
                                     </a:solidFill>
                                     <a:latin typeface="Cambria Math"/>
                                   </a:rPr>
@@ -15406,7 +15430,7 @@
                                 <m:r>
                                   <a:rPr lang="es-MX" sz="1600" b="0" i="1" smtClean="0">
                                     <a:solidFill>
-                                      <a:srgbClr val="00B050"/>
+                                      <a:srgbClr val="0070C0"/>
                                     </a:solidFill>
                                     <a:latin typeface="Cambria Math"/>
                                   </a:rPr>
@@ -15415,7 +15439,7 @@
                                 <m:r>
                                   <a:rPr lang="es-MX" sz="1600" b="0" i="1" smtClean="0">
                                     <a:solidFill>
-                                      <a:srgbClr val="00B050"/>
+                                      <a:srgbClr val="0070C0"/>
                                     </a:solidFill>
                                     <a:latin typeface="Cambria Math"/>
                                   </a:rPr>
@@ -15424,7 +15448,7 @@
                                 <m:r>
                                   <a:rPr lang="es-MX" sz="1600" b="0" i="1" smtClean="0">
                                     <a:solidFill>
-                                      <a:srgbClr val="00B050"/>
+                                      <a:srgbClr val="0070C0"/>
                                     </a:solidFill>
                                     <a:latin typeface="Cambria Math"/>
                                   </a:rPr>
@@ -15433,7 +15457,7 @@
                                 <m:r>
                                   <a:rPr lang="es-MX" sz="1600" b="0" i="1" smtClean="0">
                                     <a:solidFill>
-                                      <a:srgbClr val="00B050"/>
+                                      <a:srgbClr val="0070C0"/>
                                     </a:solidFill>
                                     <a:latin typeface="Cambria Math"/>
                                   </a:rPr>
@@ -15442,7 +15466,7 @@
                                 <m:r>
                                   <a:rPr lang="es-MX" sz="1600" b="0" i="1" smtClean="0">
                                     <a:solidFill>
-                                      <a:srgbClr val="00B050"/>
+                                      <a:srgbClr val="0070C0"/>
                                     </a:solidFill>
                                     <a:latin typeface="Cambria Math"/>
                                   </a:rPr>
@@ -15453,7 +15477,7 @@
                           </a14:m>
                           <a:endParaRPr lang="es-CO" sz="1600" b="0" dirty="0">
                             <a:solidFill>
-                              <a:srgbClr val="00B050"/>
+                              <a:srgbClr val="0070C0"/>
                             </a:solidFill>
                           </a:endParaRPr>
                         </a:p>
@@ -15481,7 +15505,7 @@
               <p:nvPr>
                 <p:extLst>
                   <p:ext uri="{D42A27DB-BD31-4B8C-83A1-F6EECF244321}">
-                    <p14:modId xmlns:p14="http://schemas.microsoft.com/office/powerpoint/2010/main" val="3541916920"/>
+                    <p14:modId xmlns:p14="http://schemas.microsoft.com/office/powerpoint/2010/main" val="3244667591"/>
                   </p:ext>
                 </p:extLst>
               </p:nvPr>
@@ -17653,7 +17677,7 @@
           <p:nvPr>
             <p:extLst>
               <p:ext uri="{D42A27DB-BD31-4B8C-83A1-F6EECF244321}">
-                <p14:modId xmlns:p14="http://schemas.microsoft.com/office/powerpoint/2010/main" val="3228859433"/>
+                <p14:modId xmlns:p14="http://schemas.microsoft.com/office/powerpoint/2010/main" val="2965363986"/>
               </p:ext>
             </p:extLst>
           </p:nvPr>
@@ -18160,15 +18184,6 @@
                         </a:rPr>
                         <a:t>and</a:t>
                       </a:r>
-                      <a:r>
-                        <a:rPr lang="es-CO" sz="1600" baseline="0" dirty="0">
-                          <a:latin typeface="Consolas" panose="020B0609020204030204" pitchFamily="49" charset="0"/>
-                        </a:rPr>
-                        <a:t> ó &amp;</a:t>
-                      </a:r>
-                      <a:endParaRPr lang="es-CO" sz="1600" dirty="0">
-                        <a:latin typeface="Consolas" panose="020B0609020204030204" pitchFamily="49" charset="0"/>
-                      </a:endParaRPr>
                     </a:p>
                   </a:txBody>
                   <a:tcPr>
@@ -18401,16 +18416,10 @@
                     <a:p>
                       <a:pPr algn="ctr"/>
                       <a:r>
-                        <a:rPr lang="es-CO" sz="1600" dirty="0">
+                        <a:rPr lang="es-CO" sz="1600" dirty="0" err="1">
                           <a:latin typeface="Consolas" panose="020B0609020204030204" pitchFamily="49" charset="0"/>
                         </a:rPr>
                         <a:t>or</a:t>
-                      </a:r>
-                      <a:r>
-                        <a:rPr lang="es-CO" sz="1600" baseline="0" dirty="0">
-                          <a:latin typeface="Consolas" panose="020B0609020204030204" pitchFamily="49" charset="0"/>
-                        </a:rPr>
-                        <a:t> ó |</a:t>
                       </a:r>
                       <a:endParaRPr lang="es-CO" sz="1600" dirty="0">
                         <a:latin typeface="Consolas" panose="020B0609020204030204" pitchFamily="49" charset="0"/>
@@ -21314,7 +21323,7 @@
           <p:nvPr>
             <p:extLst>
               <p:ext uri="{D42A27DB-BD31-4B8C-83A1-F6EECF244321}">
-                <p14:modId xmlns:p14="http://schemas.microsoft.com/office/powerpoint/2010/main" val="2844448853"/>
+                <p14:modId xmlns:p14="http://schemas.microsoft.com/office/powerpoint/2010/main" val="1255463270"/>
               </p:ext>
             </p:extLst>
           </p:nvPr>
@@ -21969,7 +21978,7 @@
                         <a:rPr lang="es-CO" sz="1600" dirty="0">
                           <a:latin typeface="Consolas" panose="020B0609020204030204" pitchFamily="49" charset="0"/>
                         </a:rPr>
-                        <a:t>** ó ^</a:t>
+                        <a:t>**</a:t>
                       </a:r>
                     </a:p>
                   </a:txBody>
@@ -23388,7 +23397,7 @@
             <p:spPr>
               <a:xfrm>
                 <a:off x="171898" y="2227391"/>
-                <a:ext cx="3772636" cy="1789977"/>
+                <a:ext cx="3863558" cy="1789977"/>
               </a:xfrm>
               <a:prstGeom prst="rect">
                 <a:avLst/>
@@ -23436,10 +23445,22 @@
                       </m:e>
                     </m:d>
                     <m:r>
+                      <a:rPr lang="es-MX" b="0" i="1" smtClean="0">
+                        <a:latin typeface="Cambria Math" panose="02040503050406030204" pitchFamily="18" charset="0"/>
+                      </a:rPr>
+                      <m:t> </m:t>
+                    </m:r>
+                    <m:r>
                       <a:rPr lang="es-MX" b="0" i="1">
                         <a:latin typeface="Cambria Math"/>
                       </a:rPr>
                       <m:t>𝑜𝑟</m:t>
+                    </m:r>
+                    <m:r>
+                      <a:rPr lang="es-MX" b="0" i="1" smtClean="0">
+                        <a:latin typeface="Cambria Math" panose="02040503050406030204" pitchFamily="18" charset="0"/>
+                      </a:rPr>
+                      <m:t> </m:t>
                     </m:r>
                     <m:d>
                       <m:dPr>
@@ -23506,10 +23527,22 @@
                       </m:e>
                     </m:d>
                     <m:r>
+                      <a:rPr lang="es-MX" b="0" i="1" smtClean="0">
+                        <a:latin typeface="Cambria Math" panose="02040503050406030204" pitchFamily="18" charset="0"/>
+                      </a:rPr>
+                      <m:t> </m:t>
+                    </m:r>
+                    <m:r>
                       <a:rPr lang="es-MX" i="1">
                         <a:latin typeface="Cambria Math"/>
                       </a:rPr>
                       <m:t>𝑎𝑛𝑑</m:t>
+                    </m:r>
+                    <m:r>
+                      <a:rPr lang="es-MX" b="0" i="1" smtClean="0">
+                        <a:latin typeface="Cambria Math" panose="02040503050406030204" pitchFamily="18" charset="0"/>
+                      </a:rPr>
+                      <m:t> </m:t>
                     </m:r>
                     <m:d>
                       <m:dPr>
@@ -23563,23 +23596,46 @@
                 </a:pPr>
                 <a14:m>
                   <m:oMath xmlns:m="http://schemas.openxmlformats.org/officeDocument/2006/math">
+                    <m:d>
+                      <m:dPr>
+                        <m:ctrlPr>
+                          <a:rPr lang="es-MX" i="1">
+                            <a:latin typeface="Cambria Math"/>
+                          </a:rPr>
+                        </m:ctrlPr>
+                      </m:dPr>
+                      <m:e>
+                        <m:r>
+                          <a:rPr lang="es-MX" i="1">
+                            <a:latin typeface="Cambria Math"/>
+                          </a:rPr>
+                          <m:t>𝑍</m:t>
+                        </m:r>
+                        <m:r>
+                          <a:rPr lang="es-MX" i="1">
+                            <a:latin typeface="Cambria Math"/>
+                          </a:rPr>
+                          <m:t> &gt; 50</m:t>
+                        </m:r>
+                      </m:e>
+                    </m:d>
                     <m:r>
-                      <a:rPr lang="es-MX" i="1">
-                        <a:latin typeface="Cambria Math"/>
+                      <a:rPr lang="es-MX" b="0" i="1" smtClean="0">
+                        <a:latin typeface="Cambria Math" panose="02040503050406030204" pitchFamily="18" charset="0"/>
                       </a:rPr>
-                      <m:t>(</m:t>
+                      <m:t> </m:t>
                     </m:r>
                     <m:r>
-                      <a:rPr lang="es-MX" i="1">
-                        <a:latin typeface="Cambria Math"/>
+                      <a:rPr lang="es-MX" b="0" i="1" smtClean="0">
+                        <a:latin typeface="Cambria Math" panose="02040503050406030204" pitchFamily="18" charset="0"/>
                       </a:rPr>
-                      <m:t>𝑍</m:t>
+                      <m:t>𝑎𝑛𝑑</m:t>
                     </m:r>
                     <m:r>
-                      <a:rPr lang="es-MX" i="1">
-                        <a:latin typeface="Cambria Math"/>
+                      <a:rPr lang="es-MX" b="0" i="1" smtClean="0">
+                        <a:latin typeface="Cambria Math" panose="02040503050406030204" pitchFamily="18" charset="0"/>
                       </a:rPr>
-                      <m:t> &gt; 50)&amp; </m:t>
+                      <m:t>  </m:t>
                     </m:r>
                     <m:r>
                       <a:rPr lang="es-MX" i="1">
@@ -23667,10 +23723,28 @@
                       <m:rPr>
                         <m:nor/>
                       </m:rPr>
+                      <a:rPr lang="es-MX" b="0" i="1" dirty="0" smtClean="0">
+                        <a:latin typeface="Cambria Math"/>
+                      </a:rPr>
+                      <m:t> </m:t>
+                    </m:r>
+                    <m:r>
+                      <m:rPr>
+                        <m:nor/>
+                      </m:rPr>
                       <a:rPr lang="es-CO" i="1" dirty="0">
                         <a:latin typeface="Cambria Math"/>
                       </a:rPr>
                       <m:t>and</m:t>
+                    </m:r>
+                    <m:r>
+                      <m:rPr>
+                        <m:nor/>
+                      </m:rPr>
+                      <a:rPr lang="es-MX" b="0" i="1" dirty="0" smtClean="0">
+                        <a:latin typeface="Cambria Math"/>
+                      </a:rPr>
+                      <m:t> </m:t>
                     </m:r>
                     <m:r>
                       <m:rPr>
@@ -23703,10 +23777,28 @@
                       <m:rPr>
                         <m:nor/>
                       </m:rPr>
+                      <a:rPr lang="es-MX" b="0" i="1" dirty="0" smtClean="0">
+                        <a:latin typeface="Cambria Math"/>
+                      </a:rPr>
+                      <m:t> </m:t>
+                    </m:r>
+                    <m:r>
+                      <m:rPr>
+                        <m:nor/>
+                      </m:rPr>
                       <a:rPr lang="es-CO" i="1" dirty="0">
                         <a:latin typeface="Cambria Math"/>
                       </a:rPr>
                       <m:t>or</m:t>
+                    </m:r>
+                    <m:r>
+                      <m:rPr>
+                        <m:nor/>
+                      </m:rPr>
+                      <a:rPr lang="es-MX" b="0" i="1" dirty="0" smtClean="0">
+                        <a:latin typeface="Cambria Math"/>
+                      </a:rPr>
+                      <m:t> </m:t>
                     </m:r>
                     <m:r>
                       <m:rPr>
@@ -23780,7 +23872,7 @@
             <p:spPr>
               <a:xfrm>
                 <a:off x="171898" y="2227391"/>
-                <a:ext cx="3772636" cy="1789977"/>
+                <a:ext cx="3863558" cy="1789977"/>
               </a:xfrm>
               <a:prstGeom prst="rect">
                 <a:avLst/>
@@ -23788,7 +23880,7 @@
               <a:blipFill>
                 <a:blip r:embed="rId2"/>
                 <a:stretch>
-                  <a:fillRect l="-1131" t="-1361"/>
+                  <a:fillRect l="-1104" t="-1361"/>
                 </a:stretch>
               </a:blipFill>
             </p:spPr>
@@ -24060,8 +24152,8 @@
           </a:p>
         </p:txBody>
       </p:sp>
-      <mc:AlternateContent xmlns:mc="http://schemas.openxmlformats.org/markup-compatibility/2006">
-        <mc:Choice xmlns:a14="http://schemas.microsoft.com/office/drawing/2010/main" Requires="a14">
+      <mc:AlternateContent xmlns:mc="http://schemas.openxmlformats.org/markup-compatibility/2006" xmlns:a14="http://schemas.microsoft.com/office/drawing/2010/main">
+        <mc:Choice Requires="a14">
           <p:sp>
             <p:nvSpPr>
               <p:cNvPr id="7" name="6 Rectángulo"/>
@@ -24195,7 +24287,7 @@
             </p:txBody>
           </p:sp>
         </mc:Choice>
-        <mc:Fallback>
+        <mc:Fallback xmlns="">
           <p:sp>
             <p:nvSpPr>
               <p:cNvPr id="7" name="6 Rectángulo"/>
@@ -25335,8 +25427,8 @@
           </a:p>
         </p:txBody>
       </p:sp>
-      <mc:AlternateContent xmlns:mc="http://schemas.openxmlformats.org/markup-compatibility/2006">
-        <mc:Choice xmlns:a14="http://schemas.microsoft.com/office/drawing/2010/main" Requires="a14">
+      <mc:AlternateContent xmlns:mc="http://schemas.openxmlformats.org/markup-compatibility/2006" xmlns:a14="http://schemas.microsoft.com/office/drawing/2010/main">
+        <mc:Choice Requires="a14">
           <p:sp>
             <p:nvSpPr>
               <p:cNvPr id="7" name="6 Rectángulo"/>
@@ -25470,7 +25562,7 @@
             </p:txBody>
           </p:sp>
         </mc:Choice>
-        <mc:Fallback>
+        <mc:Fallback xmlns="">
           <p:sp>
             <p:nvSpPr>
               <p:cNvPr id="7" name="6 Rectángulo"/>
@@ -25518,13 +25610,13 @@
         <p:grpSpPr>
           <a:xfrm>
             <a:off x="234094" y="3477945"/>
-            <a:ext cx="2226443" cy="1200329"/>
+            <a:ext cx="2406171" cy="1200329"/>
             <a:chOff x="356220" y="1988840"/>
-            <a:chExt cx="2226443" cy="1200329"/>
+            <a:chExt cx="2406171" cy="1200329"/>
           </a:xfrm>
         </p:grpSpPr>
-        <mc:AlternateContent xmlns:mc="http://schemas.openxmlformats.org/markup-compatibility/2006" xmlns:a14="http://schemas.microsoft.com/office/drawing/2010/main">
-          <mc:Choice Requires="a14">
+        <mc:AlternateContent xmlns:mc="http://schemas.openxmlformats.org/markup-compatibility/2006">
+          <mc:Choice xmlns:a14="http://schemas.microsoft.com/office/drawing/2010/main" Requires="a14">
             <p:sp>
               <p:nvSpPr>
                 <p:cNvPr id="8" name="7 CuadroTexto"/>
@@ -25534,7 +25626,7 @@
               <p:spPr>
                 <a:xfrm>
                   <a:off x="762100" y="1988840"/>
-                  <a:ext cx="1820563" cy="1200329"/>
+                  <a:ext cx="2000291" cy="1200329"/>
                 </a:xfrm>
                 <a:prstGeom prst="rect">
                   <a:avLst/>
@@ -25581,7 +25673,19 @@
                           <a:rPr lang="es-MX" b="0" i="1" smtClean="0">
                             <a:latin typeface="Cambria Math"/>
                           </a:rPr>
-                          <m:t> &amp; </m:t>
+                          <m:t> </m:t>
+                        </m:r>
+                        <m:r>
+                          <a:rPr lang="es-MX" b="0" i="1" smtClean="0">
+                            <a:latin typeface="Cambria Math" panose="02040503050406030204" pitchFamily="18" charset="0"/>
+                          </a:rPr>
+                          <m:t>𝑎𝑛𝑑</m:t>
+                        </m:r>
+                        <m:r>
+                          <a:rPr lang="es-MX" b="0" i="1" smtClean="0">
+                            <a:latin typeface="Cambria Math"/>
+                          </a:rPr>
+                          <m:t> </m:t>
                         </m:r>
                         <m:r>
                           <a:rPr lang="es-MX" b="0" i="1" smtClean="0">
@@ -25646,10 +25750,16 @@
                           <m:t> </m:t>
                         </m:r>
                         <m:r>
+                          <a:rPr lang="es-MX" b="0" i="1" smtClean="0">
+                            <a:latin typeface="Cambria Math" panose="02040503050406030204" pitchFamily="18" charset="0"/>
+                          </a:rPr>
+                          <m:t>𝑎𝑛𝑑</m:t>
+                        </m:r>
+                        <m:r>
                           <a:rPr lang="es-MX" b="0" i="1">
                             <a:latin typeface="Cambria Math"/>
                           </a:rPr>
-                          <m:t>&amp; </m:t>
+                          <m:t> </m:t>
                         </m:r>
                         <m:r>
                           <a:rPr lang="es-MX" b="0" i="1" smtClean="0">
@@ -25739,7 +25849,7 @@
               </p:txBody>
             </p:sp>
           </mc:Choice>
-          <mc:Fallback xmlns="">
+          <mc:Fallback>
             <p:sp>
               <p:nvSpPr>
                 <p:cNvPr id="8" name="7 CuadroTexto"/>
@@ -25751,7 +25861,7 @@
               <p:spPr>
                 <a:xfrm>
                   <a:off x="762100" y="1988840"/>
-                  <a:ext cx="1820563" cy="1200329"/>
+                  <a:ext cx="2000291" cy="1200329"/>
                 </a:xfrm>
                 <a:prstGeom prst="rect">
                   <a:avLst/>
@@ -27512,9 +27622,15 @@
                     </m:r>
                     <m:r>
                       <a:rPr lang="es-MX" sz="2000" b="0" i="1" smtClean="0">
+                        <a:latin typeface="Cambria Math" panose="02040503050406030204" pitchFamily="18" charset="0"/>
+                      </a:rPr>
+                      <m:t>∗∗</m:t>
+                    </m:r>
+                    <m:r>
+                      <a:rPr lang="es-MX" sz="2000" b="0" i="1" smtClean="0">
                         <a:latin typeface="Cambria Math"/>
                       </a:rPr>
-                      <m:t>^(1/2)</m:t>
+                      <m:t>(1/2)</m:t>
                     </m:r>
                   </m:oMath>
                 </a14:m>
@@ -27768,7 +27884,7 @@
             </p:nvSpPr>
             <p:spPr>
               <a:xfrm>
-                <a:off x="258416" y="809294"/>
+                <a:off x="258416" y="908720"/>
                 <a:ext cx="8424936" cy="4464496"/>
               </a:xfrm>
             </p:spPr>
@@ -27784,7 +27900,15 @@
                 </a:pPr>
                 <a:r>
                   <a:rPr lang="es-CO" sz="2000" dirty="0"/>
-                  <a:t>Cuales de los siguientes identificadores no son validos</a:t>
+                  <a:t>(</a:t>
+                </a:r>
+                <a:r>
+                  <a:rPr lang="es-CO" sz="2000" b="1" dirty="0"/>
+                  <a:t>Repaso</a:t>
+                </a:r>
+                <a:r>
+                  <a:rPr lang="es-CO" sz="2000" dirty="0"/>
+                  <a:t>) Cuales de los siguientes identificadores no son validos</a:t>
                 </a:r>
               </a:p>
               <a:p>
@@ -28087,7 +28211,7 @@
             </p:nvSpPr>
             <p:spPr>
               <a:xfrm>
-                <a:off x="258416" y="809294"/>
+                <a:off x="258416" y="908720"/>
                 <a:ext cx="8424936" cy="4464496"/>
               </a:xfrm>
               <a:blipFill>
@@ -28213,7 +28337,7 @@
             </p:spPr>
             <p:txBody>
               <a:bodyPr>
-                <a:normAutofit lnSpcReduction="10000"/>
+                <a:normAutofit/>
               </a:bodyPr>
               <a:lstStyle/>
               <a:p>
@@ -28572,47 +28696,6 @@
                 <a14:m>
                   <m:oMath xmlns:m="http://schemas.openxmlformats.org/officeDocument/2006/math">
                     <m:r>
-                      <a:rPr lang="es-MX" sz="2000" i="1" smtClean="0">
-                        <a:latin typeface="Cambria Math"/>
-                        <a:ea typeface="Cambria Math"/>
-                      </a:rPr>
-                      <m:t>1</m:t>
-                    </m:r>
-                    <m:r>
-                      <a:rPr lang="es-MX" sz="2000" b="0" i="1" smtClean="0">
-                        <a:latin typeface="Cambria Math"/>
-                        <a:ea typeface="Cambria Math"/>
-                      </a:rPr>
-                      <m:t>2</m:t>
-                    </m:r>
-                    <m:r>
-                      <a:rPr lang="es-MX" sz="2000" i="1">
-                        <a:latin typeface="Cambria Math"/>
-                        <a:ea typeface="Cambria Math"/>
-                      </a:rPr>
-                      <m:t>∕∕</m:t>
-                    </m:r>
-                    <m:r>
-                      <a:rPr lang="es-MX" sz="2000" b="0" i="1" smtClean="0">
-                        <a:latin typeface="Cambria Math"/>
-                        <a:ea typeface="Cambria Math"/>
-                      </a:rPr>
-                      <m:t>3</m:t>
-                    </m:r>
-                  </m:oMath>
-                </a14:m>
-                <a:endParaRPr lang="es-MX" sz="2000" i="1" dirty="0">
-                  <a:latin typeface="Cambria Math"/>
-                </a:endParaRPr>
-              </a:p>
-              <a:p>
-                <a:pPr lvl="2" indent="-342900">
-                  <a:buFont typeface="+mj-lt"/>
-                  <a:buAutoNum type="alphaLcPeriod"/>
-                </a:pPr>
-                <a14:m>
-                  <m:oMath xmlns:m="http://schemas.openxmlformats.org/officeDocument/2006/math">
-                    <m:r>
                       <a:rPr lang="es-MX" sz="2000" b="0" i="1" smtClean="0">
                         <a:latin typeface="Cambria Math"/>
                         <a:ea typeface="Cambria Math"/>
@@ -28764,7 +28847,7 @@
               <a:blipFill>
                 <a:blip r:embed="rId2"/>
                 <a:stretch>
-                  <a:fillRect l="-145" t="-2108"/>
+                  <a:fillRect l="-145" t="-1581"/>
                 </a:stretch>
               </a:blipFill>
             </p:spPr>
@@ -28839,7 +28922,7 @@
       </p:grpSpPr>
       <p:sp>
         <p:nvSpPr>
-          <p:cNvPr id="5" name="Title 4"/>
+          <p:cNvPr id="5" name="4 Título"/>
           <p:cNvSpPr>
             <a:spLocks noGrp="1"/>
           </p:cNvSpPr>
@@ -28849,24 +28932,26 @@
         </p:nvSpPr>
         <p:spPr>
           <a:xfrm>
-            <a:off x="179512" y="836712"/>
-            <a:ext cx="7886700" cy="1116540"/>
+            <a:off x="190054" y="286476"/>
+            <a:ext cx="8229600" cy="766260"/>
           </a:xfrm>
         </p:spPr>
         <p:txBody>
-          <a:bodyPr/>
+          <a:bodyPr>
+            <a:noAutofit/>
+          </a:bodyPr>
           <a:lstStyle/>
           <a:p>
             <a:r>
-              <a:rPr lang="en-US" sz="2800" dirty="0"/>
-              <a:t>Referencias</a:t>
+              <a:rPr lang="es-CO" sz="2800" dirty="0"/>
+              <a:t>Aplicando lo anterior a un lenguaje de programación especifico</a:t>
             </a:r>
           </a:p>
         </p:txBody>
       </p:sp>
       <p:sp>
         <p:nvSpPr>
-          <p:cNvPr id="2" name="Content Placeholder 1"/>
+          <p:cNvPr id="8" name="1 Marcador de contenido"/>
           <p:cNvSpPr>
             <a:spLocks noGrp="1"/>
           </p:cNvSpPr>
@@ -28876,8 +28961,8 @@
         </p:nvSpPr>
         <p:spPr>
           <a:xfrm>
-            <a:off x="251520" y="1767990"/>
-            <a:ext cx="8424936" cy="4968552"/>
+            <a:off x="155316" y="1340768"/>
+            <a:ext cx="8521140" cy="2376264"/>
           </a:xfrm>
         </p:spPr>
         <p:txBody>
@@ -28886,93 +28971,171 @@
           </a:bodyPr>
           <a:lstStyle/>
           <a:p>
-            <a:pPr marL="457200" indent="-457200">
-              <a:buFont typeface="+mj-lt"/>
-              <a:buAutoNum type="arabicPeriod"/>
-            </a:pPr>
             <a:r>
-              <a:rPr lang="es-CO" sz="2000" dirty="0">
-                <a:hlinkClick r:id="rId2"/>
-              </a:rPr>
-              <a:t>https://ellibrodepython.com/</a:t>
+              <a:rPr lang="es-MX" sz="2200" dirty="0"/>
+              <a:t>Lo que vimos hoy es la convención más extendida (herencia de la notación matemática y de C).</a:t>
             </a:r>
-            <a:endParaRPr lang="es-CO" sz="2000" dirty="0"/>
           </a:p>
           <a:p>
-            <a:pPr marL="457200" indent="-457200">
-              <a:buFont typeface="+mj-lt"/>
-              <a:buAutoNum type="arabicPeriod"/>
-            </a:pPr>
             <a:r>
-              <a:rPr lang="es-CO" sz="2000" dirty="0">
-                <a:hlinkClick r:id="rId3"/>
-              </a:rPr>
-              <a:t>https://www.w3resource.com/index.php</a:t>
+              <a:rPr lang="es-MX" sz="2200" dirty="0"/>
+              <a:t>Pero prioridad y asociatividad son decisiones de diseño de cada lenguaje, no leyes fijas.</a:t>
             </a:r>
-            <a:endParaRPr lang="es-CO" sz="2000" dirty="0"/>
           </a:p>
           <a:p>
-            <a:pPr marL="457200" indent="-457200">
-              <a:buFont typeface="+mj-lt"/>
-              <a:buAutoNum type="arabicPeriod"/>
-            </a:pPr>
             <a:r>
-              <a:rPr lang="es-CO" sz="2000" dirty="0">
-                <a:hlinkClick r:id="rId4"/>
-              </a:rPr>
-              <a:t>https://realpython.com/</a:t>
+              <a:rPr lang="es-MX" sz="2200" dirty="0"/>
+              <a:t>Ante la duda: paréntesis explícitos, o consultar la documentación oficial del lenguaje.</a:t>
             </a:r>
-            <a:endParaRPr lang="es-CO" sz="2000" dirty="0"/>
-          </a:p>
-          <a:p>
-            <a:pPr marL="457200" indent="-457200">
-              <a:buFont typeface="+mj-lt"/>
-              <a:buAutoNum type="arabicPeriod"/>
-            </a:pPr>
-            <a:r>
-              <a:rPr lang="es-CO" sz="2000" dirty="0">
-                <a:hlinkClick r:id="rId5"/>
-              </a:rPr>
-              <a:t>https://curriculumresources.edu.gh/wp-content/uploads/2025/01/</a:t>
-            </a:r>
-            <a:endParaRPr lang="es-CO" sz="2000" dirty="0"/>
-          </a:p>
-          <a:p>
-            <a:pPr marL="457200" indent="-457200">
-              <a:buFont typeface="+mj-lt"/>
-              <a:buAutoNum type="arabicPeriod"/>
-            </a:pPr>
-            <a:r>
-              <a:rPr lang="es-CO" sz="2000" dirty="0">
-                <a:hlinkClick r:id="rId6"/>
-              </a:rPr>
-              <a:t>https://python-course.eu/</a:t>
-            </a:r>
-            <a:endParaRPr lang="es-CO" sz="2000" dirty="0"/>
-          </a:p>
-          <a:p>
-            <a:pPr marL="457200" indent="-457200">
-              <a:buFont typeface="+mj-lt"/>
-              <a:buAutoNum type="arabicPeriod"/>
-            </a:pPr>
-            <a:r>
-              <a:rPr lang="es-CO" sz="2000" dirty="0">
-                <a:hlinkClick r:id="rId7"/>
-              </a:rPr>
-              <a:t>https://realpython.com/cheatsheets/python/</a:t>
-            </a:r>
-            <a:r>
-              <a:rPr lang="es-CO" sz="2000" dirty="0"/>
-              <a:t>    </a:t>
-            </a:r>
-            <a:endParaRPr lang="en-US" sz="2000" dirty="0"/>
+            <a:endParaRPr lang="es-CO" sz="2200" dirty="0"/>
           </a:p>
         </p:txBody>
       </p:sp>
+      <p:pic>
+        <p:nvPicPr>
+          <p:cNvPr id="1027" name="Picture 3" descr="Muere Dennis Ritchie, padre de C y de Unix - MuyLinux">
+            <a:extLst>
+              <a:ext uri="{FF2B5EF4-FFF2-40B4-BE49-F238E27FC236}">
+                <a16:creationId xmlns:a16="http://schemas.microsoft.com/office/drawing/2014/main" id="{56F57705-EDAA-4B00-AAF6-0A678F56B457}"/>
+              </a:ext>
+            </a:extLst>
+          </p:cNvPr>
+          <p:cNvPicPr>
+            <a:picLocks noChangeAspect="1" noChangeArrowheads="1"/>
+          </p:cNvPicPr>
+          <p:nvPr/>
+        </p:nvPicPr>
+        <p:blipFill>
+          <a:blip r:embed="rId2" cstate="print">
+            <a:extLst>
+              <a:ext uri="{28A0092B-C50C-407E-A947-70E740481C1C}">
+                <a14:useLocalDpi xmlns:a14="http://schemas.microsoft.com/office/drawing/2010/main" val="0"/>
+              </a:ext>
+            </a:extLst>
+          </a:blip>
+          <a:srcRect/>
+          <a:stretch>
+            <a:fillRect/>
+          </a:stretch>
+        </p:blipFill>
+        <p:spPr bwMode="auto">
+          <a:xfrm>
+            <a:off x="851262" y="4110410"/>
+            <a:ext cx="2020069" cy="2199207"/>
+          </a:xfrm>
+          <a:prstGeom prst="rect">
+            <a:avLst/>
+          </a:prstGeom>
+          <a:noFill/>
+          <a:extLst>
+            <a:ext uri="{909E8E84-426E-40DD-AFC4-6F175D3DCCD1}">
+              <a14:hiddenFill xmlns:a14="http://schemas.microsoft.com/office/drawing/2010/main">
+                <a:solidFill>
+                  <a:srgbClr val="FFFFFF"/>
+                </a:solidFill>
+              </a14:hiddenFill>
+            </a:ext>
+          </a:extLst>
+        </p:spPr>
+      </p:pic>
+      <p:pic>
+        <p:nvPicPr>
+          <p:cNvPr id="1031" name="Picture 7" descr="Guido's Personal Home Page">
+            <a:extLst>
+              <a:ext uri="{FF2B5EF4-FFF2-40B4-BE49-F238E27FC236}">
+                <a16:creationId xmlns:a16="http://schemas.microsoft.com/office/drawing/2014/main" id="{0B413F66-4F68-40B2-9CCF-992FA86B0DF4}"/>
+              </a:ext>
+            </a:extLst>
+          </p:cNvPr>
+          <p:cNvPicPr>
+            <a:picLocks noChangeAspect="1" noChangeArrowheads="1"/>
+          </p:cNvPicPr>
+          <p:nvPr/>
+        </p:nvPicPr>
+        <p:blipFill>
+          <a:blip r:embed="rId3">
+            <a:extLst>
+              <a:ext uri="{28A0092B-C50C-407E-A947-70E740481C1C}">
+                <a14:useLocalDpi xmlns:a14="http://schemas.microsoft.com/office/drawing/2010/main" val="0"/>
+              </a:ext>
+            </a:extLst>
+          </a:blip>
+          <a:srcRect/>
+          <a:stretch>
+            <a:fillRect/>
+          </a:stretch>
+        </p:blipFill>
+        <p:spPr bwMode="auto">
+          <a:xfrm>
+            <a:off x="3449126" y="4309913"/>
+            <a:ext cx="2245749" cy="1800200"/>
+          </a:xfrm>
+          <a:prstGeom prst="rect">
+            <a:avLst/>
+          </a:prstGeom>
+          <a:noFill/>
+          <a:extLst>
+            <a:ext uri="{909E8E84-426E-40DD-AFC4-6F175D3DCCD1}">
+              <a14:hiddenFill xmlns:a14="http://schemas.microsoft.com/office/drawing/2010/main">
+                <a:solidFill>
+                  <a:srgbClr val="FFFFFF"/>
+                </a:solidFill>
+              </a14:hiddenFill>
+            </a:ext>
+          </a:extLst>
+        </p:spPr>
+      </p:pic>
+      <p:pic>
+        <p:nvPicPr>
+          <p:cNvPr id="1033" name="Picture 9">
+            <a:extLst>
+              <a:ext uri="{FF2B5EF4-FFF2-40B4-BE49-F238E27FC236}">
+                <a16:creationId xmlns:a16="http://schemas.microsoft.com/office/drawing/2014/main" id="{62976791-D14C-40D4-98F6-EC0C134B9021}"/>
+              </a:ext>
+            </a:extLst>
+          </p:cNvPr>
+          <p:cNvPicPr>
+            <a:picLocks noChangeAspect="1" noChangeArrowheads="1"/>
+          </p:cNvPicPr>
+          <p:nvPr/>
+        </p:nvPicPr>
+        <p:blipFill>
+          <a:blip r:embed="rId4">
+            <a:extLst>
+              <a:ext uri="{28A0092B-C50C-407E-A947-70E740481C1C}">
+                <a14:useLocalDpi xmlns:a14="http://schemas.microsoft.com/office/drawing/2010/main" val="0"/>
+              </a:ext>
+            </a:extLst>
+          </a:blip>
+          <a:srcRect/>
+          <a:stretch>
+            <a:fillRect/>
+          </a:stretch>
+        </p:blipFill>
+        <p:spPr bwMode="auto">
+          <a:xfrm>
+            <a:off x="6272671" y="4127351"/>
+            <a:ext cx="2381250" cy="2400300"/>
+          </a:xfrm>
+          <a:prstGeom prst="rect">
+            <a:avLst/>
+          </a:prstGeom>
+          <a:noFill/>
+          <a:extLst>
+            <a:ext uri="{909E8E84-426E-40DD-AFC4-6F175D3DCCD1}">
+              <a14:hiddenFill xmlns:a14="http://schemas.microsoft.com/office/drawing/2010/main">
+                <a:solidFill>
+                  <a:srgbClr val="FFFFFF"/>
+                </a:solidFill>
+              </a14:hiddenFill>
+            </a:ext>
+          </a:extLst>
+        </p:spPr>
+      </p:pic>
     </p:spTree>
     <p:extLst>
       <p:ext uri="{BB962C8B-B14F-4D97-AF65-F5344CB8AC3E}">
-        <p14:creationId xmlns:p14="http://schemas.microsoft.com/office/powerpoint/2010/main" val="1023164851"/>
+        <p14:creationId xmlns:p14="http://schemas.microsoft.com/office/powerpoint/2010/main" val="2439885087"/>
       </p:ext>
     </p:extLst>
   </p:cSld>
@@ -29001,7 +29164,7 @@
       </p:grpSpPr>
       <p:sp>
         <p:nvSpPr>
-          <p:cNvPr id="2" name="Title 1"/>
+          <p:cNvPr id="5" name="4 Título"/>
           <p:cNvSpPr>
             <a:spLocks noGrp="1"/>
           </p:cNvSpPr>
@@ -29011,56 +29174,5251 @@
         </p:nvSpPr>
         <p:spPr>
           <a:xfrm>
-            <a:off x="628650" y="180616"/>
-            <a:ext cx="7886700" cy="1325563"/>
+            <a:off x="190054" y="286476"/>
+            <a:ext cx="8229600" cy="766260"/>
           </a:xfrm>
         </p:spPr>
         <p:txBody>
-          <a:bodyPr/>
+          <a:bodyPr>
+            <a:noAutofit/>
+          </a:bodyPr>
           <a:lstStyle/>
           <a:p>
             <a:r>
-              <a:rPr lang="es-CO" dirty="0"/>
-              <a:t>Eso es todo amigos</a:t>
+              <a:rPr lang="es-MX" sz="2800" dirty="0"/>
+              <a:t>Operadores lógicos — comparación entre lenguajes</a:t>
             </a:r>
-            <a:endParaRPr lang="en-US" dirty="0"/>
+            <a:endParaRPr lang="es-CO" sz="2800" dirty="0"/>
           </a:p>
         </p:txBody>
       </p:sp>
-      <p:pic>
-        <p:nvPicPr>
-          <p:cNvPr id="6" name="Imagen 5">
+      <p:sp>
+        <p:nvSpPr>
+          <p:cNvPr id="8" name="1 Marcador de contenido"/>
+          <p:cNvSpPr>
+            <a:spLocks noGrp="1"/>
+          </p:cNvSpPr>
+          <p:nvPr>
+            <p:ph idx="1"/>
+          </p:nvPr>
+        </p:nvSpPr>
+        <p:spPr>
+          <a:xfrm>
+            <a:off x="162555" y="1006556"/>
+            <a:ext cx="8521140" cy="5564968"/>
+          </a:xfrm>
+        </p:spPr>
+        <p:txBody>
+          <a:bodyPr>
+            <a:normAutofit/>
+          </a:bodyPr>
+          <a:lstStyle/>
+          <a:p>
+            <a:pPr marL="0" indent="0">
+              <a:buNone/>
+            </a:pPr>
+            <a:r>
+              <a:rPr lang="es-MX" sz="2200" dirty="0"/>
+              <a:t>El mismo concepto lógico, escrito distinto según el lenguaje:</a:t>
+            </a:r>
+          </a:p>
+          <a:p>
+            <a:r>
+              <a:rPr lang="es-MX" sz="2000" dirty="0"/>
+              <a:t>Cada lenguaje escribe "y", "o", "no" lógico con su propia sintaxis: no son intercambiables entre lenguajes.</a:t>
+            </a:r>
+          </a:p>
+          <a:p>
+            <a:r>
+              <a:rPr lang="es-MX" sz="2000" dirty="0"/>
+              <a:t>&amp; y | también existen, pero son otra cosa (bit a bit): otra prioridad, y no hacen cortocircuito.</a:t>
+            </a:r>
+          </a:p>
+          <a:p>
+            <a:endParaRPr lang="es-MX" sz="2000" dirty="0"/>
+          </a:p>
+          <a:p>
+            <a:endParaRPr lang="es-MX" sz="2000" dirty="0"/>
+          </a:p>
+          <a:p>
+            <a:endParaRPr lang="es-MX" sz="2000" dirty="0"/>
+          </a:p>
+          <a:p>
+            <a:endParaRPr lang="es-MX" sz="2000" dirty="0"/>
+          </a:p>
+          <a:p>
+            <a:endParaRPr lang="es-MX" sz="2000" dirty="0"/>
+          </a:p>
+          <a:p>
+            <a:endParaRPr lang="es-MX" sz="2000" dirty="0"/>
+          </a:p>
+          <a:p>
+            <a:r>
+              <a:rPr lang="es-MX" sz="2000" b="1" dirty="0"/>
+              <a:t>(Pregunta)</a:t>
+            </a:r>
+            <a:r>
+              <a:rPr lang="es-MX" sz="2000" dirty="0"/>
+              <a:t> ¿Qué pasa cuando se usa &amp; en vez de and dentro de una comparación sin paréntesis?</a:t>
+            </a:r>
+            <a:endParaRPr lang="es-CO" sz="2000" dirty="0"/>
+          </a:p>
+        </p:txBody>
+      </p:sp>
+      <p:graphicFrame>
+        <p:nvGraphicFramePr>
+          <p:cNvPr id="2" name="Tabla 1">
             <a:extLst>
               <a:ext uri="{FF2B5EF4-FFF2-40B4-BE49-F238E27FC236}">
-                <a16:creationId xmlns:a16="http://schemas.microsoft.com/office/drawing/2014/main" id="{EA8C0E6F-D570-4291-9CDE-573064DF74AF}"/>
+                <a16:creationId xmlns:a16="http://schemas.microsoft.com/office/drawing/2014/main" id="{BF485117-3BE1-4392-89DD-8ACA5F4F89E5}"/>
               </a:ext>
             </a:extLst>
           </p:cNvPr>
-          <p:cNvPicPr>
-            <a:picLocks noChangeAspect="1"/>
-          </p:cNvPicPr>
+          <p:cNvGraphicFramePr>
+            <a:graphicFrameLocks noGrp="1"/>
+          </p:cNvGraphicFramePr>
+          <p:nvPr>
+            <p:extLst>
+              <p:ext uri="{D42A27DB-BD31-4B8C-83A1-F6EECF244321}">
+                <p14:modId xmlns:p14="http://schemas.microsoft.com/office/powerpoint/2010/main" val="2097537371"/>
+              </p:ext>
+            </p:extLst>
+          </p:nvPr>
+        </p:nvGraphicFramePr>
+        <p:xfrm>
+          <a:off x="786447" y="2807568"/>
+          <a:ext cx="7571106" cy="2133600"/>
+        </p:xfrm>
+        <a:graphic>
+          <a:graphicData uri="http://schemas.openxmlformats.org/drawingml/2006/table">
+            <a:tbl>
+              <a:tblPr/>
+              <a:tblGrid>
+                <a:gridCol w="4055420">
+                  <a:extLst>
+                    <a:ext uri="{9D8B030D-6E8A-4147-A177-3AD203B41FA5}">
+                      <a16:colId xmlns:a16="http://schemas.microsoft.com/office/drawing/2014/main" val="4022841589"/>
+                    </a:ext>
+                  </a:extLst>
+                </a:gridCol>
+                <a:gridCol w="995617">
+                  <a:extLst>
+                    <a:ext uri="{9D8B030D-6E8A-4147-A177-3AD203B41FA5}">
+                      <a16:colId xmlns:a16="http://schemas.microsoft.com/office/drawing/2014/main" val="2260139143"/>
+                    </a:ext>
+                  </a:extLst>
+                </a:gridCol>
+                <a:gridCol w="2520069">
+                  <a:extLst>
+                    <a:ext uri="{9D8B030D-6E8A-4147-A177-3AD203B41FA5}">
+                      <a16:colId xmlns:a16="http://schemas.microsoft.com/office/drawing/2014/main" val="1238992420"/>
+                    </a:ext>
+                  </a:extLst>
+                </a:gridCol>
+              </a:tblGrid>
+              <a:tr h="0">
+                <a:tc>
+                  <a:txBody>
+                    <a:bodyPr/>
+                    <a:lstStyle/>
+                    <a:p>
+                      <a:pPr algn="ctr"/>
+                      <a:r>
+                        <a:rPr lang="es-CO" sz="2000" b="1" dirty="0">
+                          <a:solidFill>
+                            <a:schemeClr val="bg1"/>
+                          </a:solidFill>
+                        </a:rPr>
+                        <a:t>Concepto</a:t>
+                      </a:r>
+                    </a:p>
+                  </a:txBody>
+                  <a:tcPr anchor="ctr">
+                    <a:lnL w="12700" cap="flat" cmpd="sng" algn="ctr">
+                      <a:solidFill>
+                        <a:schemeClr val="tx1"/>
+                      </a:solidFill>
+                      <a:prstDash val="solid"/>
+                      <a:round/>
+                      <a:headEnd type="none" w="med" len="med"/>
+                      <a:tailEnd type="none" w="med" len="med"/>
+                    </a:lnL>
+                    <a:lnR w="12700" cap="flat" cmpd="sng" algn="ctr">
+                      <a:solidFill>
+                        <a:schemeClr val="tx1"/>
+                      </a:solidFill>
+                      <a:prstDash val="solid"/>
+                      <a:round/>
+                      <a:headEnd type="none" w="med" len="med"/>
+                      <a:tailEnd type="none" w="med" len="med"/>
+                    </a:lnR>
+                    <a:lnT w="12700" cap="flat" cmpd="sng" algn="ctr">
+                      <a:solidFill>
+                        <a:schemeClr val="tx1"/>
+                      </a:solidFill>
+                      <a:prstDash val="solid"/>
+                      <a:round/>
+                      <a:headEnd type="none" w="med" len="med"/>
+                      <a:tailEnd type="none" w="med" len="med"/>
+                    </a:lnT>
+                    <a:lnB w="12700" cap="flat" cmpd="sng" algn="ctr">
+                      <a:solidFill>
+                        <a:schemeClr val="tx1"/>
+                      </a:solidFill>
+                      <a:prstDash val="solid"/>
+                      <a:round/>
+                      <a:headEnd type="none" w="med" len="med"/>
+                      <a:tailEnd type="none" w="med" len="med"/>
+                    </a:lnB>
+                    <a:solidFill>
+                      <a:schemeClr val="tx1"/>
+                    </a:solidFill>
+                  </a:tcPr>
+                </a:tc>
+                <a:tc>
+                  <a:txBody>
+                    <a:bodyPr/>
+                    <a:lstStyle/>
+                    <a:p>
+                      <a:pPr algn="ctr"/>
+                      <a:r>
+                        <a:rPr lang="es-CO" sz="2000" b="1" dirty="0">
+                          <a:solidFill>
+                            <a:schemeClr val="bg1"/>
+                          </a:solidFill>
+                        </a:rPr>
+                        <a:t>Python</a:t>
+                      </a:r>
+                    </a:p>
+                  </a:txBody>
+                  <a:tcPr anchor="ctr">
+                    <a:lnL w="12700" cap="flat" cmpd="sng" algn="ctr">
+                      <a:solidFill>
+                        <a:schemeClr val="tx1"/>
+                      </a:solidFill>
+                      <a:prstDash val="solid"/>
+                      <a:round/>
+                      <a:headEnd type="none" w="med" len="med"/>
+                      <a:tailEnd type="none" w="med" len="med"/>
+                    </a:lnL>
+                    <a:lnR w="12700" cap="flat" cmpd="sng" algn="ctr">
+                      <a:solidFill>
+                        <a:schemeClr val="tx1"/>
+                      </a:solidFill>
+                      <a:prstDash val="solid"/>
+                      <a:round/>
+                      <a:headEnd type="none" w="med" len="med"/>
+                      <a:tailEnd type="none" w="med" len="med"/>
+                    </a:lnR>
+                    <a:lnT w="12700" cap="flat" cmpd="sng" algn="ctr">
+                      <a:solidFill>
+                        <a:schemeClr val="tx1"/>
+                      </a:solidFill>
+                      <a:prstDash val="solid"/>
+                      <a:round/>
+                      <a:headEnd type="none" w="med" len="med"/>
+                      <a:tailEnd type="none" w="med" len="med"/>
+                    </a:lnT>
+                    <a:lnB w="12700" cap="flat" cmpd="sng" algn="ctr">
+                      <a:solidFill>
+                        <a:schemeClr val="tx1"/>
+                      </a:solidFill>
+                      <a:prstDash val="solid"/>
+                      <a:round/>
+                      <a:headEnd type="none" w="med" len="med"/>
+                      <a:tailEnd type="none" w="med" len="med"/>
+                    </a:lnB>
+                    <a:solidFill>
+                      <a:schemeClr val="tx1"/>
+                    </a:solidFill>
+                  </a:tcPr>
+                </a:tc>
+                <a:tc>
+                  <a:txBody>
+                    <a:bodyPr/>
+                    <a:lstStyle/>
+                    <a:p>
+                      <a:pPr algn="ctr"/>
+                      <a:r>
+                        <a:rPr lang="es-CO" sz="2000" b="1" dirty="0">
+                          <a:solidFill>
+                            <a:schemeClr val="bg1"/>
+                          </a:solidFill>
+                        </a:rPr>
+                        <a:t>Java / C / JavaScript</a:t>
+                      </a:r>
+                    </a:p>
+                  </a:txBody>
+                  <a:tcPr anchor="ctr">
+                    <a:lnL w="12700" cap="flat" cmpd="sng" algn="ctr">
+                      <a:solidFill>
+                        <a:schemeClr val="tx1"/>
+                      </a:solidFill>
+                      <a:prstDash val="solid"/>
+                      <a:round/>
+                      <a:headEnd type="none" w="med" len="med"/>
+                      <a:tailEnd type="none" w="med" len="med"/>
+                    </a:lnL>
+                    <a:lnR w="12700" cap="flat" cmpd="sng" algn="ctr">
+                      <a:solidFill>
+                        <a:schemeClr val="tx1"/>
+                      </a:solidFill>
+                      <a:prstDash val="solid"/>
+                      <a:round/>
+                      <a:headEnd type="none" w="med" len="med"/>
+                      <a:tailEnd type="none" w="med" len="med"/>
+                    </a:lnR>
+                    <a:lnT w="12700" cap="flat" cmpd="sng" algn="ctr">
+                      <a:solidFill>
+                        <a:schemeClr val="tx1"/>
+                      </a:solidFill>
+                      <a:prstDash val="solid"/>
+                      <a:round/>
+                      <a:headEnd type="none" w="med" len="med"/>
+                      <a:tailEnd type="none" w="med" len="med"/>
+                    </a:lnT>
+                    <a:lnB w="12700" cap="flat" cmpd="sng" algn="ctr">
+                      <a:solidFill>
+                        <a:schemeClr val="tx1"/>
+                      </a:solidFill>
+                      <a:prstDash val="solid"/>
+                      <a:round/>
+                      <a:headEnd type="none" w="med" len="med"/>
+                      <a:tailEnd type="none" w="med" len="med"/>
+                    </a:lnB>
+                    <a:solidFill>
+                      <a:schemeClr val="tx1"/>
+                    </a:solidFill>
+                  </a:tcPr>
+                </a:tc>
+                <a:extLst>
+                  <a:ext uri="{0D108BD9-81ED-4DB2-BD59-A6C34878D82A}">
+                    <a16:rowId xmlns:a16="http://schemas.microsoft.com/office/drawing/2014/main" val="4107327226"/>
+                  </a:ext>
+                </a:extLst>
+              </a:tr>
+              <a:tr h="0">
+                <a:tc>
+                  <a:txBody>
+                    <a:bodyPr/>
+                    <a:lstStyle/>
+                    <a:p>
+                      <a:pPr algn="l"/>
+                      <a:r>
+                        <a:rPr lang="es-CO" dirty="0"/>
+                        <a:t>AND lógico (con cortocircuito)</a:t>
+                      </a:r>
+                    </a:p>
+                  </a:txBody>
+                  <a:tcPr anchor="ctr">
+                    <a:lnL w="12700" cap="flat" cmpd="sng" algn="ctr">
+                      <a:solidFill>
+                        <a:schemeClr val="tx1"/>
+                      </a:solidFill>
+                      <a:prstDash val="solid"/>
+                      <a:round/>
+                      <a:headEnd type="none" w="med" len="med"/>
+                      <a:tailEnd type="none" w="med" len="med"/>
+                    </a:lnL>
+                    <a:lnR w="12700" cap="flat" cmpd="sng" algn="ctr">
+                      <a:solidFill>
+                        <a:schemeClr val="tx1"/>
+                      </a:solidFill>
+                      <a:prstDash val="solid"/>
+                      <a:round/>
+                      <a:headEnd type="none" w="med" len="med"/>
+                      <a:tailEnd type="none" w="med" len="med"/>
+                    </a:lnR>
+                    <a:lnT w="12700" cap="flat" cmpd="sng" algn="ctr">
+                      <a:solidFill>
+                        <a:schemeClr val="tx1"/>
+                      </a:solidFill>
+                      <a:prstDash val="solid"/>
+                      <a:round/>
+                      <a:headEnd type="none" w="med" len="med"/>
+                      <a:tailEnd type="none" w="med" len="med"/>
+                    </a:lnT>
+                    <a:lnB w="12700" cap="flat" cmpd="sng" algn="ctr">
+                      <a:solidFill>
+                        <a:schemeClr val="tx1"/>
+                      </a:solidFill>
+                      <a:prstDash val="solid"/>
+                      <a:round/>
+                      <a:headEnd type="none" w="med" len="med"/>
+                      <a:tailEnd type="none" w="med" len="med"/>
+                    </a:lnB>
+                  </a:tcPr>
+                </a:tc>
+                <a:tc>
+                  <a:txBody>
+                    <a:bodyPr/>
+                    <a:lstStyle/>
+                    <a:p>
+                      <a:pPr algn="l"/>
+                      <a:r>
+                        <a:rPr lang="es-CO" dirty="0">
+                          <a:solidFill>
+                            <a:srgbClr val="C00000"/>
+                          </a:solidFill>
+                          <a:latin typeface="Consolas" panose="020B0609020204030204" pitchFamily="49" charset="0"/>
+                        </a:rPr>
+                        <a:t>and</a:t>
+                      </a:r>
+                    </a:p>
+                  </a:txBody>
+                  <a:tcPr anchor="ctr">
+                    <a:lnL w="12700" cap="flat" cmpd="sng" algn="ctr">
+                      <a:solidFill>
+                        <a:schemeClr val="tx1"/>
+                      </a:solidFill>
+                      <a:prstDash val="solid"/>
+                      <a:round/>
+                      <a:headEnd type="none" w="med" len="med"/>
+                      <a:tailEnd type="none" w="med" len="med"/>
+                    </a:lnL>
+                    <a:lnR w="12700" cap="flat" cmpd="sng" algn="ctr">
+                      <a:solidFill>
+                        <a:schemeClr val="tx1"/>
+                      </a:solidFill>
+                      <a:prstDash val="solid"/>
+                      <a:round/>
+                      <a:headEnd type="none" w="med" len="med"/>
+                      <a:tailEnd type="none" w="med" len="med"/>
+                    </a:lnR>
+                    <a:lnT w="12700" cap="flat" cmpd="sng" algn="ctr">
+                      <a:solidFill>
+                        <a:schemeClr val="tx1"/>
+                      </a:solidFill>
+                      <a:prstDash val="solid"/>
+                      <a:round/>
+                      <a:headEnd type="none" w="med" len="med"/>
+                      <a:tailEnd type="none" w="med" len="med"/>
+                    </a:lnT>
+                    <a:lnB w="12700" cap="flat" cmpd="sng" algn="ctr">
+                      <a:solidFill>
+                        <a:schemeClr val="tx1"/>
+                      </a:solidFill>
+                      <a:prstDash val="solid"/>
+                      <a:round/>
+                      <a:headEnd type="none" w="med" len="med"/>
+                      <a:tailEnd type="none" w="med" len="med"/>
+                    </a:lnB>
+                  </a:tcPr>
+                </a:tc>
+                <a:tc>
+                  <a:txBody>
+                    <a:bodyPr/>
+                    <a:lstStyle/>
+                    <a:p>
+                      <a:pPr algn="l"/>
+                      <a:r>
+                        <a:rPr lang="es-CO" dirty="0">
+                          <a:solidFill>
+                            <a:srgbClr val="C00000"/>
+                          </a:solidFill>
+                          <a:latin typeface="Consolas" panose="020B0609020204030204" pitchFamily="49" charset="0"/>
+                        </a:rPr>
+                        <a:t>&amp;&amp;</a:t>
+                      </a:r>
+                    </a:p>
+                  </a:txBody>
+                  <a:tcPr anchor="ctr">
+                    <a:lnL w="12700" cap="flat" cmpd="sng" algn="ctr">
+                      <a:solidFill>
+                        <a:schemeClr val="tx1"/>
+                      </a:solidFill>
+                      <a:prstDash val="solid"/>
+                      <a:round/>
+                      <a:headEnd type="none" w="med" len="med"/>
+                      <a:tailEnd type="none" w="med" len="med"/>
+                    </a:lnL>
+                    <a:lnR w="12700" cap="flat" cmpd="sng" algn="ctr">
+                      <a:solidFill>
+                        <a:schemeClr val="tx1"/>
+                      </a:solidFill>
+                      <a:prstDash val="solid"/>
+                      <a:round/>
+                      <a:headEnd type="none" w="med" len="med"/>
+                      <a:tailEnd type="none" w="med" len="med"/>
+                    </a:lnR>
+                    <a:lnT w="12700" cap="flat" cmpd="sng" algn="ctr">
+                      <a:solidFill>
+                        <a:schemeClr val="tx1"/>
+                      </a:solidFill>
+                      <a:prstDash val="solid"/>
+                      <a:round/>
+                      <a:headEnd type="none" w="med" len="med"/>
+                      <a:tailEnd type="none" w="med" len="med"/>
+                    </a:lnT>
+                    <a:lnB w="12700" cap="flat" cmpd="sng" algn="ctr">
+                      <a:solidFill>
+                        <a:schemeClr val="tx1"/>
+                      </a:solidFill>
+                      <a:prstDash val="solid"/>
+                      <a:round/>
+                      <a:headEnd type="none" w="med" len="med"/>
+                      <a:tailEnd type="none" w="med" len="med"/>
+                    </a:lnB>
+                  </a:tcPr>
+                </a:tc>
+                <a:extLst>
+                  <a:ext uri="{0D108BD9-81ED-4DB2-BD59-A6C34878D82A}">
+                    <a16:rowId xmlns:a16="http://schemas.microsoft.com/office/drawing/2014/main" val="3535164258"/>
+                  </a:ext>
+                </a:extLst>
+              </a:tr>
+              <a:tr h="0">
+                <a:tc>
+                  <a:txBody>
+                    <a:bodyPr/>
+                    <a:lstStyle/>
+                    <a:p>
+                      <a:pPr algn="l"/>
+                      <a:r>
+                        <a:rPr lang="es-CO"/>
+                        <a:t>OR lógico (con cortocircuito)</a:t>
+                      </a:r>
+                    </a:p>
+                  </a:txBody>
+                  <a:tcPr anchor="ctr">
+                    <a:lnL w="12700" cap="flat" cmpd="sng" algn="ctr">
+                      <a:solidFill>
+                        <a:schemeClr val="tx1"/>
+                      </a:solidFill>
+                      <a:prstDash val="solid"/>
+                      <a:round/>
+                      <a:headEnd type="none" w="med" len="med"/>
+                      <a:tailEnd type="none" w="med" len="med"/>
+                    </a:lnL>
+                    <a:lnR w="12700" cap="flat" cmpd="sng" algn="ctr">
+                      <a:solidFill>
+                        <a:schemeClr val="tx1"/>
+                      </a:solidFill>
+                      <a:prstDash val="solid"/>
+                      <a:round/>
+                      <a:headEnd type="none" w="med" len="med"/>
+                      <a:tailEnd type="none" w="med" len="med"/>
+                    </a:lnR>
+                    <a:lnT w="12700" cap="flat" cmpd="sng" algn="ctr">
+                      <a:solidFill>
+                        <a:schemeClr val="tx1"/>
+                      </a:solidFill>
+                      <a:prstDash val="solid"/>
+                      <a:round/>
+                      <a:headEnd type="none" w="med" len="med"/>
+                      <a:tailEnd type="none" w="med" len="med"/>
+                    </a:lnT>
+                    <a:lnB w="12700" cap="flat" cmpd="sng" algn="ctr">
+                      <a:solidFill>
+                        <a:schemeClr val="tx1"/>
+                      </a:solidFill>
+                      <a:prstDash val="solid"/>
+                      <a:round/>
+                      <a:headEnd type="none" w="med" len="med"/>
+                      <a:tailEnd type="none" w="med" len="med"/>
+                    </a:lnB>
+                  </a:tcPr>
+                </a:tc>
+                <a:tc>
+                  <a:txBody>
+                    <a:bodyPr/>
+                    <a:lstStyle/>
+                    <a:p>
+                      <a:pPr algn="l"/>
+                      <a:r>
+                        <a:rPr lang="es-CO" dirty="0" err="1">
+                          <a:solidFill>
+                            <a:srgbClr val="C00000"/>
+                          </a:solidFill>
+                          <a:latin typeface="Consolas" panose="020B0609020204030204" pitchFamily="49" charset="0"/>
+                        </a:rPr>
+                        <a:t>or</a:t>
+                      </a:r>
+                      <a:endParaRPr lang="es-CO" dirty="0">
+                        <a:solidFill>
+                          <a:srgbClr val="C00000"/>
+                        </a:solidFill>
+                        <a:latin typeface="Consolas" panose="020B0609020204030204" pitchFamily="49" charset="0"/>
+                      </a:endParaRPr>
+                    </a:p>
+                  </a:txBody>
+                  <a:tcPr anchor="ctr">
+                    <a:lnL w="12700" cap="flat" cmpd="sng" algn="ctr">
+                      <a:solidFill>
+                        <a:schemeClr val="tx1"/>
+                      </a:solidFill>
+                      <a:prstDash val="solid"/>
+                      <a:round/>
+                      <a:headEnd type="none" w="med" len="med"/>
+                      <a:tailEnd type="none" w="med" len="med"/>
+                    </a:lnL>
+                    <a:lnR w="12700" cap="flat" cmpd="sng" algn="ctr">
+                      <a:solidFill>
+                        <a:schemeClr val="tx1"/>
+                      </a:solidFill>
+                      <a:prstDash val="solid"/>
+                      <a:round/>
+                      <a:headEnd type="none" w="med" len="med"/>
+                      <a:tailEnd type="none" w="med" len="med"/>
+                    </a:lnR>
+                    <a:lnT w="12700" cap="flat" cmpd="sng" algn="ctr">
+                      <a:solidFill>
+                        <a:schemeClr val="tx1"/>
+                      </a:solidFill>
+                      <a:prstDash val="solid"/>
+                      <a:round/>
+                      <a:headEnd type="none" w="med" len="med"/>
+                      <a:tailEnd type="none" w="med" len="med"/>
+                    </a:lnT>
+                    <a:lnB w="12700" cap="flat" cmpd="sng" algn="ctr">
+                      <a:solidFill>
+                        <a:schemeClr val="tx1"/>
+                      </a:solidFill>
+                      <a:prstDash val="solid"/>
+                      <a:round/>
+                      <a:headEnd type="none" w="med" len="med"/>
+                      <a:tailEnd type="none" w="med" len="med"/>
+                    </a:lnB>
+                  </a:tcPr>
+                </a:tc>
+                <a:tc>
+                  <a:txBody>
+                    <a:bodyPr/>
+                    <a:lstStyle/>
+                    <a:p>
+                      <a:pPr algn="l"/>
+                      <a:r>
+                        <a:rPr lang="es-CO">
+                          <a:solidFill>
+                            <a:srgbClr val="C00000"/>
+                          </a:solidFill>
+                          <a:latin typeface="Consolas" panose="020B0609020204030204" pitchFamily="49" charset="0"/>
+                        </a:rPr>
+                        <a:t>||</a:t>
+                      </a:r>
+                    </a:p>
+                  </a:txBody>
+                  <a:tcPr anchor="ctr">
+                    <a:lnL w="12700" cap="flat" cmpd="sng" algn="ctr">
+                      <a:solidFill>
+                        <a:schemeClr val="tx1"/>
+                      </a:solidFill>
+                      <a:prstDash val="solid"/>
+                      <a:round/>
+                      <a:headEnd type="none" w="med" len="med"/>
+                      <a:tailEnd type="none" w="med" len="med"/>
+                    </a:lnL>
+                    <a:lnR w="12700" cap="flat" cmpd="sng" algn="ctr">
+                      <a:solidFill>
+                        <a:schemeClr val="tx1"/>
+                      </a:solidFill>
+                      <a:prstDash val="solid"/>
+                      <a:round/>
+                      <a:headEnd type="none" w="med" len="med"/>
+                      <a:tailEnd type="none" w="med" len="med"/>
+                    </a:lnR>
+                    <a:lnT w="12700" cap="flat" cmpd="sng" algn="ctr">
+                      <a:solidFill>
+                        <a:schemeClr val="tx1"/>
+                      </a:solidFill>
+                      <a:prstDash val="solid"/>
+                      <a:round/>
+                      <a:headEnd type="none" w="med" len="med"/>
+                      <a:tailEnd type="none" w="med" len="med"/>
+                    </a:lnT>
+                    <a:lnB w="12700" cap="flat" cmpd="sng" algn="ctr">
+                      <a:solidFill>
+                        <a:schemeClr val="tx1"/>
+                      </a:solidFill>
+                      <a:prstDash val="solid"/>
+                      <a:round/>
+                      <a:headEnd type="none" w="med" len="med"/>
+                      <a:tailEnd type="none" w="med" len="med"/>
+                    </a:lnB>
+                  </a:tcPr>
+                </a:tc>
+                <a:extLst>
+                  <a:ext uri="{0D108BD9-81ED-4DB2-BD59-A6C34878D82A}">
+                    <a16:rowId xmlns:a16="http://schemas.microsoft.com/office/drawing/2014/main" val="2561227518"/>
+                  </a:ext>
+                </a:extLst>
+              </a:tr>
+              <a:tr h="0">
+                <a:tc>
+                  <a:txBody>
+                    <a:bodyPr/>
+                    <a:lstStyle/>
+                    <a:p>
+                      <a:pPr algn="l"/>
+                      <a:r>
+                        <a:rPr lang="es-CO"/>
+                        <a:t>NOT lógico</a:t>
+                      </a:r>
+                    </a:p>
+                  </a:txBody>
+                  <a:tcPr anchor="ctr">
+                    <a:lnL w="12700" cap="flat" cmpd="sng" algn="ctr">
+                      <a:solidFill>
+                        <a:schemeClr val="tx1"/>
+                      </a:solidFill>
+                      <a:prstDash val="solid"/>
+                      <a:round/>
+                      <a:headEnd type="none" w="med" len="med"/>
+                      <a:tailEnd type="none" w="med" len="med"/>
+                    </a:lnL>
+                    <a:lnR w="12700" cap="flat" cmpd="sng" algn="ctr">
+                      <a:solidFill>
+                        <a:schemeClr val="tx1"/>
+                      </a:solidFill>
+                      <a:prstDash val="solid"/>
+                      <a:round/>
+                      <a:headEnd type="none" w="med" len="med"/>
+                      <a:tailEnd type="none" w="med" len="med"/>
+                    </a:lnR>
+                    <a:lnT w="12700" cap="flat" cmpd="sng" algn="ctr">
+                      <a:solidFill>
+                        <a:schemeClr val="tx1"/>
+                      </a:solidFill>
+                      <a:prstDash val="solid"/>
+                      <a:round/>
+                      <a:headEnd type="none" w="med" len="med"/>
+                      <a:tailEnd type="none" w="med" len="med"/>
+                    </a:lnT>
+                    <a:lnB w="12700" cap="flat" cmpd="sng" algn="ctr">
+                      <a:solidFill>
+                        <a:schemeClr val="tx1"/>
+                      </a:solidFill>
+                      <a:prstDash val="solid"/>
+                      <a:round/>
+                      <a:headEnd type="none" w="med" len="med"/>
+                      <a:tailEnd type="none" w="med" len="med"/>
+                    </a:lnB>
+                  </a:tcPr>
+                </a:tc>
+                <a:tc>
+                  <a:txBody>
+                    <a:bodyPr/>
+                    <a:lstStyle/>
+                    <a:p>
+                      <a:pPr algn="l"/>
+                      <a:r>
+                        <a:rPr lang="es-CO" dirty="0" err="1">
+                          <a:solidFill>
+                            <a:srgbClr val="C00000"/>
+                          </a:solidFill>
+                          <a:latin typeface="Consolas" panose="020B0609020204030204" pitchFamily="49" charset="0"/>
+                        </a:rPr>
+                        <a:t>not</a:t>
+                      </a:r>
+                      <a:endParaRPr lang="es-CO" dirty="0">
+                        <a:solidFill>
+                          <a:srgbClr val="C00000"/>
+                        </a:solidFill>
+                        <a:latin typeface="Consolas" panose="020B0609020204030204" pitchFamily="49" charset="0"/>
+                      </a:endParaRPr>
+                    </a:p>
+                  </a:txBody>
+                  <a:tcPr anchor="ctr">
+                    <a:lnL w="12700" cap="flat" cmpd="sng" algn="ctr">
+                      <a:solidFill>
+                        <a:schemeClr val="tx1"/>
+                      </a:solidFill>
+                      <a:prstDash val="solid"/>
+                      <a:round/>
+                      <a:headEnd type="none" w="med" len="med"/>
+                      <a:tailEnd type="none" w="med" len="med"/>
+                    </a:lnL>
+                    <a:lnR w="12700" cap="flat" cmpd="sng" algn="ctr">
+                      <a:solidFill>
+                        <a:schemeClr val="tx1"/>
+                      </a:solidFill>
+                      <a:prstDash val="solid"/>
+                      <a:round/>
+                      <a:headEnd type="none" w="med" len="med"/>
+                      <a:tailEnd type="none" w="med" len="med"/>
+                    </a:lnR>
+                    <a:lnT w="12700" cap="flat" cmpd="sng" algn="ctr">
+                      <a:solidFill>
+                        <a:schemeClr val="tx1"/>
+                      </a:solidFill>
+                      <a:prstDash val="solid"/>
+                      <a:round/>
+                      <a:headEnd type="none" w="med" len="med"/>
+                      <a:tailEnd type="none" w="med" len="med"/>
+                    </a:lnT>
+                    <a:lnB w="12700" cap="flat" cmpd="sng" algn="ctr">
+                      <a:solidFill>
+                        <a:schemeClr val="tx1"/>
+                      </a:solidFill>
+                      <a:prstDash val="solid"/>
+                      <a:round/>
+                      <a:headEnd type="none" w="med" len="med"/>
+                      <a:tailEnd type="none" w="med" len="med"/>
+                    </a:lnB>
+                  </a:tcPr>
+                </a:tc>
+                <a:tc>
+                  <a:txBody>
+                    <a:bodyPr/>
+                    <a:lstStyle/>
+                    <a:p>
+                      <a:pPr algn="l"/>
+                      <a:r>
+                        <a:rPr lang="es-CO" dirty="0">
+                          <a:solidFill>
+                            <a:srgbClr val="C00000"/>
+                          </a:solidFill>
+                          <a:latin typeface="Consolas" panose="020B0609020204030204" pitchFamily="49" charset="0"/>
+                        </a:rPr>
+                        <a:t>!</a:t>
+                      </a:r>
+                    </a:p>
+                  </a:txBody>
+                  <a:tcPr anchor="ctr">
+                    <a:lnL w="12700" cap="flat" cmpd="sng" algn="ctr">
+                      <a:solidFill>
+                        <a:schemeClr val="tx1"/>
+                      </a:solidFill>
+                      <a:prstDash val="solid"/>
+                      <a:round/>
+                      <a:headEnd type="none" w="med" len="med"/>
+                      <a:tailEnd type="none" w="med" len="med"/>
+                    </a:lnL>
+                    <a:lnR w="12700" cap="flat" cmpd="sng" algn="ctr">
+                      <a:solidFill>
+                        <a:schemeClr val="tx1"/>
+                      </a:solidFill>
+                      <a:prstDash val="solid"/>
+                      <a:round/>
+                      <a:headEnd type="none" w="med" len="med"/>
+                      <a:tailEnd type="none" w="med" len="med"/>
+                    </a:lnR>
+                    <a:lnT w="12700" cap="flat" cmpd="sng" algn="ctr">
+                      <a:solidFill>
+                        <a:schemeClr val="tx1"/>
+                      </a:solidFill>
+                      <a:prstDash val="solid"/>
+                      <a:round/>
+                      <a:headEnd type="none" w="med" len="med"/>
+                      <a:tailEnd type="none" w="med" len="med"/>
+                    </a:lnT>
+                    <a:lnB w="12700" cap="flat" cmpd="sng" algn="ctr">
+                      <a:solidFill>
+                        <a:schemeClr val="tx1"/>
+                      </a:solidFill>
+                      <a:prstDash val="solid"/>
+                      <a:round/>
+                      <a:headEnd type="none" w="med" len="med"/>
+                      <a:tailEnd type="none" w="med" len="med"/>
+                    </a:lnB>
+                  </a:tcPr>
+                </a:tc>
+                <a:extLst>
+                  <a:ext uri="{0D108BD9-81ED-4DB2-BD59-A6C34878D82A}">
+                    <a16:rowId xmlns:a16="http://schemas.microsoft.com/office/drawing/2014/main" val="2096298193"/>
+                  </a:ext>
+                </a:extLst>
+              </a:tr>
+              <a:tr h="0">
+                <a:tc>
+                  <a:txBody>
+                    <a:bodyPr/>
+                    <a:lstStyle/>
+                    <a:p>
+                      <a:pPr algn="l"/>
+                      <a:r>
+                        <a:rPr lang="es-CO" dirty="0"/>
+                        <a:t>AND / OR bit a bit </a:t>
+                      </a:r>
+                      <a:r>
+                        <a:rPr lang="es-CO" i="1" dirty="0"/>
+                        <a:t>(no confundir con los anteriores)</a:t>
+                      </a:r>
+                      <a:endParaRPr lang="es-CO" dirty="0"/>
+                    </a:p>
+                  </a:txBody>
+                  <a:tcPr anchor="ctr">
+                    <a:lnL w="12700" cap="flat" cmpd="sng" algn="ctr">
+                      <a:solidFill>
+                        <a:schemeClr val="tx1"/>
+                      </a:solidFill>
+                      <a:prstDash val="solid"/>
+                      <a:round/>
+                      <a:headEnd type="none" w="med" len="med"/>
+                      <a:tailEnd type="none" w="med" len="med"/>
+                    </a:lnL>
+                    <a:lnR w="12700" cap="flat" cmpd="sng" algn="ctr">
+                      <a:solidFill>
+                        <a:schemeClr val="tx1"/>
+                      </a:solidFill>
+                      <a:prstDash val="solid"/>
+                      <a:round/>
+                      <a:headEnd type="none" w="med" len="med"/>
+                      <a:tailEnd type="none" w="med" len="med"/>
+                    </a:lnR>
+                    <a:lnT w="12700" cap="flat" cmpd="sng" algn="ctr">
+                      <a:solidFill>
+                        <a:schemeClr val="tx1"/>
+                      </a:solidFill>
+                      <a:prstDash val="solid"/>
+                      <a:round/>
+                      <a:headEnd type="none" w="med" len="med"/>
+                      <a:tailEnd type="none" w="med" len="med"/>
+                    </a:lnT>
+                    <a:lnB w="12700" cap="flat" cmpd="sng" algn="ctr">
+                      <a:solidFill>
+                        <a:schemeClr val="tx1"/>
+                      </a:solidFill>
+                      <a:prstDash val="solid"/>
+                      <a:round/>
+                      <a:headEnd type="none" w="med" len="med"/>
+                      <a:tailEnd type="none" w="med" len="med"/>
+                    </a:lnB>
+                    <a:solidFill>
+                      <a:schemeClr val="bg2"/>
+                    </a:solidFill>
+                  </a:tcPr>
+                </a:tc>
+                <a:tc>
+                  <a:txBody>
+                    <a:bodyPr/>
+                    <a:lstStyle/>
+                    <a:p>
+                      <a:pPr algn="l"/>
+                      <a:r>
+                        <a:rPr lang="es-CO" dirty="0">
+                          <a:solidFill>
+                            <a:srgbClr val="C00000"/>
+                          </a:solidFill>
+                          <a:latin typeface="Consolas" panose="020B0609020204030204" pitchFamily="49" charset="0"/>
+                        </a:rPr>
+                        <a:t>&amp;</a:t>
+                      </a:r>
+                      <a:r>
+                        <a:rPr lang="es-CO" dirty="0">
+                          <a:latin typeface="Consolas" panose="020B0609020204030204" pitchFamily="49" charset="0"/>
+                        </a:rPr>
+                        <a:t> / </a:t>
+                      </a:r>
+                      <a:r>
+                        <a:rPr lang="es-CO" dirty="0">
+                          <a:solidFill>
+                            <a:srgbClr val="C00000"/>
+                          </a:solidFill>
+                          <a:latin typeface="Consolas" panose="020B0609020204030204" pitchFamily="49" charset="0"/>
+                        </a:rPr>
+                        <a:t>|</a:t>
+                      </a:r>
+                    </a:p>
+                  </a:txBody>
+                  <a:tcPr anchor="ctr">
+                    <a:lnL w="12700" cap="flat" cmpd="sng" algn="ctr">
+                      <a:solidFill>
+                        <a:schemeClr val="tx1"/>
+                      </a:solidFill>
+                      <a:prstDash val="solid"/>
+                      <a:round/>
+                      <a:headEnd type="none" w="med" len="med"/>
+                      <a:tailEnd type="none" w="med" len="med"/>
+                    </a:lnL>
+                    <a:lnR w="12700" cap="flat" cmpd="sng" algn="ctr">
+                      <a:solidFill>
+                        <a:schemeClr val="tx1"/>
+                      </a:solidFill>
+                      <a:prstDash val="solid"/>
+                      <a:round/>
+                      <a:headEnd type="none" w="med" len="med"/>
+                      <a:tailEnd type="none" w="med" len="med"/>
+                    </a:lnR>
+                    <a:lnT w="12700" cap="flat" cmpd="sng" algn="ctr">
+                      <a:solidFill>
+                        <a:schemeClr val="tx1"/>
+                      </a:solidFill>
+                      <a:prstDash val="solid"/>
+                      <a:round/>
+                      <a:headEnd type="none" w="med" len="med"/>
+                      <a:tailEnd type="none" w="med" len="med"/>
+                    </a:lnT>
+                    <a:lnB w="12700" cap="flat" cmpd="sng" algn="ctr">
+                      <a:solidFill>
+                        <a:schemeClr val="tx1"/>
+                      </a:solidFill>
+                      <a:prstDash val="solid"/>
+                      <a:round/>
+                      <a:headEnd type="none" w="med" len="med"/>
+                      <a:tailEnd type="none" w="med" len="med"/>
+                    </a:lnB>
+                    <a:solidFill>
+                      <a:schemeClr val="bg2"/>
+                    </a:solidFill>
+                  </a:tcPr>
+                </a:tc>
+                <a:tc>
+                  <a:txBody>
+                    <a:bodyPr/>
+                    <a:lstStyle/>
+                    <a:p>
+                      <a:pPr algn="l"/>
+                      <a:r>
+                        <a:rPr lang="es-CO" dirty="0">
+                          <a:solidFill>
+                            <a:srgbClr val="C00000"/>
+                          </a:solidFill>
+                          <a:latin typeface="Consolas" panose="020B0609020204030204" pitchFamily="49" charset="0"/>
+                        </a:rPr>
+                        <a:t>&amp;</a:t>
+                      </a:r>
+                      <a:r>
+                        <a:rPr lang="es-CO" dirty="0">
+                          <a:latin typeface="Consolas" panose="020B0609020204030204" pitchFamily="49" charset="0"/>
+                        </a:rPr>
+                        <a:t> / </a:t>
+                      </a:r>
+                      <a:r>
+                        <a:rPr lang="es-CO" dirty="0">
+                          <a:solidFill>
+                            <a:srgbClr val="C00000"/>
+                          </a:solidFill>
+                          <a:latin typeface="Consolas" panose="020B0609020204030204" pitchFamily="49" charset="0"/>
+                        </a:rPr>
+                        <a:t>|</a:t>
+                      </a:r>
+                    </a:p>
+                  </a:txBody>
+                  <a:tcPr anchor="ctr">
+                    <a:lnL w="12700" cap="flat" cmpd="sng" algn="ctr">
+                      <a:solidFill>
+                        <a:schemeClr val="tx1"/>
+                      </a:solidFill>
+                      <a:prstDash val="solid"/>
+                      <a:round/>
+                      <a:headEnd type="none" w="med" len="med"/>
+                      <a:tailEnd type="none" w="med" len="med"/>
+                    </a:lnL>
+                    <a:lnR w="12700" cap="flat" cmpd="sng" algn="ctr">
+                      <a:solidFill>
+                        <a:schemeClr val="tx1"/>
+                      </a:solidFill>
+                      <a:prstDash val="solid"/>
+                      <a:round/>
+                      <a:headEnd type="none" w="med" len="med"/>
+                      <a:tailEnd type="none" w="med" len="med"/>
+                    </a:lnR>
+                    <a:lnT w="12700" cap="flat" cmpd="sng" algn="ctr">
+                      <a:solidFill>
+                        <a:schemeClr val="tx1"/>
+                      </a:solidFill>
+                      <a:prstDash val="solid"/>
+                      <a:round/>
+                      <a:headEnd type="none" w="med" len="med"/>
+                      <a:tailEnd type="none" w="med" len="med"/>
+                    </a:lnT>
+                    <a:lnB w="12700" cap="flat" cmpd="sng" algn="ctr">
+                      <a:solidFill>
+                        <a:schemeClr val="tx1"/>
+                      </a:solidFill>
+                      <a:prstDash val="solid"/>
+                      <a:round/>
+                      <a:headEnd type="none" w="med" len="med"/>
+                      <a:tailEnd type="none" w="med" len="med"/>
+                    </a:lnB>
+                    <a:solidFill>
+                      <a:schemeClr val="bg2"/>
+                    </a:solidFill>
+                  </a:tcPr>
+                </a:tc>
+                <a:extLst>
+                  <a:ext uri="{0D108BD9-81ED-4DB2-BD59-A6C34878D82A}">
+                    <a16:rowId xmlns:a16="http://schemas.microsoft.com/office/drawing/2014/main" val="3668222263"/>
+                  </a:ext>
+                </a:extLst>
+              </a:tr>
+            </a:tbl>
+          </a:graphicData>
+        </a:graphic>
+      </p:graphicFrame>
+      <p:sp>
+        <p:nvSpPr>
+          <p:cNvPr id="11" name="CuadroTexto 10">
+            <a:extLst>
+              <a:ext uri="{FF2B5EF4-FFF2-40B4-BE49-F238E27FC236}">
+                <a16:creationId xmlns:a16="http://schemas.microsoft.com/office/drawing/2014/main" id="{FFD55885-E5C1-40E3-8089-D340F6CBF55D}"/>
+              </a:ext>
+            </a:extLst>
+          </p:cNvPr>
+          <p:cNvSpPr txBox="1"/>
           <p:nvPr/>
-        </p:nvPicPr>
-        <p:blipFill>
-          <a:blip r:embed="rId2"/>
-          <a:stretch>
-            <a:fillRect/>
-          </a:stretch>
-        </p:blipFill>
+        </p:nvSpPr>
         <p:spPr>
           <a:xfrm>
-            <a:off x="530942" y="1196752"/>
-            <a:ext cx="8287104" cy="5219904"/>
+            <a:off x="900641" y="5925192"/>
+            <a:ext cx="3096344" cy="646331"/>
           </a:xfrm>
           <a:prstGeom prst="rect">
             <a:avLst/>
           </a:prstGeom>
+          <a:noFill/>
+          <a:ln>
+            <a:solidFill>
+              <a:schemeClr val="tx1"/>
+            </a:solidFill>
+          </a:ln>
         </p:spPr>
-      </p:pic>
+        <p:txBody>
+          <a:bodyPr wrap="square">
+            <a:spAutoFit/>
+          </a:bodyPr>
+          <a:lstStyle/>
+          <a:p>
+            <a:r>
+              <a:rPr lang="es-CO" dirty="0">
+                <a:latin typeface="Consolas" panose="020B0609020204030204" pitchFamily="49" charset="0"/>
+              </a:rPr>
+              <a:t>x = </a:t>
+            </a:r>
+            <a:r>
+              <a:rPr lang="es-CO" dirty="0">
+                <a:effectLst/>
+                <a:latin typeface="Consolas" panose="020B0609020204030204" pitchFamily="49" charset="0"/>
+              </a:rPr>
+              <a:t>6,</a:t>
+            </a:r>
+            <a:r>
+              <a:rPr lang="es-CO" dirty="0">
+                <a:latin typeface="Consolas" panose="020B0609020204030204" pitchFamily="49" charset="0"/>
+              </a:rPr>
+              <a:t> y = </a:t>
+            </a:r>
+            <a:r>
+              <a:rPr lang="es-CO" dirty="0">
+                <a:effectLst/>
+                <a:latin typeface="Consolas" panose="020B0609020204030204" pitchFamily="49" charset="0"/>
+              </a:rPr>
+              <a:t>3</a:t>
+            </a:r>
+            <a:endParaRPr lang="en-US" dirty="0">
+              <a:latin typeface="Consolas" panose="020B0609020204030204" pitchFamily="49" charset="0"/>
+            </a:endParaRPr>
+          </a:p>
+          <a:p>
+            <a:r>
+              <a:rPr lang="en-US" dirty="0">
+                <a:latin typeface="Consolas" panose="020B0609020204030204" pitchFamily="49" charset="0"/>
+              </a:rPr>
+              <a:t>z =x &gt; </a:t>
+            </a:r>
+            <a:r>
+              <a:rPr lang="en-US" dirty="0">
+                <a:effectLst/>
+                <a:latin typeface="Consolas" panose="020B0609020204030204" pitchFamily="49" charset="0"/>
+              </a:rPr>
+              <a:t>5</a:t>
+            </a:r>
+            <a:r>
+              <a:rPr lang="en-US" dirty="0">
+                <a:latin typeface="Consolas" panose="020B0609020204030204" pitchFamily="49" charset="0"/>
+              </a:rPr>
+              <a:t> </a:t>
+            </a:r>
+            <a:r>
+              <a:rPr lang="en-US" dirty="0">
+                <a:effectLst/>
+                <a:latin typeface="Consolas" panose="020B0609020204030204" pitchFamily="49" charset="0"/>
+              </a:rPr>
+              <a:t>and</a:t>
+            </a:r>
+            <a:r>
+              <a:rPr lang="en-US" dirty="0">
+                <a:latin typeface="Consolas" panose="020B0609020204030204" pitchFamily="49" charset="0"/>
+              </a:rPr>
+              <a:t> y &lt; </a:t>
+            </a:r>
+            <a:r>
+              <a:rPr lang="en-US" dirty="0">
+                <a:effectLst/>
+                <a:latin typeface="Consolas" panose="020B0609020204030204" pitchFamily="49" charset="0"/>
+              </a:rPr>
+              <a:t>3</a:t>
+            </a:r>
+            <a:endParaRPr lang="es-CO" dirty="0">
+              <a:latin typeface="Consolas" panose="020B0609020204030204" pitchFamily="49" charset="0"/>
+            </a:endParaRPr>
+          </a:p>
+        </p:txBody>
+      </p:sp>
+      <p:sp>
+        <p:nvSpPr>
+          <p:cNvPr id="12" name="CuadroTexto 11">
+            <a:extLst>
+              <a:ext uri="{FF2B5EF4-FFF2-40B4-BE49-F238E27FC236}">
+                <a16:creationId xmlns:a16="http://schemas.microsoft.com/office/drawing/2014/main" id="{0D889C38-E9C4-49B7-8B0B-156DECD0CDA4}"/>
+              </a:ext>
+            </a:extLst>
+          </p:cNvPr>
+          <p:cNvSpPr txBox="1"/>
+          <p:nvPr/>
+        </p:nvSpPr>
+        <p:spPr>
+          <a:xfrm>
+            <a:off x="4751573" y="5925192"/>
+            <a:ext cx="3096344" cy="646331"/>
+          </a:xfrm>
+          <a:prstGeom prst="rect">
+            <a:avLst/>
+          </a:prstGeom>
+          <a:noFill/>
+          <a:ln>
+            <a:solidFill>
+              <a:schemeClr val="tx1"/>
+            </a:solidFill>
+          </a:ln>
+        </p:spPr>
+        <p:txBody>
+          <a:bodyPr wrap="square">
+            <a:spAutoFit/>
+          </a:bodyPr>
+          <a:lstStyle/>
+          <a:p>
+            <a:r>
+              <a:rPr lang="es-CO" dirty="0">
+                <a:latin typeface="Consolas" panose="020B0609020204030204" pitchFamily="49" charset="0"/>
+              </a:rPr>
+              <a:t>x = </a:t>
+            </a:r>
+            <a:r>
+              <a:rPr lang="es-CO" dirty="0">
+                <a:effectLst/>
+                <a:latin typeface="Consolas" panose="020B0609020204030204" pitchFamily="49" charset="0"/>
+              </a:rPr>
+              <a:t>6,</a:t>
+            </a:r>
+            <a:r>
+              <a:rPr lang="es-CO" dirty="0">
+                <a:latin typeface="Consolas" panose="020B0609020204030204" pitchFamily="49" charset="0"/>
+              </a:rPr>
+              <a:t> y = </a:t>
+            </a:r>
+            <a:r>
+              <a:rPr lang="es-CO" dirty="0">
+                <a:effectLst/>
+                <a:latin typeface="Consolas" panose="020B0609020204030204" pitchFamily="49" charset="0"/>
+              </a:rPr>
+              <a:t>3</a:t>
+            </a:r>
+            <a:endParaRPr lang="en-US" dirty="0">
+              <a:latin typeface="Consolas" panose="020B0609020204030204" pitchFamily="49" charset="0"/>
+            </a:endParaRPr>
+          </a:p>
+          <a:p>
+            <a:r>
+              <a:rPr lang="en-US" dirty="0">
+                <a:latin typeface="Consolas" panose="020B0609020204030204" pitchFamily="49" charset="0"/>
+              </a:rPr>
+              <a:t>z = x &gt; </a:t>
+            </a:r>
+            <a:r>
+              <a:rPr lang="en-US" dirty="0">
+                <a:effectLst/>
+                <a:latin typeface="Consolas" panose="020B0609020204030204" pitchFamily="49" charset="0"/>
+              </a:rPr>
+              <a:t>5</a:t>
+            </a:r>
+            <a:r>
+              <a:rPr lang="en-US" dirty="0">
+                <a:latin typeface="Consolas" panose="020B0609020204030204" pitchFamily="49" charset="0"/>
+              </a:rPr>
+              <a:t> &amp; y &lt; </a:t>
+            </a:r>
+            <a:r>
+              <a:rPr lang="en-US" dirty="0">
+                <a:effectLst/>
+                <a:latin typeface="Consolas" panose="020B0609020204030204" pitchFamily="49" charset="0"/>
+              </a:rPr>
+              <a:t>3</a:t>
+            </a:r>
+            <a:endParaRPr lang="es-CO" dirty="0">
+              <a:latin typeface="Consolas" panose="020B0609020204030204" pitchFamily="49" charset="0"/>
+            </a:endParaRPr>
+          </a:p>
+        </p:txBody>
+      </p:sp>
     </p:spTree>
     <p:extLst>
       <p:ext uri="{BB962C8B-B14F-4D97-AF65-F5344CB8AC3E}">
-        <p14:creationId xmlns:p14="http://schemas.microsoft.com/office/powerpoint/2010/main" val="3024962735"/>
+        <p14:creationId xmlns:p14="http://schemas.microsoft.com/office/powerpoint/2010/main" val="2820432044"/>
+      </p:ext>
+    </p:extLst>
+  </p:cSld>
+  <p:clrMapOvr>
+    <a:masterClrMapping/>
+  </p:clrMapOvr>
+</p:sld>
+</file>
+
+<file path=ppt/slides/slide27.xml><?xml version="1.0" encoding="utf-8"?>
+<p:sld xmlns:a="http://schemas.openxmlformats.org/drawingml/2006/main" xmlns:r="http://schemas.openxmlformats.org/officeDocument/2006/relationships" xmlns:p="http://schemas.openxmlformats.org/presentationml/2006/main">
+  <p:cSld>
+    <p:spTree>
+      <p:nvGrpSpPr>
+        <p:cNvPr id="1" name=""/>
+        <p:cNvGrpSpPr/>
+        <p:nvPr/>
+      </p:nvGrpSpPr>
+      <p:grpSpPr>
+        <a:xfrm>
+          <a:off x="0" y="0"/>
+          <a:ext cx="0" cy="0"/>
+          <a:chOff x="0" y="0"/>
+          <a:chExt cx="0" cy="0"/>
+        </a:xfrm>
+      </p:grpSpPr>
+      <p:sp>
+        <p:nvSpPr>
+          <p:cNvPr id="5" name="4 Título"/>
+          <p:cNvSpPr>
+            <a:spLocks noGrp="1"/>
+          </p:cNvSpPr>
+          <p:nvPr>
+            <p:ph type="title"/>
+          </p:nvPr>
+        </p:nvSpPr>
+        <p:spPr>
+          <a:xfrm>
+            <a:off x="190054" y="44624"/>
+            <a:ext cx="8229600" cy="766260"/>
+          </a:xfrm>
+        </p:spPr>
+        <p:txBody>
+          <a:bodyPr>
+            <a:noAutofit/>
+          </a:bodyPr>
+          <a:lstStyle/>
+          <a:p>
+            <a:r>
+              <a:rPr lang="es-MX" sz="2800" dirty="0"/>
+              <a:t>Igualdad — comparación entre lenguajes</a:t>
+            </a:r>
+            <a:endParaRPr lang="es-CO" sz="2800" dirty="0"/>
+          </a:p>
+        </p:txBody>
+      </p:sp>
+      <p:sp>
+        <p:nvSpPr>
+          <p:cNvPr id="8" name="1 Marcador de contenido"/>
+          <p:cNvSpPr>
+            <a:spLocks noGrp="1"/>
+          </p:cNvSpPr>
+          <p:nvPr>
+            <p:ph idx="1"/>
+          </p:nvPr>
+        </p:nvSpPr>
+        <p:spPr>
+          <a:xfrm>
+            <a:off x="162555" y="744352"/>
+            <a:ext cx="8521140" cy="5564968"/>
+          </a:xfrm>
+        </p:spPr>
+        <p:txBody>
+          <a:bodyPr>
+            <a:normAutofit/>
+          </a:bodyPr>
+          <a:lstStyle/>
+          <a:p>
+            <a:pPr marL="0" indent="0">
+              <a:buNone/>
+            </a:pPr>
+            <a:r>
+              <a:rPr lang="es-MX" sz="2200" dirty="0"/>
+              <a:t>El mismo símbolo </a:t>
+            </a:r>
+            <a:r>
+              <a:rPr lang="es-MX" sz="2200" dirty="0">
+                <a:solidFill>
+                  <a:srgbClr val="C00000"/>
+                </a:solidFill>
+                <a:latin typeface="Consolas" panose="020B0609020204030204" pitchFamily="49" charset="0"/>
+              </a:rPr>
+              <a:t>==</a:t>
+            </a:r>
+            <a:r>
+              <a:rPr lang="es-MX" sz="2200" dirty="0"/>
+              <a:t>, comportamientos distintos:</a:t>
+            </a:r>
+          </a:p>
+          <a:p>
+            <a:r>
+              <a:rPr lang="es-MX" sz="1800" dirty="0"/>
+              <a:t>En Python, </a:t>
+            </a:r>
+            <a:r>
+              <a:rPr lang="es-MX" sz="1800" dirty="0">
+                <a:solidFill>
+                  <a:srgbClr val="C00000"/>
+                </a:solidFill>
+                <a:latin typeface="Consolas" panose="020B0609020204030204" pitchFamily="49" charset="0"/>
+              </a:rPr>
+              <a:t>==</a:t>
+            </a:r>
+            <a:r>
+              <a:rPr lang="es-MX" sz="1800" dirty="0"/>
+              <a:t> compara el </a:t>
+            </a:r>
+            <a:r>
+              <a:rPr lang="es-MX" sz="1800" b="1" dirty="0"/>
+              <a:t>valor/contenido</a:t>
+            </a:r>
+            <a:r>
+              <a:rPr lang="es-MX" sz="1800" dirty="0"/>
+              <a:t>, como uno esperaría intuitivamente.</a:t>
+            </a:r>
+          </a:p>
+          <a:p>
+            <a:r>
+              <a:rPr lang="es-MX" sz="1800" dirty="0"/>
+              <a:t>En C y Java, </a:t>
+            </a:r>
+            <a:r>
+              <a:rPr lang="es-MX" sz="1800" dirty="0">
+                <a:solidFill>
+                  <a:srgbClr val="C00000"/>
+                </a:solidFill>
+                <a:latin typeface="Consolas" panose="020B0609020204030204" pitchFamily="49" charset="0"/>
+              </a:rPr>
+              <a:t>==</a:t>
+            </a:r>
+            <a:r>
+              <a:rPr lang="es-MX" sz="1800" dirty="0"/>
+              <a:t> compara valor en tipos primitivos, pero </a:t>
+            </a:r>
+            <a:r>
+              <a:rPr lang="es-MX" sz="1800" b="1" dirty="0"/>
+              <a:t>dirección/referencia</a:t>
+            </a:r>
+            <a:r>
+              <a:rPr lang="es-MX" sz="1800" dirty="0"/>
+              <a:t> en strings u objetos, no el contenido.</a:t>
+            </a:r>
+          </a:p>
+          <a:p>
+            <a:r>
+              <a:rPr lang="es-MX" sz="1800" dirty="0"/>
+              <a:t>En JavaScript, </a:t>
+            </a:r>
+            <a:r>
+              <a:rPr lang="es-MX" sz="1800" dirty="0">
+                <a:solidFill>
+                  <a:srgbClr val="C00000"/>
+                </a:solidFill>
+                <a:latin typeface="Consolas" panose="020B0609020204030204" pitchFamily="49" charset="0"/>
+              </a:rPr>
+              <a:t>==</a:t>
+            </a:r>
+            <a:r>
+              <a:rPr lang="es-MX" sz="1800" dirty="0"/>
+              <a:t> compara </a:t>
+            </a:r>
+            <a:r>
+              <a:rPr lang="es-MX" sz="1800" b="1" dirty="0"/>
+              <a:t>con conversión automática de tipos</a:t>
+            </a:r>
+            <a:r>
+              <a:rPr lang="es-MX" sz="1800" dirty="0"/>
+              <a:t>; </a:t>
+            </a:r>
+            <a:r>
+              <a:rPr lang="es-MX" sz="1800" dirty="0">
+                <a:solidFill>
+                  <a:srgbClr val="C00000"/>
+                </a:solidFill>
+                <a:latin typeface="Consolas" panose="020B0609020204030204" pitchFamily="49" charset="0"/>
+              </a:rPr>
+              <a:t>===</a:t>
+            </a:r>
+            <a:r>
+              <a:rPr lang="es-MX" sz="1800" dirty="0"/>
+              <a:t> compara sin conversión (la forma recomendada).</a:t>
+            </a:r>
+          </a:p>
+          <a:p>
+            <a:endParaRPr lang="es-MX" sz="1800" dirty="0"/>
+          </a:p>
+          <a:p>
+            <a:endParaRPr lang="es-MX" sz="2000" dirty="0"/>
+          </a:p>
+          <a:p>
+            <a:endParaRPr lang="es-MX" sz="2000" dirty="0"/>
+          </a:p>
+          <a:p>
+            <a:endParaRPr lang="es-MX" sz="2000" dirty="0"/>
+          </a:p>
+          <a:p>
+            <a:endParaRPr lang="es-MX" sz="2000" dirty="0"/>
+          </a:p>
+        </p:txBody>
+      </p:sp>
+      <p:graphicFrame>
+        <p:nvGraphicFramePr>
+          <p:cNvPr id="3" name="Tabla 2">
+            <a:extLst>
+              <a:ext uri="{FF2B5EF4-FFF2-40B4-BE49-F238E27FC236}">
+                <a16:creationId xmlns:a16="http://schemas.microsoft.com/office/drawing/2014/main" id="{F11FD0BC-4346-4A59-83C4-C217D83FA3C1}"/>
+              </a:ext>
+            </a:extLst>
+          </p:cNvPr>
+          <p:cNvGraphicFramePr>
+            <a:graphicFrameLocks noGrp="1"/>
+          </p:cNvGraphicFramePr>
+          <p:nvPr>
+            <p:extLst>
+              <p:ext uri="{D42A27DB-BD31-4B8C-83A1-F6EECF244321}">
+                <p14:modId xmlns:p14="http://schemas.microsoft.com/office/powerpoint/2010/main" val="3546367196"/>
+              </p:ext>
+            </p:extLst>
+          </p:nvPr>
+        </p:nvGraphicFramePr>
+        <p:xfrm>
+          <a:off x="960969" y="2932509"/>
+          <a:ext cx="6687769" cy="3639015"/>
+        </p:xfrm>
+        <a:graphic>
+          <a:graphicData uri="http://schemas.openxmlformats.org/drawingml/2006/table">
+            <a:tbl>
+              <a:tblPr/>
+              <a:tblGrid>
+                <a:gridCol w="1245833">
+                  <a:extLst>
+                    <a:ext uri="{9D8B030D-6E8A-4147-A177-3AD203B41FA5}">
+                      <a16:colId xmlns:a16="http://schemas.microsoft.com/office/drawing/2014/main" val="3077131784"/>
+                    </a:ext>
+                  </a:extLst>
+                </a:gridCol>
+                <a:gridCol w="1281890">
+                  <a:extLst>
+                    <a:ext uri="{9D8B030D-6E8A-4147-A177-3AD203B41FA5}">
+                      <a16:colId xmlns:a16="http://schemas.microsoft.com/office/drawing/2014/main" val="2318412139"/>
+                    </a:ext>
+                  </a:extLst>
+                </a:gridCol>
+                <a:gridCol w="4160046">
+                  <a:extLst>
+                    <a:ext uri="{9D8B030D-6E8A-4147-A177-3AD203B41FA5}">
+                      <a16:colId xmlns:a16="http://schemas.microsoft.com/office/drawing/2014/main" val="1215658101"/>
+                    </a:ext>
+                  </a:extLst>
+                </a:gridCol>
+              </a:tblGrid>
+              <a:tr h="236109">
+                <a:tc>
+                  <a:txBody>
+                    <a:bodyPr/>
+                    <a:lstStyle/>
+                    <a:p>
+                      <a:r>
+                        <a:rPr lang="es-CO" sz="1800" b="1">
+                          <a:solidFill>
+                            <a:schemeClr val="bg1"/>
+                          </a:solidFill>
+                        </a:rPr>
+                        <a:t>Lenguaje</a:t>
+                      </a:r>
+                    </a:p>
+                  </a:txBody>
+                  <a:tcPr marL="85320" marR="85320" marT="42660" marB="42660" anchor="ctr">
+                    <a:lnL w="12700" cap="flat" cmpd="sng" algn="ctr">
+                      <a:solidFill>
+                        <a:schemeClr val="tx1"/>
+                      </a:solidFill>
+                      <a:prstDash val="solid"/>
+                      <a:round/>
+                      <a:headEnd type="none" w="med" len="med"/>
+                      <a:tailEnd type="none" w="med" len="med"/>
+                    </a:lnL>
+                    <a:lnR w="12700" cap="flat" cmpd="sng" algn="ctr">
+                      <a:solidFill>
+                        <a:schemeClr val="tx1"/>
+                      </a:solidFill>
+                      <a:prstDash val="solid"/>
+                      <a:round/>
+                      <a:headEnd type="none" w="med" len="med"/>
+                      <a:tailEnd type="none" w="med" len="med"/>
+                    </a:lnR>
+                    <a:lnT w="12700" cap="flat" cmpd="sng" algn="ctr">
+                      <a:solidFill>
+                        <a:schemeClr val="tx1"/>
+                      </a:solidFill>
+                      <a:prstDash val="solid"/>
+                      <a:round/>
+                      <a:headEnd type="none" w="med" len="med"/>
+                      <a:tailEnd type="none" w="med" len="med"/>
+                    </a:lnT>
+                    <a:lnB w="12700" cap="flat" cmpd="sng" algn="ctr">
+                      <a:solidFill>
+                        <a:schemeClr val="tx1"/>
+                      </a:solidFill>
+                      <a:prstDash val="solid"/>
+                      <a:round/>
+                      <a:headEnd type="none" w="med" len="med"/>
+                      <a:tailEnd type="none" w="med" len="med"/>
+                    </a:lnB>
+                    <a:solidFill>
+                      <a:schemeClr val="tx1"/>
+                    </a:solidFill>
+                  </a:tcPr>
+                </a:tc>
+                <a:tc>
+                  <a:txBody>
+                    <a:bodyPr/>
+                    <a:lstStyle/>
+                    <a:p>
+                      <a:r>
+                        <a:rPr lang="es-CO" sz="1800" b="1">
+                          <a:solidFill>
+                            <a:schemeClr val="bg1"/>
+                          </a:solidFill>
+                        </a:rPr>
+                        <a:t>Operador</a:t>
+                      </a:r>
+                    </a:p>
+                  </a:txBody>
+                  <a:tcPr marL="85320" marR="85320" marT="42660" marB="42660" anchor="ctr">
+                    <a:lnL w="12700" cap="flat" cmpd="sng" algn="ctr">
+                      <a:solidFill>
+                        <a:schemeClr val="tx1"/>
+                      </a:solidFill>
+                      <a:prstDash val="solid"/>
+                      <a:round/>
+                      <a:headEnd type="none" w="med" len="med"/>
+                      <a:tailEnd type="none" w="med" len="med"/>
+                    </a:lnL>
+                    <a:lnR w="12700" cap="flat" cmpd="sng" algn="ctr">
+                      <a:solidFill>
+                        <a:schemeClr val="tx1"/>
+                      </a:solidFill>
+                      <a:prstDash val="solid"/>
+                      <a:round/>
+                      <a:headEnd type="none" w="med" len="med"/>
+                      <a:tailEnd type="none" w="med" len="med"/>
+                    </a:lnR>
+                    <a:lnT w="12700" cap="flat" cmpd="sng" algn="ctr">
+                      <a:solidFill>
+                        <a:schemeClr val="tx1"/>
+                      </a:solidFill>
+                      <a:prstDash val="solid"/>
+                      <a:round/>
+                      <a:headEnd type="none" w="med" len="med"/>
+                      <a:tailEnd type="none" w="med" len="med"/>
+                    </a:lnT>
+                    <a:lnB w="12700" cap="flat" cmpd="sng" algn="ctr">
+                      <a:solidFill>
+                        <a:schemeClr val="tx1"/>
+                      </a:solidFill>
+                      <a:prstDash val="solid"/>
+                      <a:round/>
+                      <a:headEnd type="none" w="med" len="med"/>
+                      <a:tailEnd type="none" w="med" len="med"/>
+                    </a:lnB>
+                    <a:solidFill>
+                      <a:schemeClr val="tx1"/>
+                    </a:solidFill>
+                  </a:tcPr>
+                </a:tc>
+                <a:tc>
+                  <a:txBody>
+                    <a:bodyPr/>
+                    <a:lstStyle/>
+                    <a:p>
+                      <a:r>
+                        <a:rPr lang="es-CO" sz="1800" b="1" dirty="0">
+                          <a:solidFill>
+                            <a:schemeClr val="bg1"/>
+                          </a:solidFill>
+                        </a:rPr>
+                        <a:t>Qué compara</a:t>
+                      </a:r>
+                    </a:p>
+                  </a:txBody>
+                  <a:tcPr marL="85320" marR="85320" marT="42660" marB="42660" anchor="ctr">
+                    <a:lnL w="12700" cap="flat" cmpd="sng" algn="ctr">
+                      <a:solidFill>
+                        <a:schemeClr val="tx1"/>
+                      </a:solidFill>
+                      <a:prstDash val="solid"/>
+                      <a:round/>
+                      <a:headEnd type="none" w="med" len="med"/>
+                      <a:tailEnd type="none" w="med" len="med"/>
+                    </a:lnL>
+                    <a:lnR w="12700" cap="flat" cmpd="sng" algn="ctr">
+                      <a:solidFill>
+                        <a:schemeClr val="tx1"/>
+                      </a:solidFill>
+                      <a:prstDash val="solid"/>
+                      <a:round/>
+                      <a:headEnd type="none" w="med" len="med"/>
+                      <a:tailEnd type="none" w="med" len="med"/>
+                    </a:lnR>
+                    <a:lnT w="12700" cap="flat" cmpd="sng" algn="ctr">
+                      <a:solidFill>
+                        <a:schemeClr val="tx1"/>
+                      </a:solidFill>
+                      <a:prstDash val="solid"/>
+                      <a:round/>
+                      <a:headEnd type="none" w="med" len="med"/>
+                      <a:tailEnd type="none" w="med" len="med"/>
+                    </a:lnT>
+                    <a:lnB w="12700" cap="flat" cmpd="sng" algn="ctr">
+                      <a:solidFill>
+                        <a:schemeClr val="tx1"/>
+                      </a:solidFill>
+                      <a:prstDash val="solid"/>
+                      <a:round/>
+                      <a:headEnd type="none" w="med" len="med"/>
+                      <a:tailEnd type="none" w="med" len="med"/>
+                    </a:lnB>
+                    <a:solidFill>
+                      <a:schemeClr val="tx1"/>
+                    </a:solidFill>
+                  </a:tcPr>
+                </a:tc>
+                <a:extLst>
+                  <a:ext uri="{0D108BD9-81ED-4DB2-BD59-A6C34878D82A}">
+                    <a16:rowId xmlns:a16="http://schemas.microsoft.com/office/drawing/2014/main" val="721467440"/>
+                  </a:ext>
+                </a:extLst>
+              </a:tr>
+              <a:tr h="312803">
+                <a:tc>
+                  <a:txBody>
+                    <a:bodyPr/>
+                    <a:lstStyle/>
+                    <a:p>
+                      <a:r>
+                        <a:rPr lang="es-CO" sz="1600"/>
+                        <a:t>Python</a:t>
+                      </a:r>
+                    </a:p>
+                  </a:txBody>
+                  <a:tcPr marL="85320" marR="85320" marT="42660" marB="42660" anchor="ctr">
+                    <a:lnL w="12700" cap="flat" cmpd="sng" algn="ctr">
+                      <a:solidFill>
+                        <a:schemeClr val="tx1"/>
+                      </a:solidFill>
+                      <a:prstDash val="solid"/>
+                      <a:round/>
+                      <a:headEnd type="none" w="med" len="med"/>
+                      <a:tailEnd type="none" w="med" len="med"/>
+                    </a:lnL>
+                    <a:lnR w="12700" cap="flat" cmpd="sng" algn="ctr">
+                      <a:solidFill>
+                        <a:schemeClr val="tx1"/>
+                      </a:solidFill>
+                      <a:prstDash val="solid"/>
+                      <a:round/>
+                      <a:headEnd type="none" w="med" len="med"/>
+                      <a:tailEnd type="none" w="med" len="med"/>
+                    </a:lnR>
+                    <a:lnT w="12700" cap="flat" cmpd="sng" algn="ctr">
+                      <a:solidFill>
+                        <a:schemeClr val="tx1"/>
+                      </a:solidFill>
+                      <a:prstDash val="solid"/>
+                      <a:round/>
+                      <a:headEnd type="none" w="med" len="med"/>
+                      <a:tailEnd type="none" w="med" len="med"/>
+                    </a:lnT>
+                    <a:lnB w="12700" cap="flat" cmpd="sng" algn="ctr">
+                      <a:solidFill>
+                        <a:schemeClr val="tx1"/>
+                      </a:solidFill>
+                      <a:prstDash val="solid"/>
+                      <a:round/>
+                      <a:headEnd type="none" w="med" len="med"/>
+                      <a:tailEnd type="none" w="med" len="med"/>
+                    </a:lnB>
+                  </a:tcPr>
+                </a:tc>
+                <a:tc>
+                  <a:txBody>
+                    <a:bodyPr/>
+                    <a:lstStyle/>
+                    <a:p>
+                      <a:r>
+                        <a:rPr lang="es-CO" sz="1600" dirty="0">
+                          <a:solidFill>
+                            <a:srgbClr val="C00000"/>
+                          </a:solidFill>
+                          <a:latin typeface="Consolas" panose="020B0609020204030204" pitchFamily="49" charset="0"/>
+                        </a:rPr>
+                        <a:t>==</a:t>
+                      </a:r>
+                    </a:p>
+                  </a:txBody>
+                  <a:tcPr marL="85320" marR="85320" marT="42660" marB="42660" anchor="ctr">
+                    <a:lnL w="12700" cap="flat" cmpd="sng" algn="ctr">
+                      <a:solidFill>
+                        <a:schemeClr val="tx1"/>
+                      </a:solidFill>
+                      <a:prstDash val="solid"/>
+                      <a:round/>
+                      <a:headEnd type="none" w="med" len="med"/>
+                      <a:tailEnd type="none" w="med" len="med"/>
+                    </a:lnL>
+                    <a:lnR w="12700" cap="flat" cmpd="sng" algn="ctr">
+                      <a:solidFill>
+                        <a:schemeClr val="tx1"/>
+                      </a:solidFill>
+                      <a:prstDash val="solid"/>
+                      <a:round/>
+                      <a:headEnd type="none" w="med" len="med"/>
+                      <a:tailEnd type="none" w="med" len="med"/>
+                    </a:lnR>
+                    <a:lnT w="12700" cap="flat" cmpd="sng" algn="ctr">
+                      <a:solidFill>
+                        <a:schemeClr val="tx1"/>
+                      </a:solidFill>
+                      <a:prstDash val="solid"/>
+                      <a:round/>
+                      <a:headEnd type="none" w="med" len="med"/>
+                      <a:tailEnd type="none" w="med" len="med"/>
+                    </a:lnT>
+                    <a:lnB w="12700" cap="flat" cmpd="sng" algn="ctr">
+                      <a:solidFill>
+                        <a:schemeClr val="tx1"/>
+                      </a:solidFill>
+                      <a:prstDash val="solid"/>
+                      <a:round/>
+                      <a:headEnd type="none" w="med" len="med"/>
+                      <a:tailEnd type="none" w="med" len="med"/>
+                    </a:lnB>
+                  </a:tcPr>
+                </a:tc>
+                <a:tc>
+                  <a:txBody>
+                    <a:bodyPr/>
+                    <a:lstStyle/>
+                    <a:p>
+                      <a:r>
+                        <a:rPr lang="es-CO" sz="1600"/>
+                        <a:t>Valor/contenido</a:t>
+                      </a:r>
+                    </a:p>
+                  </a:txBody>
+                  <a:tcPr marL="85320" marR="85320" marT="42660" marB="42660" anchor="ctr">
+                    <a:lnL w="12700" cap="flat" cmpd="sng" algn="ctr">
+                      <a:solidFill>
+                        <a:schemeClr val="tx1"/>
+                      </a:solidFill>
+                      <a:prstDash val="solid"/>
+                      <a:round/>
+                      <a:headEnd type="none" w="med" len="med"/>
+                      <a:tailEnd type="none" w="med" len="med"/>
+                    </a:lnL>
+                    <a:lnR w="12700" cap="flat" cmpd="sng" algn="ctr">
+                      <a:solidFill>
+                        <a:schemeClr val="tx1"/>
+                      </a:solidFill>
+                      <a:prstDash val="solid"/>
+                      <a:round/>
+                      <a:headEnd type="none" w="med" len="med"/>
+                      <a:tailEnd type="none" w="med" len="med"/>
+                    </a:lnR>
+                    <a:lnT w="12700" cap="flat" cmpd="sng" algn="ctr">
+                      <a:solidFill>
+                        <a:schemeClr val="tx1"/>
+                      </a:solidFill>
+                      <a:prstDash val="solid"/>
+                      <a:round/>
+                      <a:headEnd type="none" w="med" len="med"/>
+                      <a:tailEnd type="none" w="med" len="med"/>
+                    </a:lnT>
+                    <a:lnB w="12700" cap="flat" cmpd="sng" algn="ctr">
+                      <a:solidFill>
+                        <a:schemeClr val="tx1"/>
+                      </a:solidFill>
+                      <a:prstDash val="solid"/>
+                      <a:round/>
+                      <a:headEnd type="none" w="med" len="med"/>
+                      <a:tailEnd type="none" w="med" len="med"/>
+                    </a:lnB>
+                  </a:tcPr>
+                </a:tc>
+                <a:extLst>
+                  <a:ext uri="{0D108BD9-81ED-4DB2-BD59-A6C34878D82A}">
+                    <a16:rowId xmlns:a16="http://schemas.microsoft.com/office/drawing/2014/main" val="537760689"/>
+                  </a:ext>
+                </a:extLst>
+              </a:tr>
+              <a:tr h="312803">
+                <a:tc>
+                  <a:txBody>
+                    <a:bodyPr/>
+                    <a:lstStyle/>
+                    <a:p>
+                      <a:r>
+                        <a:rPr lang="es-CO" sz="1600"/>
+                        <a:t>Python</a:t>
+                      </a:r>
+                    </a:p>
+                  </a:txBody>
+                  <a:tcPr marL="85320" marR="85320" marT="42660" marB="42660" anchor="ctr">
+                    <a:lnL w="12700" cap="flat" cmpd="sng" algn="ctr">
+                      <a:solidFill>
+                        <a:schemeClr val="tx1"/>
+                      </a:solidFill>
+                      <a:prstDash val="solid"/>
+                      <a:round/>
+                      <a:headEnd type="none" w="med" len="med"/>
+                      <a:tailEnd type="none" w="med" len="med"/>
+                    </a:lnL>
+                    <a:lnR w="12700" cap="flat" cmpd="sng" algn="ctr">
+                      <a:solidFill>
+                        <a:schemeClr val="tx1"/>
+                      </a:solidFill>
+                      <a:prstDash val="solid"/>
+                      <a:round/>
+                      <a:headEnd type="none" w="med" len="med"/>
+                      <a:tailEnd type="none" w="med" len="med"/>
+                    </a:lnR>
+                    <a:lnT w="12700" cap="flat" cmpd="sng" algn="ctr">
+                      <a:solidFill>
+                        <a:schemeClr val="tx1"/>
+                      </a:solidFill>
+                      <a:prstDash val="solid"/>
+                      <a:round/>
+                      <a:headEnd type="none" w="med" len="med"/>
+                      <a:tailEnd type="none" w="med" len="med"/>
+                    </a:lnT>
+                    <a:lnB w="12700" cap="flat" cmpd="sng" algn="ctr">
+                      <a:solidFill>
+                        <a:schemeClr val="tx1"/>
+                      </a:solidFill>
+                      <a:prstDash val="solid"/>
+                      <a:round/>
+                      <a:headEnd type="none" w="med" len="med"/>
+                      <a:tailEnd type="none" w="med" len="med"/>
+                    </a:lnB>
+                  </a:tcPr>
+                </a:tc>
+                <a:tc>
+                  <a:txBody>
+                    <a:bodyPr/>
+                    <a:lstStyle/>
+                    <a:p>
+                      <a:r>
+                        <a:rPr lang="es-CO" sz="1600">
+                          <a:solidFill>
+                            <a:srgbClr val="C00000"/>
+                          </a:solidFill>
+                          <a:latin typeface="Consolas" panose="020B0609020204030204" pitchFamily="49" charset="0"/>
+                        </a:rPr>
+                        <a:t>is</a:t>
+                      </a:r>
+                    </a:p>
+                  </a:txBody>
+                  <a:tcPr marL="85320" marR="85320" marT="42660" marB="42660" anchor="ctr">
+                    <a:lnL w="12700" cap="flat" cmpd="sng" algn="ctr">
+                      <a:solidFill>
+                        <a:schemeClr val="tx1"/>
+                      </a:solidFill>
+                      <a:prstDash val="solid"/>
+                      <a:round/>
+                      <a:headEnd type="none" w="med" len="med"/>
+                      <a:tailEnd type="none" w="med" len="med"/>
+                    </a:lnL>
+                    <a:lnR w="12700" cap="flat" cmpd="sng" algn="ctr">
+                      <a:solidFill>
+                        <a:schemeClr val="tx1"/>
+                      </a:solidFill>
+                      <a:prstDash val="solid"/>
+                      <a:round/>
+                      <a:headEnd type="none" w="med" len="med"/>
+                      <a:tailEnd type="none" w="med" len="med"/>
+                    </a:lnR>
+                    <a:lnT w="12700" cap="flat" cmpd="sng" algn="ctr">
+                      <a:solidFill>
+                        <a:schemeClr val="tx1"/>
+                      </a:solidFill>
+                      <a:prstDash val="solid"/>
+                      <a:round/>
+                      <a:headEnd type="none" w="med" len="med"/>
+                      <a:tailEnd type="none" w="med" len="med"/>
+                    </a:lnT>
+                    <a:lnB w="12700" cap="flat" cmpd="sng" algn="ctr">
+                      <a:solidFill>
+                        <a:schemeClr val="tx1"/>
+                      </a:solidFill>
+                      <a:prstDash val="solid"/>
+                      <a:round/>
+                      <a:headEnd type="none" w="med" len="med"/>
+                      <a:tailEnd type="none" w="med" len="med"/>
+                    </a:lnB>
+                  </a:tcPr>
+                </a:tc>
+                <a:tc>
+                  <a:txBody>
+                    <a:bodyPr/>
+                    <a:lstStyle/>
+                    <a:p>
+                      <a:r>
+                        <a:rPr lang="es-CO" sz="1600"/>
+                        <a:t>Identidad (misma referencia)</a:t>
+                      </a:r>
+                    </a:p>
+                  </a:txBody>
+                  <a:tcPr marL="85320" marR="85320" marT="42660" marB="42660" anchor="ctr">
+                    <a:lnL w="12700" cap="flat" cmpd="sng" algn="ctr">
+                      <a:solidFill>
+                        <a:schemeClr val="tx1"/>
+                      </a:solidFill>
+                      <a:prstDash val="solid"/>
+                      <a:round/>
+                      <a:headEnd type="none" w="med" len="med"/>
+                      <a:tailEnd type="none" w="med" len="med"/>
+                    </a:lnL>
+                    <a:lnR w="12700" cap="flat" cmpd="sng" algn="ctr">
+                      <a:solidFill>
+                        <a:schemeClr val="tx1"/>
+                      </a:solidFill>
+                      <a:prstDash val="solid"/>
+                      <a:round/>
+                      <a:headEnd type="none" w="med" len="med"/>
+                      <a:tailEnd type="none" w="med" len="med"/>
+                    </a:lnR>
+                    <a:lnT w="12700" cap="flat" cmpd="sng" algn="ctr">
+                      <a:solidFill>
+                        <a:schemeClr val="tx1"/>
+                      </a:solidFill>
+                      <a:prstDash val="solid"/>
+                      <a:round/>
+                      <a:headEnd type="none" w="med" len="med"/>
+                      <a:tailEnd type="none" w="med" len="med"/>
+                    </a:lnT>
+                    <a:lnB w="12700" cap="flat" cmpd="sng" algn="ctr">
+                      <a:solidFill>
+                        <a:schemeClr val="tx1"/>
+                      </a:solidFill>
+                      <a:prstDash val="solid"/>
+                      <a:round/>
+                      <a:headEnd type="none" w="med" len="med"/>
+                      <a:tailEnd type="none" w="med" len="med"/>
+                    </a:lnB>
+                  </a:tcPr>
+                </a:tc>
+                <a:extLst>
+                  <a:ext uri="{0D108BD9-81ED-4DB2-BD59-A6C34878D82A}">
+                    <a16:rowId xmlns:a16="http://schemas.microsoft.com/office/drawing/2014/main" val="3130408759"/>
+                  </a:ext>
+                </a:extLst>
+              </a:tr>
+              <a:tr h="544525">
+                <a:tc>
+                  <a:txBody>
+                    <a:bodyPr/>
+                    <a:lstStyle/>
+                    <a:p>
+                      <a:r>
+                        <a:rPr lang="es-CO" sz="1600"/>
+                        <a:t>C</a:t>
+                      </a:r>
+                    </a:p>
+                  </a:txBody>
+                  <a:tcPr marL="85320" marR="85320" marT="42660" marB="42660" anchor="ctr">
+                    <a:lnL w="12700" cap="flat" cmpd="sng" algn="ctr">
+                      <a:solidFill>
+                        <a:schemeClr val="tx1"/>
+                      </a:solidFill>
+                      <a:prstDash val="solid"/>
+                      <a:round/>
+                      <a:headEnd type="none" w="med" len="med"/>
+                      <a:tailEnd type="none" w="med" len="med"/>
+                    </a:lnL>
+                    <a:lnR w="12700" cap="flat" cmpd="sng" algn="ctr">
+                      <a:solidFill>
+                        <a:schemeClr val="tx1"/>
+                      </a:solidFill>
+                      <a:prstDash val="solid"/>
+                      <a:round/>
+                      <a:headEnd type="none" w="med" len="med"/>
+                      <a:tailEnd type="none" w="med" len="med"/>
+                    </a:lnR>
+                    <a:lnT w="12700" cap="flat" cmpd="sng" algn="ctr">
+                      <a:solidFill>
+                        <a:schemeClr val="tx1"/>
+                      </a:solidFill>
+                      <a:prstDash val="solid"/>
+                      <a:round/>
+                      <a:headEnd type="none" w="med" len="med"/>
+                      <a:tailEnd type="none" w="med" len="med"/>
+                    </a:lnT>
+                    <a:lnB w="12700" cap="flat" cmpd="sng" algn="ctr">
+                      <a:solidFill>
+                        <a:schemeClr val="tx1"/>
+                      </a:solidFill>
+                      <a:prstDash val="solid"/>
+                      <a:round/>
+                      <a:headEnd type="none" w="med" len="med"/>
+                      <a:tailEnd type="none" w="med" len="med"/>
+                    </a:lnB>
+                  </a:tcPr>
+                </a:tc>
+                <a:tc>
+                  <a:txBody>
+                    <a:bodyPr/>
+                    <a:lstStyle/>
+                    <a:p>
+                      <a:r>
+                        <a:rPr lang="es-CO" sz="1600">
+                          <a:solidFill>
+                            <a:srgbClr val="C00000"/>
+                          </a:solidFill>
+                          <a:latin typeface="Consolas" panose="020B0609020204030204" pitchFamily="49" charset="0"/>
+                        </a:rPr>
+                        <a:t>==</a:t>
+                      </a:r>
+                    </a:p>
+                  </a:txBody>
+                  <a:tcPr marL="85320" marR="85320" marT="42660" marB="42660" anchor="ctr">
+                    <a:lnL w="12700" cap="flat" cmpd="sng" algn="ctr">
+                      <a:solidFill>
+                        <a:schemeClr val="tx1"/>
+                      </a:solidFill>
+                      <a:prstDash val="solid"/>
+                      <a:round/>
+                      <a:headEnd type="none" w="med" len="med"/>
+                      <a:tailEnd type="none" w="med" len="med"/>
+                    </a:lnL>
+                    <a:lnR w="12700" cap="flat" cmpd="sng" algn="ctr">
+                      <a:solidFill>
+                        <a:schemeClr val="tx1"/>
+                      </a:solidFill>
+                      <a:prstDash val="solid"/>
+                      <a:round/>
+                      <a:headEnd type="none" w="med" len="med"/>
+                      <a:tailEnd type="none" w="med" len="med"/>
+                    </a:lnR>
+                    <a:lnT w="12700" cap="flat" cmpd="sng" algn="ctr">
+                      <a:solidFill>
+                        <a:schemeClr val="tx1"/>
+                      </a:solidFill>
+                      <a:prstDash val="solid"/>
+                      <a:round/>
+                      <a:headEnd type="none" w="med" len="med"/>
+                      <a:tailEnd type="none" w="med" len="med"/>
+                    </a:lnT>
+                    <a:lnB w="12700" cap="flat" cmpd="sng" algn="ctr">
+                      <a:solidFill>
+                        <a:schemeClr val="tx1"/>
+                      </a:solidFill>
+                      <a:prstDash val="solid"/>
+                      <a:round/>
+                      <a:headEnd type="none" w="med" len="med"/>
+                      <a:tailEnd type="none" w="med" len="med"/>
+                    </a:lnB>
+                  </a:tcPr>
+                </a:tc>
+                <a:tc>
+                  <a:txBody>
+                    <a:bodyPr/>
+                    <a:lstStyle/>
+                    <a:p>
+                      <a:r>
+                        <a:rPr lang="es-MX" sz="1600" dirty="0"/>
+                        <a:t>Valor (tipos primitivos) / Dirección (strings)</a:t>
+                      </a:r>
+                    </a:p>
+                  </a:txBody>
+                  <a:tcPr marL="85320" marR="85320" marT="42660" marB="42660" anchor="ctr">
+                    <a:lnL w="12700" cap="flat" cmpd="sng" algn="ctr">
+                      <a:solidFill>
+                        <a:schemeClr val="tx1"/>
+                      </a:solidFill>
+                      <a:prstDash val="solid"/>
+                      <a:round/>
+                      <a:headEnd type="none" w="med" len="med"/>
+                      <a:tailEnd type="none" w="med" len="med"/>
+                    </a:lnL>
+                    <a:lnR w="12700" cap="flat" cmpd="sng" algn="ctr">
+                      <a:solidFill>
+                        <a:schemeClr val="tx1"/>
+                      </a:solidFill>
+                      <a:prstDash val="solid"/>
+                      <a:round/>
+                      <a:headEnd type="none" w="med" len="med"/>
+                      <a:tailEnd type="none" w="med" len="med"/>
+                    </a:lnR>
+                    <a:lnT w="12700" cap="flat" cmpd="sng" algn="ctr">
+                      <a:solidFill>
+                        <a:schemeClr val="tx1"/>
+                      </a:solidFill>
+                      <a:prstDash val="solid"/>
+                      <a:round/>
+                      <a:headEnd type="none" w="med" len="med"/>
+                      <a:tailEnd type="none" w="med" len="med"/>
+                    </a:lnT>
+                    <a:lnB w="12700" cap="flat" cmpd="sng" algn="ctr">
+                      <a:solidFill>
+                        <a:schemeClr val="tx1"/>
+                      </a:solidFill>
+                      <a:prstDash val="solid"/>
+                      <a:round/>
+                      <a:headEnd type="none" w="med" len="med"/>
+                      <a:tailEnd type="none" w="med" len="med"/>
+                    </a:lnB>
+                  </a:tcPr>
+                </a:tc>
+                <a:extLst>
+                  <a:ext uri="{0D108BD9-81ED-4DB2-BD59-A6C34878D82A}">
+                    <a16:rowId xmlns:a16="http://schemas.microsoft.com/office/drawing/2014/main" val="3983158537"/>
+                  </a:ext>
+                </a:extLst>
+              </a:tr>
+              <a:tr h="544525">
+                <a:tc>
+                  <a:txBody>
+                    <a:bodyPr/>
+                    <a:lstStyle/>
+                    <a:p>
+                      <a:r>
+                        <a:rPr lang="es-CO" sz="1600"/>
+                        <a:t>C</a:t>
+                      </a:r>
+                    </a:p>
+                  </a:txBody>
+                  <a:tcPr marL="85320" marR="85320" marT="42660" marB="42660" anchor="ctr">
+                    <a:lnL w="12700" cap="flat" cmpd="sng" algn="ctr">
+                      <a:solidFill>
+                        <a:schemeClr val="tx1"/>
+                      </a:solidFill>
+                      <a:prstDash val="solid"/>
+                      <a:round/>
+                      <a:headEnd type="none" w="med" len="med"/>
+                      <a:tailEnd type="none" w="med" len="med"/>
+                    </a:lnL>
+                    <a:lnR w="12700" cap="flat" cmpd="sng" algn="ctr">
+                      <a:solidFill>
+                        <a:schemeClr val="tx1"/>
+                      </a:solidFill>
+                      <a:prstDash val="solid"/>
+                      <a:round/>
+                      <a:headEnd type="none" w="med" len="med"/>
+                      <a:tailEnd type="none" w="med" len="med"/>
+                    </a:lnR>
+                    <a:lnT w="12700" cap="flat" cmpd="sng" algn="ctr">
+                      <a:solidFill>
+                        <a:schemeClr val="tx1"/>
+                      </a:solidFill>
+                      <a:prstDash val="solid"/>
+                      <a:round/>
+                      <a:headEnd type="none" w="med" len="med"/>
+                      <a:tailEnd type="none" w="med" len="med"/>
+                    </a:lnT>
+                    <a:lnB w="12700" cap="flat" cmpd="sng" algn="ctr">
+                      <a:solidFill>
+                        <a:schemeClr val="tx1"/>
+                      </a:solidFill>
+                      <a:prstDash val="solid"/>
+                      <a:round/>
+                      <a:headEnd type="none" w="med" len="med"/>
+                      <a:tailEnd type="none" w="med" len="med"/>
+                    </a:lnB>
+                  </a:tcPr>
+                </a:tc>
+                <a:tc>
+                  <a:txBody>
+                    <a:bodyPr/>
+                    <a:lstStyle/>
+                    <a:p>
+                      <a:r>
+                        <a:rPr lang="es-CO" sz="1600">
+                          <a:solidFill>
+                            <a:srgbClr val="C00000"/>
+                          </a:solidFill>
+                          <a:latin typeface="Consolas" panose="020B0609020204030204" pitchFamily="49" charset="0"/>
+                        </a:rPr>
+                        <a:t>strcmp()</a:t>
+                      </a:r>
+                    </a:p>
+                  </a:txBody>
+                  <a:tcPr marL="85320" marR="85320" marT="42660" marB="42660" anchor="ctr">
+                    <a:lnL w="12700" cap="flat" cmpd="sng" algn="ctr">
+                      <a:solidFill>
+                        <a:schemeClr val="tx1"/>
+                      </a:solidFill>
+                      <a:prstDash val="solid"/>
+                      <a:round/>
+                      <a:headEnd type="none" w="med" len="med"/>
+                      <a:tailEnd type="none" w="med" len="med"/>
+                    </a:lnL>
+                    <a:lnR w="12700" cap="flat" cmpd="sng" algn="ctr">
+                      <a:solidFill>
+                        <a:schemeClr val="tx1"/>
+                      </a:solidFill>
+                      <a:prstDash val="solid"/>
+                      <a:round/>
+                      <a:headEnd type="none" w="med" len="med"/>
+                      <a:tailEnd type="none" w="med" len="med"/>
+                    </a:lnR>
+                    <a:lnT w="12700" cap="flat" cmpd="sng" algn="ctr">
+                      <a:solidFill>
+                        <a:schemeClr val="tx1"/>
+                      </a:solidFill>
+                      <a:prstDash val="solid"/>
+                      <a:round/>
+                      <a:headEnd type="none" w="med" len="med"/>
+                      <a:tailEnd type="none" w="med" len="med"/>
+                    </a:lnT>
+                    <a:lnB w="12700" cap="flat" cmpd="sng" algn="ctr">
+                      <a:solidFill>
+                        <a:schemeClr val="tx1"/>
+                      </a:solidFill>
+                      <a:prstDash val="solid"/>
+                      <a:round/>
+                      <a:headEnd type="none" w="med" len="med"/>
+                      <a:tailEnd type="none" w="med" len="med"/>
+                    </a:lnB>
+                  </a:tcPr>
+                </a:tc>
+                <a:tc>
+                  <a:txBody>
+                    <a:bodyPr/>
+                    <a:lstStyle/>
+                    <a:p>
+                      <a:r>
+                        <a:rPr lang="es-CO" sz="1600" dirty="0"/>
+                        <a:t>Contenido (strings) — 0 significa "iguales"</a:t>
+                      </a:r>
+                    </a:p>
+                  </a:txBody>
+                  <a:tcPr marL="85320" marR="85320" marT="42660" marB="42660" anchor="ctr">
+                    <a:lnL w="12700" cap="flat" cmpd="sng" algn="ctr">
+                      <a:solidFill>
+                        <a:schemeClr val="tx1"/>
+                      </a:solidFill>
+                      <a:prstDash val="solid"/>
+                      <a:round/>
+                      <a:headEnd type="none" w="med" len="med"/>
+                      <a:tailEnd type="none" w="med" len="med"/>
+                    </a:lnL>
+                    <a:lnR w="12700" cap="flat" cmpd="sng" algn="ctr">
+                      <a:solidFill>
+                        <a:schemeClr val="tx1"/>
+                      </a:solidFill>
+                      <a:prstDash val="solid"/>
+                      <a:round/>
+                      <a:headEnd type="none" w="med" len="med"/>
+                      <a:tailEnd type="none" w="med" len="med"/>
+                    </a:lnR>
+                    <a:lnT w="12700" cap="flat" cmpd="sng" algn="ctr">
+                      <a:solidFill>
+                        <a:schemeClr val="tx1"/>
+                      </a:solidFill>
+                      <a:prstDash val="solid"/>
+                      <a:round/>
+                      <a:headEnd type="none" w="med" len="med"/>
+                      <a:tailEnd type="none" w="med" len="med"/>
+                    </a:lnT>
+                    <a:lnB w="12700" cap="flat" cmpd="sng" algn="ctr">
+                      <a:solidFill>
+                        <a:schemeClr val="tx1"/>
+                      </a:solidFill>
+                      <a:prstDash val="solid"/>
+                      <a:round/>
+                      <a:headEnd type="none" w="med" len="med"/>
+                      <a:tailEnd type="none" w="med" len="med"/>
+                    </a:lnB>
+                  </a:tcPr>
+                </a:tc>
+                <a:extLst>
+                  <a:ext uri="{0D108BD9-81ED-4DB2-BD59-A6C34878D82A}">
+                    <a16:rowId xmlns:a16="http://schemas.microsoft.com/office/drawing/2014/main" val="1392741827"/>
+                  </a:ext>
+                </a:extLst>
+              </a:tr>
+              <a:tr h="544525">
+                <a:tc>
+                  <a:txBody>
+                    <a:bodyPr/>
+                    <a:lstStyle/>
+                    <a:p>
+                      <a:r>
+                        <a:rPr lang="es-CO" sz="1600"/>
+                        <a:t>Java</a:t>
+                      </a:r>
+                    </a:p>
+                  </a:txBody>
+                  <a:tcPr marL="85320" marR="85320" marT="42660" marB="42660" anchor="ctr">
+                    <a:lnL w="12700" cap="flat" cmpd="sng" algn="ctr">
+                      <a:solidFill>
+                        <a:schemeClr val="tx1"/>
+                      </a:solidFill>
+                      <a:prstDash val="solid"/>
+                      <a:round/>
+                      <a:headEnd type="none" w="med" len="med"/>
+                      <a:tailEnd type="none" w="med" len="med"/>
+                    </a:lnL>
+                    <a:lnR w="12700" cap="flat" cmpd="sng" algn="ctr">
+                      <a:solidFill>
+                        <a:schemeClr val="tx1"/>
+                      </a:solidFill>
+                      <a:prstDash val="solid"/>
+                      <a:round/>
+                      <a:headEnd type="none" w="med" len="med"/>
+                      <a:tailEnd type="none" w="med" len="med"/>
+                    </a:lnR>
+                    <a:lnT w="12700" cap="flat" cmpd="sng" algn="ctr">
+                      <a:solidFill>
+                        <a:schemeClr val="tx1"/>
+                      </a:solidFill>
+                      <a:prstDash val="solid"/>
+                      <a:round/>
+                      <a:headEnd type="none" w="med" len="med"/>
+                      <a:tailEnd type="none" w="med" len="med"/>
+                    </a:lnT>
+                    <a:lnB w="12700" cap="flat" cmpd="sng" algn="ctr">
+                      <a:solidFill>
+                        <a:schemeClr val="tx1"/>
+                      </a:solidFill>
+                      <a:prstDash val="solid"/>
+                      <a:round/>
+                      <a:headEnd type="none" w="med" len="med"/>
+                      <a:tailEnd type="none" w="med" len="med"/>
+                    </a:lnB>
+                  </a:tcPr>
+                </a:tc>
+                <a:tc>
+                  <a:txBody>
+                    <a:bodyPr/>
+                    <a:lstStyle/>
+                    <a:p>
+                      <a:r>
+                        <a:rPr lang="es-CO" sz="1600">
+                          <a:solidFill>
+                            <a:srgbClr val="C00000"/>
+                          </a:solidFill>
+                          <a:latin typeface="Consolas" panose="020B0609020204030204" pitchFamily="49" charset="0"/>
+                        </a:rPr>
+                        <a:t>==</a:t>
+                      </a:r>
+                    </a:p>
+                  </a:txBody>
+                  <a:tcPr marL="85320" marR="85320" marT="42660" marB="42660" anchor="ctr">
+                    <a:lnL w="12700" cap="flat" cmpd="sng" algn="ctr">
+                      <a:solidFill>
+                        <a:schemeClr val="tx1"/>
+                      </a:solidFill>
+                      <a:prstDash val="solid"/>
+                      <a:round/>
+                      <a:headEnd type="none" w="med" len="med"/>
+                      <a:tailEnd type="none" w="med" len="med"/>
+                    </a:lnL>
+                    <a:lnR w="12700" cap="flat" cmpd="sng" algn="ctr">
+                      <a:solidFill>
+                        <a:schemeClr val="tx1"/>
+                      </a:solidFill>
+                      <a:prstDash val="solid"/>
+                      <a:round/>
+                      <a:headEnd type="none" w="med" len="med"/>
+                      <a:tailEnd type="none" w="med" len="med"/>
+                    </a:lnR>
+                    <a:lnT w="12700" cap="flat" cmpd="sng" algn="ctr">
+                      <a:solidFill>
+                        <a:schemeClr val="tx1"/>
+                      </a:solidFill>
+                      <a:prstDash val="solid"/>
+                      <a:round/>
+                      <a:headEnd type="none" w="med" len="med"/>
+                      <a:tailEnd type="none" w="med" len="med"/>
+                    </a:lnT>
+                    <a:lnB w="12700" cap="flat" cmpd="sng" algn="ctr">
+                      <a:solidFill>
+                        <a:schemeClr val="tx1"/>
+                      </a:solidFill>
+                      <a:prstDash val="solid"/>
+                      <a:round/>
+                      <a:headEnd type="none" w="med" len="med"/>
+                      <a:tailEnd type="none" w="med" len="med"/>
+                    </a:lnB>
+                  </a:tcPr>
+                </a:tc>
+                <a:tc>
+                  <a:txBody>
+                    <a:bodyPr/>
+                    <a:lstStyle/>
+                    <a:p>
+                      <a:r>
+                        <a:rPr lang="es-CO" sz="1600"/>
+                        <a:t>Valor (primitivos) / Referencia (objetos)</a:t>
+                      </a:r>
+                    </a:p>
+                  </a:txBody>
+                  <a:tcPr marL="85320" marR="85320" marT="42660" marB="42660" anchor="ctr">
+                    <a:lnL w="12700" cap="flat" cmpd="sng" algn="ctr">
+                      <a:solidFill>
+                        <a:schemeClr val="tx1"/>
+                      </a:solidFill>
+                      <a:prstDash val="solid"/>
+                      <a:round/>
+                      <a:headEnd type="none" w="med" len="med"/>
+                      <a:tailEnd type="none" w="med" len="med"/>
+                    </a:lnL>
+                    <a:lnR w="12700" cap="flat" cmpd="sng" algn="ctr">
+                      <a:solidFill>
+                        <a:schemeClr val="tx1"/>
+                      </a:solidFill>
+                      <a:prstDash val="solid"/>
+                      <a:round/>
+                      <a:headEnd type="none" w="med" len="med"/>
+                      <a:tailEnd type="none" w="med" len="med"/>
+                    </a:lnR>
+                    <a:lnT w="12700" cap="flat" cmpd="sng" algn="ctr">
+                      <a:solidFill>
+                        <a:schemeClr val="tx1"/>
+                      </a:solidFill>
+                      <a:prstDash val="solid"/>
+                      <a:round/>
+                      <a:headEnd type="none" w="med" len="med"/>
+                      <a:tailEnd type="none" w="med" len="med"/>
+                    </a:lnT>
+                    <a:lnB w="12700" cap="flat" cmpd="sng" algn="ctr">
+                      <a:solidFill>
+                        <a:schemeClr val="tx1"/>
+                      </a:solidFill>
+                      <a:prstDash val="solid"/>
+                      <a:round/>
+                      <a:headEnd type="none" w="med" len="med"/>
+                      <a:tailEnd type="none" w="med" len="med"/>
+                    </a:lnB>
+                  </a:tcPr>
+                </a:tc>
+                <a:extLst>
+                  <a:ext uri="{0D108BD9-81ED-4DB2-BD59-A6C34878D82A}">
+                    <a16:rowId xmlns:a16="http://schemas.microsoft.com/office/drawing/2014/main" val="1009680651"/>
+                  </a:ext>
+                </a:extLst>
+              </a:tr>
+              <a:tr h="312803">
+                <a:tc>
+                  <a:txBody>
+                    <a:bodyPr/>
+                    <a:lstStyle/>
+                    <a:p>
+                      <a:r>
+                        <a:rPr lang="es-CO" sz="1600"/>
+                        <a:t>Java</a:t>
+                      </a:r>
+                    </a:p>
+                  </a:txBody>
+                  <a:tcPr marL="85320" marR="85320" marT="42660" marB="42660" anchor="ctr">
+                    <a:lnL w="12700" cap="flat" cmpd="sng" algn="ctr">
+                      <a:solidFill>
+                        <a:schemeClr val="tx1"/>
+                      </a:solidFill>
+                      <a:prstDash val="solid"/>
+                      <a:round/>
+                      <a:headEnd type="none" w="med" len="med"/>
+                      <a:tailEnd type="none" w="med" len="med"/>
+                    </a:lnL>
+                    <a:lnR w="12700" cap="flat" cmpd="sng" algn="ctr">
+                      <a:solidFill>
+                        <a:schemeClr val="tx1"/>
+                      </a:solidFill>
+                      <a:prstDash val="solid"/>
+                      <a:round/>
+                      <a:headEnd type="none" w="med" len="med"/>
+                      <a:tailEnd type="none" w="med" len="med"/>
+                    </a:lnR>
+                    <a:lnT w="12700" cap="flat" cmpd="sng" algn="ctr">
+                      <a:solidFill>
+                        <a:schemeClr val="tx1"/>
+                      </a:solidFill>
+                      <a:prstDash val="solid"/>
+                      <a:round/>
+                      <a:headEnd type="none" w="med" len="med"/>
+                      <a:tailEnd type="none" w="med" len="med"/>
+                    </a:lnT>
+                    <a:lnB w="12700" cap="flat" cmpd="sng" algn="ctr">
+                      <a:solidFill>
+                        <a:schemeClr val="tx1"/>
+                      </a:solidFill>
+                      <a:prstDash val="solid"/>
+                      <a:round/>
+                      <a:headEnd type="none" w="med" len="med"/>
+                      <a:tailEnd type="none" w="med" len="med"/>
+                    </a:lnB>
+                  </a:tcPr>
+                </a:tc>
+                <a:tc>
+                  <a:txBody>
+                    <a:bodyPr/>
+                    <a:lstStyle/>
+                    <a:p>
+                      <a:r>
+                        <a:rPr lang="es-CO" sz="1600">
+                          <a:solidFill>
+                            <a:srgbClr val="C00000"/>
+                          </a:solidFill>
+                          <a:latin typeface="Consolas" panose="020B0609020204030204" pitchFamily="49" charset="0"/>
+                        </a:rPr>
+                        <a:t>.equals()</a:t>
+                      </a:r>
+                    </a:p>
+                  </a:txBody>
+                  <a:tcPr marL="85320" marR="85320" marT="42660" marB="42660" anchor="ctr">
+                    <a:lnL w="12700" cap="flat" cmpd="sng" algn="ctr">
+                      <a:solidFill>
+                        <a:schemeClr val="tx1"/>
+                      </a:solidFill>
+                      <a:prstDash val="solid"/>
+                      <a:round/>
+                      <a:headEnd type="none" w="med" len="med"/>
+                      <a:tailEnd type="none" w="med" len="med"/>
+                    </a:lnL>
+                    <a:lnR w="12700" cap="flat" cmpd="sng" algn="ctr">
+                      <a:solidFill>
+                        <a:schemeClr val="tx1"/>
+                      </a:solidFill>
+                      <a:prstDash val="solid"/>
+                      <a:round/>
+                      <a:headEnd type="none" w="med" len="med"/>
+                      <a:tailEnd type="none" w="med" len="med"/>
+                    </a:lnR>
+                    <a:lnT w="12700" cap="flat" cmpd="sng" algn="ctr">
+                      <a:solidFill>
+                        <a:schemeClr val="tx1"/>
+                      </a:solidFill>
+                      <a:prstDash val="solid"/>
+                      <a:round/>
+                      <a:headEnd type="none" w="med" len="med"/>
+                      <a:tailEnd type="none" w="med" len="med"/>
+                    </a:lnT>
+                    <a:lnB w="12700" cap="flat" cmpd="sng" algn="ctr">
+                      <a:solidFill>
+                        <a:schemeClr val="tx1"/>
+                      </a:solidFill>
+                      <a:prstDash val="solid"/>
+                      <a:round/>
+                      <a:headEnd type="none" w="med" len="med"/>
+                      <a:tailEnd type="none" w="med" len="med"/>
+                    </a:lnB>
+                  </a:tcPr>
+                </a:tc>
+                <a:tc>
+                  <a:txBody>
+                    <a:bodyPr/>
+                    <a:lstStyle/>
+                    <a:p>
+                      <a:r>
+                        <a:rPr lang="es-CO" sz="1600" dirty="0"/>
+                        <a:t>Valor/contenido (objetos)</a:t>
+                      </a:r>
+                    </a:p>
+                  </a:txBody>
+                  <a:tcPr marL="85320" marR="85320" marT="42660" marB="42660" anchor="ctr">
+                    <a:lnL w="12700" cap="flat" cmpd="sng" algn="ctr">
+                      <a:solidFill>
+                        <a:schemeClr val="tx1"/>
+                      </a:solidFill>
+                      <a:prstDash val="solid"/>
+                      <a:round/>
+                      <a:headEnd type="none" w="med" len="med"/>
+                      <a:tailEnd type="none" w="med" len="med"/>
+                    </a:lnL>
+                    <a:lnR w="12700" cap="flat" cmpd="sng" algn="ctr">
+                      <a:solidFill>
+                        <a:schemeClr val="tx1"/>
+                      </a:solidFill>
+                      <a:prstDash val="solid"/>
+                      <a:round/>
+                      <a:headEnd type="none" w="med" len="med"/>
+                      <a:tailEnd type="none" w="med" len="med"/>
+                    </a:lnR>
+                    <a:lnT w="12700" cap="flat" cmpd="sng" algn="ctr">
+                      <a:solidFill>
+                        <a:schemeClr val="tx1"/>
+                      </a:solidFill>
+                      <a:prstDash val="solid"/>
+                      <a:round/>
+                      <a:headEnd type="none" w="med" len="med"/>
+                      <a:tailEnd type="none" w="med" len="med"/>
+                    </a:lnT>
+                    <a:lnB w="12700" cap="flat" cmpd="sng" algn="ctr">
+                      <a:solidFill>
+                        <a:schemeClr val="tx1"/>
+                      </a:solidFill>
+                      <a:prstDash val="solid"/>
+                      <a:round/>
+                      <a:headEnd type="none" w="med" len="med"/>
+                      <a:tailEnd type="none" w="med" len="med"/>
+                    </a:lnB>
+                  </a:tcPr>
+                </a:tc>
+                <a:extLst>
+                  <a:ext uri="{0D108BD9-81ED-4DB2-BD59-A6C34878D82A}">
+                    <a16:rowId xmlns:a16="http://schemas.microsoft.com/office/drawing/2014/main" val="1239716618"/>
+                  </a:ext>
+                </a:extLst>
+              </a:tr>
+              <a:tr h="312803">
+                <a:tc>
+                  <a:txBody>
+                    <a:bodyPr/>
+                    <a:lstStyle/>
+                    <a:p>
+                      <a:r>
+                        <a:rPr lang="es-CO" sz="1600"/>
+                        <a:t>JavaScript</a:t>
+                      </a:r>
+                    </a:p>
+                  </a:txBody>
+                  <a:tcPr marL="85320" marR="85320" marT="42660" marB="42660" anchor="ctr">
+                    <a:lnL w="12700" cap="flat" cmpd="sng" algn="ctr">
+                      <a:solidFill>
+                        <a:schemeClr val="tx1"/>
+                      </a:solidFill>
+                      <a:prstDash val="solid"/>
+                      <a:round/>
+                      <a:headEnd type="none" w="med" len="med"/>
+                      <a:tailEnd type="none" w="med" len="med"/>
+                    </a:lnL>
+                    <a:lnR w="12700" cap="flat" cmpd="sng" algn="ctr">
+                      <a:solidFill>
+                        <a:schemeClr val="tx1"/>
+                      </a:solidFill>
+                      <a:prstDash val="solid"/>
+                      <a:round/>
+                      <a:headEnd type="none" w="med" len="med"/>
+                      <a:tailEnd type="none" w="med" len="med"/>
+                    </a:lnR>
+                    <a:lnT w="12700" cap="flat" cmpd="sng" algn="ctr">
+                      <a:solidFill>
+                        <a:schemeClr val="tx1"/>
+                      </a:solidFill>
+                      <a:prstDash val="solid"/>
+                      <a:round/>
+                      <a:headEnd type="none" w="med" len="med"/>
+                      <a:tailEnd type="none" w="med" len="med"/>
+                    </a:lnT>
+                    <a:lnB w="12700" cap="flat" cmpd="sng" algn="ctr">
+                      <a:solidFill>
+                        <a:schemeClr val="tx1"/>
+                      </a:solidFill>
+                      <a:prstDash val="solid"/>
+                      <a:round/>
+                      <a:headEnd type="none" w="med" len="med"/>
+                      <a:tailEnd type="none" w="med" len="med"/>
+                    </a:lnB>
+                  </a:tcPr>
+                </a:tc>
+                <a:tc>
+                  <a:txBody>
+                    <a:bodyPr/>
+                    <a:lstStyle/>
+                    <a:p>
+                      <a:r>
+                        <a:rPr lang="es-CO" sz="1600">
+                          <a:solidFill>
+                            <a:srgbClr val="C00000"/>
+                          </a:solidFill>
+                          <a:latin typeface="Consolas" panose="020B0609020204030204" pitchFamily="49" charset="0"/>
+                        </a:rPr>
+                        <a:t>==</a:t>
+                      </a:r>
+                    </a:p>
+                  </a:txBody>
+                  <a:tcPr marL="85320" marR="85320" marT="42660" marB="42660" anchor="ctr">
+                    <a:lnL w="12700" cap="flat" cmpd="sng" algn="ctr">
+                      <a:solidFill>
+                        <a:schemeClr val="tx1"/>
+                      </a:solidFill>
+                      <a:prstDash val="solid"/>
+                      <a:round/>
+                      <a:headEnd type="none" w="med" len="med"/>
+                      <a:tailEnd type="none" w="med" len="med"/>
+                    </a:lnL>
+                    <a:lnR w="12700" cap="flat" cmpd="sng" algn="ctr">
+                      <a:solidFill>
+                        <a:schemeClr val="tx1"/>
+                      </a:solidFill>
+                      <a:prstDash val="solid"/>
+                      <a:round/>
+                      <a:headEnd type="none" w="med" len="med"/>
+                      <a:tailEnd type="none" w="med" len="med"/>
+                    </a:lnR>
+                    <a:lnT w="12700" cap="flat" cmpd="sng" algn="ctr">
+                      <a:solidFill>
+                        <a:schemeClr val="tx1"/>
+                      </a:solidFill>
+                      <a:prstDash val="solid"/>
+                      <a:round/>
+                      <a:headEnd type="none" w="med" len="med"/>
+                      <a:tailEnd type="none" w="med" len="med"/>
+                    </a:lnT>
+                    <a:lnB w="12700" cap="flat" cmpd="sng" algn="ctr">
+                      <a:solidFill>
+                        <a:schemeClr val="tx1"/>
+                      </a:solidFill>
+                      <a:prstDash val="solid"/>
+                      <a:round/>
+                      <a:headEnd type="none" w="med" len="med"/>
+                      <a:tailEnd type="none" w="med" len="med"/>
+                    </a:lnB>
+                  </a:tcPr>
+                </a:tc>
+                <a:tc>
+                  <a:txBody>
+                    <a:bodyPr/>
+                    <a:lstStyle/>
+                    <a:p>
+                      <a:r>
+                        <a:rPr lang="es-MX" sz="1600"/>
+                        <a:t>Valor, con conversión de tipos</a:t>
+                      </a:r>
+                    </a:p>
+                  </a:txBody>
+                  <a:tcPr marL="85320" marR="85320" marT="42660" marB="42660" anchor="ctr">
+                    <a:lnL w="12700" cap="flat" cmpd="sng" algn="ctr">
+                      <a:solidFill>
+                        <a:schemeClr val="tx1"/>
+                      </a:solidFill>
+                      <a:prstDash val="solid"/>
+                      <a:round/>
+                      <a:headEnd type="none" w="med" len="med"/>
+                      <a:tailEnd type="none" w="med" len="med"/>
+                    </a:lnL>
+                    <a:lnR w="12700" cap="flat" cmpd="sng" algn="ctr">
+                      <a:solidFill>
+                        <a:schemeClr val="tx1"/>
+                      </a:solidFill>
+                      <a:prstDash val="solid"/>
+                      <a:round/>
+                      <a:headEnd type="none" w="med" len="med"/>
+                      <a:tailEnd type="none" w="med" len="med"/>
+                    </a:lnR>
+                    <a:lnT w="12700" cap="flat" cmpd="sng" algn="ctr">
+                      <a:solidFill>
+                        <a:schemeClr val="tx1"/>
+                      </a:solidFill>
+                      <a:prstDash val="solid"/>
+                      <a:round/>
+                      <a:headEnd type="none" w="med" len="med"/>
+                      <a:tailEnd type="none" w="med" len="med"/>
+                    </a:lnT>
+                    <a:lnB w="12700" cap="flat" cmpd="sng" algn="ctr">
+                      <a:solidFill>
+                        <a:schemeClr val="tx1"/>
+                      </a:solidFill>
+                      <a:prstDash val="solid"/>
+                      <a:round/>
+                      <a:headEnd type="none" w="med" len="med"/>
+                      <a:tailEnd type="none" w="med" len="med"/>
+                    </a:lnB>
+                  </a:tcPr>
+                </a:tc>
+                <a:extLst>
+                  <a:ext uri="{0D108BD9-81ED-4DB2-BD59-A6C34878D82A}">
+                    <a16:rowId xmlns:a16="http://schemas.microsoft.com/office/drawing/2014/main" val="3227814540"/>
+                  </a:ext>
+                </a:extLst>
+              </a:tr>
+              <a:tr h="312803">
+                <a:tc>
+                  <a:txBody>
+                    <a:bodyPr/>
+                    <a:lstStyle/>
+                    <a:p>
+                      <a:r>
+                        <a:rPr lang="es-CO" sz="1600"/>
+                        <a:t>JavaScript</a:t>
+                      </a:r>
+                    </a:p>
+                  </a:txBody>
+                  <a:tcPr marL="85320" marR="85320" marT="42660" marB="42660" anchor="ctr">
+                    <a:lnL w="12700" cap="flat" cmpd="sng" algn="ctr">
+                      <a:solidFill>
+                        <a:schemeClr val="tx1"/>
+                      </a:solidFill>
+                      <a:prstDash val="solid"/>
+                      <a:round/>
+                      <a:headEnd type="none" w="med" len="med"/>
+                      <a:tailEnd type="none" w="med" len="med"/>
+                    </a:lnL>
+                    <a:lnR w="12700" cap="flat" cmpd="sng" algn="ctr">
+                      <a:solidFill>
+                        <a:schemeClr val="tx1"/>
+                      </a:solidFill>
+                      <a:prstDash val="solid"/>
+                      <a:round/>
+                      <a:headEnd type="none" w="med" len="med"/>
+                      <a:tailEnd type="none" w="med" len="med"/>
+                    </a:lnR>
+                    <a:lnT w="12700" cap="flat" cmpd="sng" algn="ctr">
+                      <a:solidFill>
+                        <a:schemeClr val="tx1"/>
+                      </a:solidFill>
+                      <a:prstDash val="solid"/>
+                      <a:round/>
+                      <a:headEnd type="none" w="med" len="med"/>
+                      <a:tailEnd type="none" w="med" len="med"/>
+                    </a:lnT>
+                    <a:lnB w="12700" cap="flat" cmpd="sng" algn="ctr">
+                      <a:solidFill>
+                        <a:schemeClr val="tx1"/>
+                      </a:solidFill>
+                      <a:prstDash val="solid"/>
+                      <a:round/>
+                      <a:headEnd type="none" w="med" len="med"/>
+                      <a:tailEnd type="none" w="med" len="med"/>
+                    </a:lnB>
+                  </a:tcPr>
+                </a:tc>
+                <a:tc>
+                  <a:txBody>
+                    <a:bodyPr/>
+                    <a:lstStyle/>
+                    <a:p>
+                      <a:r>
+                        <a:rPr lang="es-CO" sz="1600" dirty="0">
+                          <a:solidFill>
+                            <a:srgbClr val="C00000"/>
+                          </a:solidFill>
+                          <a:latin typeface="Consolas" panose="020B0609020204030204" pitchFamily="49" charset="0"/>
+                        </a:rPr>
+                        <a:t>===</a:t>
+                      </a:r>
+                    </a:p>
+                  </a:txBody>
+                  <a:tcPr marL="85320" marR="85320" marT="42660" marB="42660" anchor="ctr">
+                    <a:lnL w="12700" cap="flat" cmpd="sng" algn="ctr">
+                      <a:solidFill>
+                        <a:schemeClr val="tx1"/>
+                      </a:solidFill>
+                      <a:prstDash val="solid"/>
+                      <a:round/>
+                      <a:headEnd type="none" w="med" len="med"/>
+                      <a:tailEnd type="none" w="med" len="med"/>
+                    </a:lnL>
+                    <a:lnR w="12700" cap="flat" cmpd="sng" algn="ctr">
+                      <a:solidFill>
+                        <a:schemeClr val="tx1"/>
+                      </a:solidFill>
+                      <a:prstDash val="solid"/>
+                      <a:round/>
+                      <a:headEnd type="none" w="med" len="med"/>
+                      <a:tailEnd type="none" w="med" len="med"/>
+                    </a:lnR>
+                    <a:lnT w="12700" cap="flat" cmpd="sng" algn="ctr">
+                      <a:solidFill>
+                        <a:schemeClr val="tx1"/>
+                      </a:solidFill>
+                      <a:prstDash val="solid"/>
+                      <a:round/>
+                      <a:headEnd type="none" w="med" len="med"/>
+                      <a:tailEnd type="none" w="med" len="med"/>
+                    </a:lnT>
+                    <a:lnB w="12700" cap="flat" cmpd="sng" algn="ctr">
+                      <a:solidFill>
+                        <a:schemeClr val="tx1"/>
+                      </a:solidFill>
+                      <a:prstDash val="solid"/>
+                      <a:round/>
+                      <a:headEnd type="none" w="med" len="med"/>
+                      <a:tailEnd type="none" w="med" len="med"/>
+                    </a:lnB>
+                  </a:tcPr>
+                </a:tc>
+                <a:tc>
+                  <a:txBody>
+                    <a:bodyPr/>
+                    <a:lstStyle/>
+                    <a:p>
+                      <a:r>
+                        <a:rPr lang="es-CO" sz="1600" dirty="0"/>
+                        <a:t>Valor, sin conversión</a:t>
+                      </a:r>
+                    </a:p>
+                  </a:txBody>
+                  <a:tcPr marL="85320" marR="85320" marT="42660" marB="42660" anchor="ctr">
+                    <a:lnL w="12700" cap="flat" cmpd="sng" algn="ctr">
+                      <a:solidFill>
+                        <a:schemeClr val="tx1"/>
+                      </a:solidFill>
+                      <a:prstDash val="solid"/>
+                      <a:round/>
+                      <a:headEnd type="none" w="med" len="med"/>
+                      <a:tailEnd type="none" w="med" len="med"/>
+                    </a:lnL>
+                    <a:lnR w="12700" cap="flat" cmpd="sng" algn="ctr">
+                      <a:solidFill>
+                        <a:schemeClr val="tx1"/>
+                      </a:solidFill>
+                      <a:prstDash val="solid"/>
+                      <a:round/>
+                      <a:headEnd type="none" w="med" len="med"/>
+                      <a:tailEnd type="none" w="med" len="med"/>
+                    </a:lnR>
+                    <a:lnT w="12700" cap="flat" cmpd="sng" algn="ctr">
+                      <a:solidFill>
+                        <a:schemeClr val="tx1"/>
+                      </a:solidFill>
+                      <a:prstDash val="solid"/>
+                      <a:round/>
+                      <a:headEnd type="none" w="med" len="med"/>
+                      <a:tailEnd type="none" w="med" len="med"/>
+                    </a:lnT>
+                    <a:lnB w="12700" cap="flat" cmpd="sng" algn="ctr">
+                      <a:solidFill>
+                        <a:schemeClr val="tx1"/>
+                      </a:solidFill>
+                      <a:prstDash val="solid"/>
+                      <a:round/>
+                      <a:headEnd type="none" w="med" len="med"/>
+                      <a:tailEnd type="none" w="med" len="med"/>
+                    </a:lnB>
+                  </a:tcPr>
+                </a:tc>
+                <a:extLst>
+                  <a:ext uri="{0D108BD9-81ED-4DB2-BD59-A6C34878D82A}">
+                    <a16:rowId xmlns:a16="http://schemas.microsoft.com/office/drawing/2014/main" val="3646618112"/>
+                  </a:ext>
+                </a:extLst>
+              </a:tr>
+            </a:tbl>
+          </a:graphicData>
+        </a:graphic>
+      </p:graphicFrame>
+    </p:spTree>
+    <p:extLst>
+      <p:ext uri="{BB962C8B-B14F-4D97-AF65-F5344CB8AC3E}">
+        <p14:creationId xmlns:p14="http://schemas.microsoft.com/office/powerpoint/2010/main" val="692856205"/>
+      </p:ext>
+    </p:extLst>
+  </p:cSld>
+  <p:clrMapOvr>
+    <a:masterClrMapping/>
+  </p:clrMapOvr>
+</p:sld>
+</file>
+
+<file path=ppt/slides/slide28.xml><?xml version="1.0" encoding="utf-8"?>
+<p:sld xmlns:a="http://schemas.openxmlformats.org/drawingml/2006/main" xmlns:r="http://schemas.openxmlformats.org/officeDocument/2006/relationships" xmlns:p="http://schemas.openxmlformats.org/presentationml/2006/main">
+  <p:cSld>
+    <p:spTree>
+      <p:nvGrpSpPr>
+        <p:cNvPr id="1" name=""/>
+        <p:cNvGrpSpPr/>
+        <p:nvPr/>
+      </p:nvGrpSpPr>
+      <p:grpSpPr>
+        <a:xfrm>
+          <a:off x="0" y="0"/>
+          <a:ext cx="0" cy="0"/>
+          <a:chOff x="0" y="0"/>
+          <a:chExt cx="0" cy="0"/>
+        </a:xfrm>
+      </p:grpSpPr>
+      <p:sp>
+        <p:nvSpPr>
+          <p:cNvPr id="5" name="4 Título"/>
+          <p:cNvSpPr>
+            <a:spLocks noGrp="1"/>
+          </p:cNvSpPr>
+          <p:nvPr>
+            <p:ph type="title"/>
+          </p:nvPr>
+        </p:nvSpPr>
+        <p:spPr>
+          <a:xfrm>
+            <a:off x="190054" y="44624"/>
+            <a:ext cx="8229600" cy="766260"/>
+          </a:xfrm>
+        </p:spPr>
+        <p:txBody>
+          <a:bodyPr>
+            <a:noAutofit/>
+          </a:bodyPr>
+          <a:lstStyle/>
+          <a:p>
+            <a:r>
+              <a:rPr lang="es-MX" sz="2800" dirty="0"/>
+              <a:t>Potenciación — comparación entre lenguajes</a:t>
+            </a:r>
+            <a:endParaRPr lang="es-CO" sz="2800" dirty="0"/>
+          </a:p>
+        </p:txBody>
+      </p:sp>
+      <p:sp>
+        <p:nvSpPr>
+          <p:cNvPr id="8" name="1 Marcador de contenido"/>
+          <p:cNvSpPr>
+            <a:spLocks noGrp="1"/>
+          </p:cNvSpPr>
+          <p:nvPr>
+            <p:ph idx="1"/>
+          </p:nvPr>
+        </p:nvSpPr>
+        <p:spPr>
+          <a:xfrm>
+            <a:off x="162554" y="744352"/>
+            <a:ext cx="8791392" cy="5564968"/>
+          </a:xfrm>
+        </p:spPr>
+        <p:txBody>
+          <a:bodyPr>
+            <a:normAutofit lnSpcReduction="10000"/>
+          </a:bodyPr>
+          <a:lstStyle/>
+          <a:p>
+            <a:pPr marL="0" indent="0">
+              <a:buNone/>
+            </a:pPr>
+            <a:r>
+              <a:rPr lang="es-MX" sz="2200" dirty="0"/>
+              <a:t>El símbolo </a:t>
+            </a:r>
+            <a:r>
+              <a:rPr lang="es-MX" sz="2200" dirty="0">
+                <a:solidFill>
+                  <a:srgbClr val="C00000"/>
+                </a:solidFill>
+                <a:latin typeface="Consolas" panose="020B0609020204030204" pitchFamily="49" charset="0"/>
+              </a:rPr>
+              <a:t>^</a:t>
+            </a:r>
+            <a:r>
+              <a:rPr lang="es-MX" sz="2200" dirty="0"/>
+              <a:t> no significa lo mismo en todas partes:</a:t>
+            </a:r>
+          </a:p>
+          <a:p>
+            <a:r>
+              <a:rPr lang="es-MX" sz="2000" dirty="0"/>
+              <a:t>En Python, C, Java y JavaScript, </a:t>
+            </a:r>
+            <a:r>
+              <a:rPr lang="es-MX" sz="2000" dirty="0">
+                <a:solidFill>
+                  <a:srgbClr val="C00000"/>
+                </a:solidFill>
+                <a:latin typeface="Consolas" panose="020B0609020204030204" pitchFamily="49" charset="0"/>
+              </a:rPr>
+              <a:t>^</a:t>
+            </a:r>
+            <a:r>
+              <a:rPr lang="es-MX" sz="2000" dirty="0"/>
+              <a:t> es </a:t>
+            </a:r>
+            <a:r>
+              <a:rPr lang="es-MX" sz="2000" dirty="0">
+                <a:solidFill>
+                  <a:srgbClr val="C00000"/>
+                </a:solidFill>
+                <a:latin typeface="Consolas" panose="020B0609020204030204" pitchFamily="49" charset="0"/>
+              </a:rPr>
+              <a:t>XOR</a:t>
+            </a:r>
+            <a:r>
+              <a:rPr lang="es-MX" sz="2000" dirty="0"/>
+              <a:t> bit a bit, no potencia.</a:t>
+            </a:r>
+          </a:p>
+          <a:p>
+            <a:r>
+              <a:rPr lang="es-MX" sz="2000" dirty="0"/>
+              <a:t>Python usa </a:t>
+            </a:r>
+            <a:r>
+              <a:rPr lang="es-MX" sz="2000" dirty="0">
+                <a:solidFill>
+                  <a:srgbClr val="C00000"/>
+                </a:solidFill>
+                <a:latin typeface="Consolas" panose="020B0609020204030204" pitchFamily="49" charset="0"/>
+              </a:rPr>
+              <a:t>**</a:t>
+            </a:r>
+            <a:r>
+              <a:rPr lang="es-MX" sz="2000" dirty="0"/>
+              <a:t> para potencia; C y Java no tienen operador de potencia (se usa una función).</a:t>
+            </a:r>
+          </a:p>
+          <a:p>
+            <a:r>
+              <a:rPr lang="es-MX" sz="2000" dirty="0"/>
+              <a:t>Excel, MATLAB y algunas calculadoras sí usan </a:t>
+            </a:r>
+            <a:r>
+              <a:rPr lang="es-MX" sz="2000" dirty="0">
+                <a:solidFill>
+                  <a:srgbClr val="C00000"/>
+                </a:solidFill>
+                <a:latin typeface="Consolas" panose="020B0609020204030204" pitchFamily="49" charset="0"/>
+              </a:rPr>
+              <a:t>^</a:t>
+            </a:r>
+            <a:r>
+              <a:rPr lang="es-MX" sz="2000" dirty="0"/>
+              <a:t> como potencia — de ahí viene la confusión.</a:t>
+            </a:r>
+          </a:p>
+          <a:p>
+            <a:endParaRPr lang="es-MX" sz="2000" dirty="0"/>
+          </a:p>
+          <a:p>
+            <a:endParaRPr lang="es-MX" sz="2000" dirty="0"/>
+          </a:p>
+          <a:p>
+            <a:endParaRPr lang="es-MX" sz="2000" dirty="0"/>
+          </a:p>
+          <a:p>
+            <a:endParaRPr lang="es-MX" sz="2000" dirty="0"/>
+          </a:p>
+          <a:p>
+            <a:endParaRPr lang="es-MX" sz="2000" dirty="0"/>
+          </a:p>
+          <a:p>
+            <a:endParaRPr lang="es-MX" sz="2000" dirty="0"/>
+          </a:p>
+          <a:p>
+            <a:endParaRPr lang="es-MX" sz="2000" dirty="0"/>
+          </a:p>
+          <a:p>
+            <a:endParaRPr lang="es-MX" sz="2000" dirty="0"/>
+          </a:p>
+          <a:p>
+            <a:r>
+              <a:rPr lang="es-MX" sz="2000" b="1" dirty="0"/>
+              <a:t>(Pregunta)</a:t>
+            </a:r>
+            <a:r>
+              <a:rPr lang="es-MX" sz="2000" dirty="0"/>
+              <a:t> Si escribe </a:t>
+            </a:r>
+            <a:r>
+              <a:rPr lang="es-MX" sz="1800" dirty="0">
+                <a:solidFill>
+                  <a:srgbClr val="C00000"/>
+                </a:solidFill>
+                <a:latin typeface="Consolas" panose="020B0609020204030204" pitchFamily="49" charset="0"/>
+              </a:rPr>
+              <a:t>5 ^ 2</a:t>
+            </a:r>
+            <a:r>
+              <a:rPr lang="es-MX" sz="2000" dirty="0"/>
+              <a:t> en Python esperando "5 al cuadrado", ¿qué cree que se va a devolver realmente?</a:t>
+            </a:r>
+          </a:p>
+          <a:p>
+            <a:endParaRPr lang="es-MX" sz="2000" dirty="0"/>
+          </a:p>
+          <a:p>
+            <a:endParaRPr lang="es-MX" sz="2000" dirty="0"/>
+          </a:p>
+          <a:p>
+            <a:endParaRPr lang="es-MX" sz="2000" dirty="0"/>
+          </a:p>
+          <a:p>
+            <a:endParaRPr lang="es-MX" sz="2000" dirty="0"/>
+          </a:p>
+          <a:p>
+            <a:endParaRPr lang="es-MX" sz="2000" dirty="0"/>
+          </a:p>
+          <a:p>
+            <a:endParaRPr lang="es-MX" sz="2000" dirty="0"/>
+          </a:p>
+          <a:p>
+            <a:endParaRPr lang="es-MX" sz="2000" dirty="0"/>
+          </a:p>
+          <a:p>
+            <a:endParaRPr lang="es-MX" sz="2000" dirty="0"/>
+          </a:p>
+          <a:p>
+            <a:endParaRPr lang="es-MX" sz="1600" dirty="0"/>
+          </a:p>
+          <a:p>
+            <a:endParaRPr lang="es-MX" sz="2000" dirty="0"/>
+          </a:p>
+          <a:p>
+            <a:endParaRPr lang="es-MX" sz="2000" dirty="0"/>
+          </a:p>
+          <a:p>
+            <a:endParaRPr lang="es-MX" sz="2000" dirty="0"/>
+          </a:p>
+          <a:p>
+            <a:endParaRPr lang="es-MX" sz="2000" dirty="0"/>
+          </a:p>
+        </p:txBody>
+      </p:sp>
+      <p:graphicFrame>
+        <p:nvGraphicFramePr>
+          <p:cNvPr id="2" name="Tabla 1">
+            <a:extLst>
+              <a:ext uri="{FF2B5EF4-FFF2-40B4-BE49-F238E27FC236}">
+                <a16:creationId xmlns:a16="http://schemas.microsoft.com/office/drawing/2014/main" id="{25B80878-37CE-4660-8F5F-8A754EBAAD12}"/>
+              </a:ext>
+            </a:extLst>
+          </p:cNvPr>
+          <p:cNvGraphicFramePr>
+            <a:graphicFrameLocks noGrp="1"/>
+          </p:cNvGraphicFramePr>
+          <p:nvPr>
+            <p:extLst>
+              <p:ext uri="{D42A27DB-BD31-4B8C-83A1-F6EECF244321}">
+                <p14:modId xmlns:p14="http://schemas.microsoft.com/office/powerpoint/2010/main" val="1490644833"/>
+              </p:ext>
+            </p:extLst>
+          </p:nvPr>
+        </p:nvGraphicFramePr>
+        <p:xfrm>
+          <a:off x="959422" y="2996952"/>
+          <a:ext cx="6927406" cy="2468880"/>
+        </p:xfrm>
+        <a:graphic>
+          <a:graphicData uri="http://schemas.openxmlformats.org/drawingml/2006/table">
+            <a:tbl>
+              <a:tblPr/>
+              <a:tblGrid>
+                <a:gridCol w="1669606">
+                  <a:extLst>
+                    <a:ext uri="{9D8B030D-6E8A-4147-A177-3AD203B41FA5}">
+                      <a16:colId xmlns:a16="http://schemas.microsoft.com/office/drawing/2014/main" val="92826398"/>
+                    </a:ext>
+                  </a:extLst>
+                </a:gridCol>
+                <a:gridCol w="3281856">
+                  <a:extLst>
+                    <a:ext uri="{9D8B030D-6E8A-4147-A177-3AD203B41FA5}">
+                      <a16:colId xmlns:a16="http://schemas.microsoft.com/office/drawing/2014/main" val="1663900879"/>
+                    </a:ext>
+                  </a:extLst>
+                </a:gridCol>
+                <a:gridCol w="1975944">
+                  <a:extLst>
+                    <a:ext uri="{9D8B030D-6E8A-4147-A177-3AD203B41FA5}">
+                      <a16:colId xmlns:a16="http://schemas.microsoft.com/office/drawing/2014/main" val="1697343658"/>
+                    </a:ext>
+                  </a:extLst>
+                </a:gridCol>
+              </a:tblGrid>
+              <a:tr h="0">
+                <a:tc>
+                  <a:txBody>
+                    <a:bodyPr/>
+                    <a:lstStyle/>
+                    <a:p>
+                      <a:r>
+                        <a:rPr lang="es-CO" b="1" dirty="0">
+                          <a:solidFill>
+                            <a:schemeClr val="bg1"/>
+                          </a:solidFill>
+                        </a:rPr>
+                        <a:t>Lenguaje</a:t>
+                      </a:r>
+                    </a:p>
+                  </a:txBody>
+                  <a:tcPr anchor="ctr">
+                    <a:lnL w="12700" cap="flat" cmpd="sng" algn="ctr">
+                      <a:solidFill>
+                        <a:schemeClr val="tx1"/>
+                      </a:solidFill>
+                      <a:prstDash val="solid"/>
+                      <a:round/>
+                      <a:headEnd type="none" w="med" len="med"/>
+                      <a:tailEnd type="none" w="med" len="med"/>
+                    </a:lnL>
+                    <a:lnR w="12700" cap="flat" cmpd="sng" algn="ctr">
+                      <a:solidFill>
+                        <a:schemeClr val="tx1"/>
+                      </a:solidFill>
+                      <a:prstDash val="solid"/>
+                      <a:round/>
+                      <a:headEnd type="none" w="med" len="med"/>
+                      <a:tailEnd type="none" w="med" len="med"/>
+                    </a:lnR>
+                    <a:lnT w="12700" cap="flat" cmpd="sng" algn="ctr">
+                      <a:solidFill>
+                        <a:schemeClr val="tx1"/>
+                      </a:solidFill>
+                      <a:prstDash val="solid"/>
+                      <a:round/>
+                      <a:headEnd type="none" w="med" len="med"/>
+                      <a:tailEnd type="none" w="med" len="med"/>
+                    </a:lnT>
+                    <a:lnB w="12700" cap="flat" cmpd="sng" algn="ctr">
+                      <a:solidFill>
+                        <a:schemeClr val="tx1"/>
+                      </a:solidFill>
+                      <a:prstDash val="solid"/>
+                      <a:round/>
+                      <a:headEnd type="none" w="med" len="med"/>
+                      <a:tailEnd type="none" w="med" len="med"/>
+                    </a:lnB>
+                    <a:solidFill>
+                      <a:schemeClr val="tx1"/>
+                    </a:solidFill>
+                  </a:tcPr>
+                </a:tc>
+                <a:tc>
+                  <a:txBody>
+                    <a:bodyPr/>
+                    <a:lstStyle/>
+                    <a:p>
+                      <a:r>
+                        <a:rPr lang="es-CO" b="1">
+                          <a:solidFill>
+                            <a:schemeClr val="bg1"/>
+                          </a:solidFill>
+                        </a:rPr>
+                        <a:t>Potencia</a:t>
+                      </a:r>
+                    </a:p>
+                  </a:txBody>
+                  <a:tcPr anchor="ctr">
+                    <a:lnL w="12700" cap="flat" cmpd="sng" algn="ctr">
+                      <a:solidFill>
+                        <a:schemeClr val="tx1"/>
+                      </a:solidFill>
+                      <a:prstDash val="solid"/>
+                      <a:round/>
+                      <a:headEnd type="none" w="med" len="med"/>
+                      <a:tailEnd type="none" w="med" len="med"/>
+                    </a:lnL>
+                    <a:lnR w="12700" cap="flat" cmpd="sng" algn="ctr">
+                      <a:solidFill>
+                        <a:schemeClr val="tx1"/>
+                      </a:solidFill>
+                      <a:prstDash val="solid"/>
+                      <a:round/>
+                      <a:headEnd type="none" w="med" len="med"/>
+                      <a:tailEnd type="none" w="med" len="med"/>
+                    </a:lnR>
+                    <a:lnT w="12700" cap="flat" cmpd="sng" algn="ctr">
+                      <a:solidFill>
+                        <a:schemeClr val="tx1"/>
+                      </a:solidFill>
+                      <a:prstDash val="solid"/>
+                      <a:round/>
+                      <a:headEnd type="none" w="med" len="med"/>
+                      <a:tailEnd type="none" w="med" len="med"/>
+                    </a:lnT>
+                    <a:lnB w="12700" cap="flat" cmpd="sng" algn="ctr">
+                      <a:solidFill>
+                        <a:schemeClr val="tx1"/>
+                      </a:solidFill>
+                      <a:prstDash val="solid"/>
+                      <a:round/>
+                      <a:headEnd type="none" w="med" len="med"/>
+                      <a:tailEnd type="none" w="med" len="med"/>
+                    </a:lnB>
+                    <a:solidFill>
+                      <a:schemeClr val="tx1"/>
+                    </a:solidFill>
+                  </a:tcPr>
+                </a:tc>
+                <a:tc>
+                  <a:txBody>
+                    <a:bodyPr/>
+                    <a:lstStyle/>
+                    <a:p>
+                      <a:r>
+                        <a:rPr lang="es-CO" b="1" dirty="0">
+                          <a:solidFill>
+                            <a:schemeClr val="bg1"/>
+                          </a:solidFill>
+                        </a:rPr>
+                        <a:t>^ significa</a:t>
+                      </a:r>
+                    </a:p>
+                  </a:txBody>
+                  <a:tcPr anchor="ctr">
+                    <a:lnL w="12700" cap="flat" cmpd="sng" algn="ctr">
+                      <a:solidFill>
+                        <a:schemeClr val="tx1"/>
+                      </a:solidFill>
+                      <a:prstDash val="solid"/>
+                      <a:round/>
+                      <a:headEnd type="none" w="med" len="med"/>
+                      <a:tailEnd type="none" w="med" len="med"/>
+                    </a:lnL>
+                    <a:lnR w="12700" cap="flat" cmpd="sng" algn="ctr">
+                      <a:solidFill>
+                        <a:schemeClr val="tx1"/>
+                      </a:solidFill>
+                      <a:prstDash val="solid"/>
+                      <a:round/>
+                      <a:headEnd type="none" w="med" len="med"/>
+                      <a:tailEnd type="none" w="med" len="med"/>
+                    </a:lnR>
+                    <a:lnT w="12700" cap="flat" cmpd="sng" algn="ctr">
+                      <a:solidFill>
+                        <a:schemeClr val="tx1"/>
+                      </a:solidFill>
+                      <a:prstDash val="solid"/>
+                      <a:round/>
+                      <a:headEnd type="none" w="med" len="med"/>
+                      <a:tailEnd type="none" w="med" len="med"/>
+                    </a:lnT>
+                    <a:lnB w="12700" cap="flat" cmpd="sng" algn="ctr">
+                      <a:solidFill>
+                        <a:schemeClr val="tx1"/>
+                      </a:solidFill>
+                      <a:prstDash val="solid"/>
+                      <a:round/>
+                      <a:headEnd type="none" w="med" len="med"/>
+                      <a:tailEnd type="none" w="med" len="med"/>
+                    </a:lnB>
+                    <a:solidFill>
+                      <a:schemeClr val="tx1"/>
+                    </a:solidFill>
+                  </a:tcPr>
+                </a:tc>
+                <a:extLst>
+                  <a:ext uri="{0D108BD9-81ED-4DB2-BD59-A6C34878D82A}">
+                    <a16:rowId xmlns:a16="http://schemas.microsoft.com/office/drawing/2014/main" val="3299504992"/>
+                  </a:ext>
+                </a:extLst>
+              </a:tr>
+              <a:tr h="0">
+                <a:tc>
+                  <a:txBody>
+                    <a:bodyPr/>
+                    <a:lstStyle/>
+                    <a:p>
+                      <a:r>
+                        <a:rPr lang="es-CO"/>
+                        <a:t>Python</a:t>
+                      </a:r>
+                    </a:p>
+                  </a:txBody>
+                  <a:tcPr anchor="ctr">
+                    <a:lnL w="12700" cap="flat" cmpd="sng" algn="ctr">
+                      <a:solidFill>
+                        <a:schemeClr val="tx1"/>
+                      </a:solidFill>
+                      <a:prstDash val="solid"/>
+                      <a:round/>
+                      <a:headEnd type="none" w="med" len="med"/>
+                      <a:tailEnd type="none" w="med" len="med"/>
+                    </a:lnL>
+                    <a:lnR w="12700" cap="flat" cmpd="sng" algn="ctr">
+                      <a:solidFill>
+                        <a:schemeClr val="tx1"/>
+                      </a:solidFill>
+                      <a:prstDash val="solid"/>
+                      <a:round/>
+                      <a:headEnd type="none" w="med" len="med"/>
+                      <a:tailEnd type="none" w="med" len="med"/>
+                    </a:lnR>
+                    <a:lnT w="12700" cap="flat" cmpd="sng" algn="ctr">
+                      <a:solidFill>
+                        <a:schemeClr val="tx1"/>
+                      </a:solidFill>
+                      <a:prstDash val="solid"/>
+                      <a:round/>
+                      <a:headEnd type="none" w="med" len="med"/>
+                      <a:tailEnd type="none" w="med" len="med"/>
+                    </a:lnT>
+                    <a:lnB w="12700" cap="flat" cmpd="sng" algn="ctr">
+                      <a:solidFill>
+                        <a:schemeClr val="tx1"/>
+                      </a:solidFill>
+                      <a:prstDash val="solid"/>
+                      <a:round/>
+                      <a:headEnd type="none" w="med" len="med"/>
+                      <a:tailEnd type="none" w="med" len="med"/>
+                    </a:lnB>
+                  </a:tcPr>
+                </a:tc>
+                <a:tc>
+                  <a:txBody>
+                    <a:bodyPr/>
+                    <a:lstStyle/>
+                    <a:p>
+                      <a:r>
+                        <a:rPr lang="es-CO" dirty="0"/>
+                        <a:t>**</a:t>
+                      </a:r>
+                    </a:p>
+                  </a:txBody>
+                  <a:tcPr anchor="ctr">
+                    <a:lnL w="12700" cap="flat" cmpd="sng" algn="ctr">
+                      <a:solidFill>
+                        <a:schemeClr val="tx1"/>
+                      </a:solidFill>
+                      <a:prstDash val="solid"/>
+                      <a:round/>
+                      <a:headEnd type="none" w="med" len="med"/>
+                      <a:tailEnd type="none" w="med" len="med"/>
+                    </a:lnL>
+                    <a:lnR w="12700" cap="flat" cmpd="sng" algn="ctr">
+                      <a:solidFill>
+                        <a:schemeClr val="tx1"/>
+                      </a:solidFill>
+                      <a:prstDash val="solid"/>
+                      <a:round/>
+                      <a:headEnd type="none" w="med" len="med"/>
+                      <a:tailEnd type="none" w="med" len="med"/>
+                    </a:lnR>
+                    <a:lnT w="12700" cap="flat" cmpd="sng" algn="ctr">
+                      <a:solidFill>
+                        <a:schemeClr val="tx1"/>
+                      </a:solidFill>
+                      <a:prstDash val="solid"/>
+                      <a:round/>
+                      <a:headEnd type="none" w="med" len="med"/>
+                      <a:tailEnd type="none" w="med" len="med"/>
+                    </a:lnT>
+                    <a:lnB w="12700" cap="flat" cmpd="sng" algn="ctr">
+                      <a:solidFill>
+                        <a:schemeClr val="tx1"/>
+                      </a:solidFill>
+                      <a:prstDash val="solid"/>
+                      <a:round/>
+                      <a:headEnd type="none" w="med" len="med"/>
+                      <a:tailEnd type="none" w="med" len="med"/>
+                    </a:lnB>
+                  </a:tcPr>
+                </a:tc>
+                <a:tc>
+                  <a:txBody>
+                    <a:bodyPr/>
+                    <a:lstStyle/>
+                    <a:p>
+                      <a:r>
+                        <a:rPr lang="es-CO" dirty="0"/>
+                        <a:t>XOR bit a bit</a:t>
+                      </a:r>
+                    </a:p>
+                  </a:txBody>
+                  <a:tcPr anchor="ctr">
+                    <a:lnL w="12700" cap="flat" cmpd="sng" algn="ctr">
+                      <a:solidFill>
+                        <a:schemeClr val="tx1"/>
+                      </a:solidFill>
+                      <a:prstDash val="solid"/>
+                      <a:round/>
+                      <a:headEnd type="none" w="med" len="med"/>
+                      <a:tailEnd type="none" w="med" len="med"/>
+                    </a:lnL>
+                    <a:lnR w="12700" cap="flat" cmpd="sng" algn="ctr">
+                      <a:solidFill>
+                        <a:schemeClr val="tx1"/>
+                      </a:solidFill>
+                      <a:prstDash val="solid"/>
+                      <a:round/>
+                      <a:headEnd type="none" w="med" len="med"/>
+                      <a:tailEnd type="none" w="med" len="med"/>
+                    </a:lnR>
+                    <a:lnT w="12700" cap="flat" cmpd="sng" algn="ctr">
+                      <a:solidFill>
+                        <a:schemeClr val="tx1"/>
+                      </a:solidFill>
+                      <a:prstDash val="solid"/>
+                      <a:round/>
+                      <a:headEnd type="none" w="med" len="med"/>
+                      <a:tailEnd type="none" w="med" len="med"/>
+                    </a:lnT>
+                    <a:lnB w="12700" cap="flat" cmpd="sng" algn="ctr">
+                      <a:solidFill>
+                        <a:schemeClr val="tx1"/>
+                      </a:solidFill>
+                      <a:prstDash val="solid"/>
+                      <a:round/>
+                      <a:headEnd type="none" w="med" len="med"/>
+                      <a:tailEnd type="none" w="med" len="med"/>
+                    </a:lnB>
+                  </a:tcPr>
+                </a:tc>
+                <a:extLst>
+                  <a:ext uri="{0D108BD9-81ED-4DB2-BD59-A6C34878D82A}">
+                    <a16:rowId xmlns:a16="http://schemas.microsoft.com/office/drawing/2014/main" val="2198335645"/>
+                  </a:ext>
+                </a:extLst>
+              </a:tr>
+              <a:tr h="0">
+                <a:tc>
+                  <a:txBody>
+                    <a:bodyPr/>
+                    <a:lstStyle/>
+                    <a:p>
+                      <a:r>
+                        <a:rPr lang="es-CO"/>
+                        <a:t>C</a:t>
+                      </a:r>
+                    </a:p>
+                  </a:txBody>
+                  <a:tcPr anchor="ctr">
+                    <a:lnL w="12700" cap="flat" cmpd="sng" algn="ctr">
+                      <a:solidFill>
+                        <a:schemeClr val="tx1"/>
+                      </a:solidFill>
+                      <a:prstDash val="solid"/>
+                      <a:round/>
+                      <a:headEnd type="none" w="med" len="med"/>
+                      <a:tailEnd type="none" w="med" len="med"/>
+                    </a:lnL>
+                    <a:lnR w="12700" cap="flat" cmpd="sng" algn="ctr">
+                      <a:solidFill>
+                        <a:schemeClr val="tx1"/>
+                      </a:solidFill>
+                      <a:prstDash val="solid"/>
+                      <a:round/>
+                      <a:headEnd type="none" w="med" len="med"/>
+                      <a:tailEnd type="none" w="med" len="med"/>
+                    </a:lnR>
+                    <a:lnT w="12700" cap="flat" cmpd="sng" algn="ctr">
+                      <a:solidFill>
+                        <a:schemeClr val="tx1"/>
+                      </a:solidFill>
+                      <a:prstDash val="solid"/>
+                      <a:round/>
+                      <a:headEnd type="none" w="med" len="med"/>
+                      <a:tailEnd type="none" w="med" len="med"/>
+                    </a:lnT>
+                    <a:lnB w="12700" cap="flat" cmpd="sng" algn="ctr">
+                      <a:solidFill>
+                        <a:schemeClr val="tx1"/>
+                      </a:solidFill>
+                      <a:prstDash val="solid"/>
+                      <a:round/>
+                      <a:headEnd type="none" w="med" len="med"/>
+                      <a:tailEnd type="none" w="med" len="med"/>
+                    </a:lnB>
+                  </a:tcPr>
+                </a:tc>
+                <a:tc>
+                  <a:txBody>
+                    <a:bodyPr/>
+                    <a:lstStyle/>
+                    <a:p>
+                      <a:r>
+                        <a:rPr lang="es-MX" dirty="0" err="1"/>
+                        <a:t>pow</a:t>
+                      </a:r>
+                      <a:r>
+                        <a:rPr lang="es-MX" dirty="0"/>
+                        <a:t>() (función, #include &lt;</a:t>
+                      </a:r>
+                      <a:r>
+                        <a:rPr lang="es-MX" dirty="0" err="1"/>
+                        <a:t>math.h</a:t>
+                      </a:r>
+                      <a:r>
+                        <a:rPr lang="es-MX" dirty="0"/>
+                        <a:t>&gt;)</a:t>
+                      </a:r>
+                    </a:p>
+                  </a:txBody>
+                  <a:tcPr anchor="ctr">
+                    <a:lnL w="12700" cap="flat" cmpd="sng" algn="ctr">
+                      <a:solidFill>
+                        <a:schemeClr val="tx1"/>
+                      </a:solidFill>
+                      <a:prstDash val="solid"/>
+                      <a:round/>
+                      <a:headEnd type="none" w="med" len="med"/>
+                      <a:tailEnd type="none" w="med" len="med"/>
+                    </a:lnL>
+                    <a:lnR w="12700" cap="flat" cmpd="sng" algn="ctr">
+                      <a:solidFill>
+                        <a:schemeClr val="tx1"/>
+                      </a:solidFill>
+                      <a:prstDash val="solid"/>
+                      <a:round/>
+                      <a:headEnd type="none" w="med" len="med"/>
+                      <a:tailEnd type="none" w="med" len="med"/>
+                    </a:lnR>
+                    <a:lnT w="12700" cap="flat" cmpd="sng" algn="ctr">
+                      <a:solidFill>
+                        <a:schemeClr val="tx1"/>
+                      </a:solidFill>
+                      <a:prstDash val="solid"/>
+                      <a:round/>
+                      <a:headEnd type="none" w="med" len="med"/>
+                      <a:tailEnd type="none" w="med" len="med"/>
+                    </a:lnT>
+                    <a:lnB w="12700" cap="flat" cmpd="sng" algn="ctr">
+                      <a:solidFill>
+                        <a:schemeClr val="tx1"/>
+                      </a:solidFill>
+                      <a:prstDash val="solid"/>
+                      <a:round/>
+                      <a:headEnd type="none" w="med" len="med"/>
+                      <a:tailEnd type="none" w="med" len="med"/>
+                    </a:lnB>
+                  </a:tcPr>
+                </a:tc>
+                <a:tc>
+                  <a:txBody>
+                    <a:bodyPr/>
+                    <a:lstStyle/>
+                    <a:p>
+                      <a:r>
+                        <a:rPr lang="es-CO" dirty="0"/>
+                        <a:t>XOR bit a bit</a:t>
+                      </a:r>
+                    </a:p>
+                  </a:txBody>
+                  <a:tcPr anchor="ctr">
+                    <a:lnL w="12700" cap="flat" cmpd="sng" algn="ctr">
+                      <a:solidFill>
+                        <a:schemeClr val="tx1"/>
+                      </a:solidFill>
+                      <a:prstDash val="solid"/>
+                      <a:round/>
+                      <a:headEnd type="none" w="med" len="med"/>
+                      <a:tailEnd type="none" w="med" len="med"/>
+                    </a:lnL>
+                    <a:lnR w="12700" cap="flat" cmpd="sng" algn="ctr">
+                      <a:solidFill>
+                        <a:schemeClr val="tx1"/>
+                      </a:solidFill>
+                      <a:prstDash val="solid"/>
+                      <a:round/>
+                      <a:headEnd type="none" w="med" len="med"/>
+                      <a:tailEnd type="none" w="med" len="med"/>
+                    </a:lnR>
+                    <a:lnT w="12700" cap="flat" cmpd="sng" algn="ctr">
+                      <a:solidFill>
+                        <a:schemeClr val="tx1"/>
+                      </a:solidFill>
+                      <a:prstDash val="solid"/>
+                      <a:round/>
+                      <a:headEnd type="none" w="med" len="med"/>
+                      <a:tailEnd type="none" w="med" len="med"/>
+                    </a:lnT>
+                    <a:lnB w="12700" cap="flat" cmpd="sng" algn="ctr">
+                      <a:solidFill>
+                        <a:schemeClr val="tx1"/>
+                      </a:solidFill>
+                      <a:prstDash val="solid"/>
+                      <a:round/>
+                      <a:headEnd type="none" w="med" len="med"/>
+                      <a:tailEnd type="none" w="med" len="med"/>
+                    </a:lnB>
+                  </a:tcPr>
+                </a:tc>
+                <a:extLst>
+                  <a:ext uri="{0D108BD9-81ED-4DB2-BD59-A6C34878D82A}">
+                    <a16:rowId xmlns:a16="http://schemas.microsoft.com/office/drawing/2014/main" val="1768737998"/>
+                  </a:ext>
+                </a:extLst>
+              </a:tr>
+              <a:tr h="0">
+                <a:tc>
+                  <a:txBody>
+                    <a:bodyPr/>
+                    <a:lstStyle/>
+                    <a:p>
+                      <a:r>
+                        <a:rPr lang="es-CO"/>
+                        <a:t>Java</a:t>
+                      </a:r>
+                    </a:p>
+                  </a:txBody>
+                  <a:tcPr anchor="ctr">
+                    <a:lnL w="12700" cap="flat" cmpd="sng" algn="ctr">
+                      <a:solidFill>
+                        <a:schemeClr val="tx1"/>
+                      </a:solidFill>
+                      <a:prstDash val="solid"/>
+                      <a:round/>
+                      <a:headEnd type="none" w="med" len="med"/>
+                      <a:tailEnd type="none" w="med" len="med"/>
+                    </a:lnL>
+                    <a:lnR w="12700" cap="flat" cmpd="sng" algn="ctr">
+                      <a:solidFill>
+                        <a:schemeClr val="tx1"/>
+                      </a:solidFill>
+                      <a:prstDash val="solid"/>
+                      <a:round/>
+                      <a:headEnd type="none" w="med" len="med"/>
+                      <a:tailEnd type="none" w="med" len="med"/>
+                    </a:lnR>
+                    <a:lnT w="12700" cap="flat" cmpd="sng" algn="ctr">
+                      <a:solidFill>
+                        <a:schemeClr val="tx1"/>
+                      </a:solidFill>
+                      <a:prstDash val="solid"/>
+                      <a:round/>
+                      <a:headEnd type="none" w="med" len="med"/>
+                      <a:tailEnd type="none" w="med" len="med"/>
+                    </a:lnT>
+                    <a:lnB w="12700" cap="flat" cmpd="sng" algn="ctr">
+                      <a:solidFill>
+                        <a:schemeClr val="tx1"/>
+                      </a:solidFill>
+                      <a:prstDash val="solid"/>
+                      <a:round/>
+                      <a:headEnd type="none" w="med" len="med"/>
+                      <a:tailEnd type="none" w="med" len="med"/>
+                    </a:lnB>
+                  </a:tcPr>
+                </a:tc>
+                <a:tc>
+                  <a:txBody>
+                    <a:bodyPr/>
+                    <a:lstStyle/>
+                    <a:p>
+                      <a:r>
+                        <a:rPr lang="es-CO"/>
+                        <a:t>Math.pow() (función)</a:t>
+                      </a:r>
+                    </a:p>
+                  </a:txBody>
+                  <a:tcPr anchor="ctr">
+                    <a:lnL w="12700" cap="flat" cmpd="sng" algn="ctr">
+                      <a:solidFill>
+                        <a:schemeClr val="tx1"/>
+                      </a:solidFill>
+                      <a:prstDash val="solid"/>
+                      <a:round/>
+                      <a:headEnd type="none" w="med" len="med"/>
+                      <a:tailEnd type="none" w="med" len="med"/>
+                    </a:lnL>
+                    <a:lnR w="12700" cap="flat" cmpd="sng" algn="ctr">
+                      <a:solidFill>
+                        <a:schemeClr val="tx1"/>
+                      </a:solidFill>
+                      <a:prstDash val="solid"/>
+                      <a:round/>
+                      <a:headEnd type="none" w="med" len="med"/>
+                      <a:tailEnd type="none" w="med" len="med"/>
+                    </a:lnR>
+                    <a:lnT w="12700" cap="flat" cmpd="sng" algn="ctr">
+                      <a:solidFill>
+                        <a:schemeClr val="tx1"/>
+                      </a:solidFill>
+                      <a:prstDash val="solid"/>
+                      <a:round/>
+                      <a:headEnd type="none" w="med" len="med"/>
+                      <a:tailEnd type="none" w="med" len="med"/>
+                    </a:lnT>
+                    <a:lnB w="12700" cap="flat" cmpd="sng" algn="ctr">
+                      <a:solidFill>
+                        <a:schemeClr val="tx1"/>
+                      </a:solidFill>
+                      <a:prstDash val="solid"/>
+                      <a:round/>
+                      <a:headEnd type="none" w="med" len="med"/>
+                      <a:tailEnd type="none" w="med" len="med"/>
+                    </a:lnB>
+                  </a:tcPr>
+                </a:tc>
+                <a:tc>
+                  <a:txBody>
+                    <a:bodyPr/>
+                    <a:lstStyle/>
+                    <a:p>
+                      <a:r>
+                        <a:rPr lang="es-CO"/>
+                        <a:t>XOR bit a bit</a:t>
+                      </a:r>
+                    </a:p>
+                  </a:txBody>
+                  <a:tcPr anchor="ctr">
+                    <a:lnL w="12700" cap="flat" cmpd="sng" algn="ctr">
+                      <a:solidFill>
+                        <a:schemeClr val="tx1"/>
+                      </a:solidFill>
+                      <a:prstDash val="solid"/>
+                      <a:round/>
+                      <a:headEnd type="none" w="med" len="med"/>
+                      <a:tailEnd type="none" w="med" len="med"/>
+                    </a:lnL>
+                    <a:lnR w="12700" cap="flat" cmpd="sng" algn="ctr">
+                      <a:solidFill>
+                        <a:schemeClr val="tx1"/>
+                      </a:solidFill>
+                      <a:prstDash val="solid"/>
+                      <a:round/>
+                      <a:headEnd type="none" w="med" len="med"/>
+                      <a:tailEnd type="none" w="med" len="med"/>
+                    </a:lnR>
+                    <a:lnT w="12700" cap="flat" cmpd="sng" algn="ctr">
+                      <a:solidFill>
+                        <a:schemeClr val="tx1"/>
+                      </a:solidFill>
+                      <a:prstDash val="solid"/>
+                      <a:round/>
+                      <a:headEnd type="none" w="med" len="med"/>
+                      <a:tailEnd type="none" w="med" len="med"/>
+                    </a:lnT>
+                    <a:lnB w="12700" cap="flat" cmpd="sng" algn="ctr">
+                      <a:solidFill>
+                        <a:schemeClr val="tx1"/>
+                      </a:solidFill>
+                      <a:prstDash val="solid"/>
+                      <a:round/>
+                      <a:headEnd type="none" w="med" len="med"/>
+                      <a:tailEnd type="none" w="med" len="med"/>
+                    </a:lnB>
+                  </a:tcPr>
+                </a:tc>
+                <a:extLst>
+                  <a:ext uri="{0D108BD9-81ED-4DB2-BD59-A6C34878D82A}">
+                    <a16:rowId xmlns:a16="http://schemas.microsoft.com/office/drawing/2014/main" val="1753197086"/>
+                  </a:ext>
+                </a:extLst>
+              </a:tr>
+              <a:tr h="0">
+                <a:tc>
+                  <a:txBody>
+                    <a:bodyPr/>
+                    <a:lstStyle/>
+                    <a:p>
+                      <a:r>
+                        <a:rPr lang="es-CO"/>
+                        <a:t>JavaScript</a:t>
+                      </a:r>
+                    </a:p>
+                  </a:txBody>
+                  <a:tcPr anchor="ctr">
+                    <a:lnL w="12700" cap="flat" cmpd="sng" algn="ctr">
+                      <a:solidFill>
+                        <a:schemeClr val="tx1"/>
+                      </a:solidFill>
+                      <a:prstDash val="solid"/>
+                      <a:round/>
+                      <a:headEnd type="none" w="med" len="med"/>
+                      <a:tailEnd type="none" w="med" len="med"/>
+                    </a:lnL>
+                    <a:lnR w="12700" cap="flat" cmpd="sng" algn="ctr">
+                      <a:solidFill>
+                        <a:schemeClr val="tx1"/>
+                      </a:solidFill>
+                      <a:prstDash val="solid"/>
+                      <a:round/>
+                      <a:headEnd type="none" w="med" len="med"/>
+                      <a:tailEnd type="none" w="med" len="med"/>
+                    </a:lnR>
+                    <a:lnT w="12700" cap="flat" cmpd="sng" algn="ctr">
+                      <a:solidFill>
+                        <a:schemeClr val="tx1"/>
+                      </a:solidFill>
+                      <a:prstDash val="solid"/>
+                      <a:round/>
+                      <a:headEnd type="none" w="med" len="med"/>
+                      <a:tailEnd type="none" w="med" len="med"/>
+                    </a:lnT>
+                    <a:lnB w="12700" cap="flat" cmpd="sng" algn="ctr">
+                      <a:solidFill>
+                        <a:schemeClr val="tx1"/>
+                      </a:solidFill>
+                      <a:prstDash val="solid"/>
+                      <a:round/>
+                      <a:headEnd type="none" w="med" len="med"/>
+                      <a:tailEnd type="none" w="med" len="med"/>
+                    </a:lnB>
+                  </a:tcPr>
+                </a:tc>
+                <a:tc>
+                  <a:txBody>
+                    <a:bodyPr/>
+                    <a:lstStyle/>
+                    <a:p>
+                      <a:r>
+                        <a:rPr lang="es-CO"/>
+                        <a:t>** (o Math.pow())</a:t>
+                      </a:r>
+                    </a:p>
+                  </a:txBody>
+                  <a:tcPr anchor="ctr">
+                    <a:lnL w="12700" cap="flat" cmpd="sng" algn="ctr">
+                      <a:solidFill>
+                        <a:schemeClr val="tx1"/>
+                      </a:solidFill>
+                      <a:prstDash val="solid"/>
+                      <a:round/>
+                      <a:headEnd type="none" w="med" len="med"/>
+                      <a:tailEnd type="none" w="med" len="med"/>
+                    </a:lnL>
+                    <a:lnR w="12700" cap="flat" cmpd="sng" algn="ctr">
+                      <a:solidFill>
+                        <a:schemeClr val="tx1"/>
+                      </a:solidFill>
+                      <a:prstDash val="solid"/>
+                      <a:round/>
+                      <a:headEnd type="none" w="med" len="med"/>
+                      <a:tailEnd type="none" w="med" len="med"/>
+                    </a:lnR>
+                    <a:lnT w="12700" cap="flat" cmpd="sng" algn="ctr">
+                      <a:solidFill>
+                        <a:schemeClr val="tx1"/>
+                      </a:solidFill>
+                      <a:prstDash val="solid"/>
+                      <a:round/>
+                      <a:headEnd type="none" w="med" len="med"/>
+                      <a:tailEnd type="none" w="med" len="med"/>
+                    </a:lnT>
+                    <a:lnB w="12700" cap="flat" cmpd="sng" algn="ctr">
+                      <a:solidFill>
+                        <a:schemeClr val="tx1"/>
+                      </a:solidFill>
+                      <a:prstDash val="solid"/>
+                      <a:round/>
+                      <a:headEnd type="none" w="med" len="med"/>
+                      <a:tailEnd type="none" w="med" len="med"/>
+                    </a:lnB>
+                  </a:tcPr>
+                </a:tc>
+                <a:tc>
+                  <a:txBody>
+                    <a:bodyPr/>
+                    <a:lstStyle/>
+                    <a:p>
+                      <a:r>
+                        <a:rPr lang="es-CO" dirty="0"/>
+                        <a:t>XOR bit a bit</a:t>
+                      </a:r>
+                    </a:p>
+                  </a:txBody>
+                  <a:tcPr anchor="ctr">
+                    <a:lnL w="12700" cap="flat" cmpd="sng" algn="ctr">
+                      <a:solidFill>
+                        <a:schemeClr val="tx1"/>
+                      </a:solidFill>
+                      <a:prstDash val="solid"/>
+                      <a:round/>
+                      <a:headEnd type="none" w="med" len="med"/>
+                      <a:tailEnd type="none" w="med" len="med"/>
+                    </a:lnL>
+                    <a:lnR w="12700" cap="flat" cmpd="sng" algn="ctr">
+                      <a:solidFill>
+                        <a:schemeClr val="tx1"/>
+                      </a:solidFill>
+                      <a:prstDash val="solid"/>
+                      <a:round/>
+                      <a:headEnd type="none" w="med" len="med"/>
+                      <a:tailEnd type="none" w="med" len="med"/>
+                    </a:lnR>
+                    <a:lnT w="12700" cap="flat" cmpd="sng" algn="ctr">
+                      <a:solidFill>
+                        <a:schemeClr val="tx1"/>
+                      </a:solidFill>
+                      <a:prstDash val="solid"/>
+                      <a:round/>
+                      <a:headEnd type="none" w="med" len="med"/>
+                      <a:tailEnd type="none" w="med" len="med"/>
+                    </a:lnT>
+                    <a:lnB w="12700" cap="flat" cmpd="sng" algn="ctr">
+                      <a:solidFill>
+                        <a:schemeClr val="tx1"/>
+                      </a:solidFill>
+                      <a:prstDash val="solid"/>
+                      <a:round/>
+                      <a:headEnd type="none" w="med" len="med"/>
+                      <a:tailEnd type="none" w="med" len="med"/>
+                    </a:lnB>
+                  </a:tcPr>
+                </a:tc>
+                <a:extLst>
+                  <a:ext uri="{0D108BD9-81ED-4DB2-BD59-A6C34878D82A}">
+                    <a16:rowId xmlns:a16="http://schemas.microsoft.com/office/drawing/2014/main" val="3657183443"/>
+                  </a:ext>
+                </a:extLst>
+              </a:tr>
+              <a:tr h="0">
+                <a:tc>
+                  <a:txBody>
+                    <a:bodyPr/>
+                    <a:lstStyle/>
+                    <a:p>
+                      <a:r>
+                        <a:rPr lang="es-CO" dirty="0"/>
+                        <a:t>Excel / MATLAB</a:t>
+                      </a:r>
+                    </a:p>
+                  </a:txBody>
+                  <a:tcPr anchor="ctr">
+                    <a:lnL w="12700" cap="flat" cmpd="sng" algn="ctr">
+                      <a:solidFill>
+                        <a:schemeClr val="tx1"/>
+                      </a:solidFill>
+                      <a:prstDash val="solid"/>
+                      <a:round/>
+                      <a:headEnd type="none" w="med" len="med"/>
+                      <a:tailEnd type="none" w="med" len="med"/>
+                    </a:lnL>
+                    <a:lnR w="12700" cap="flat" cmpd="sng" algn="ctr">
+                      <a:solidFill>
+                        <a:schemeClr val="tx1"/>
+                      </a:solidFill>
+                      <a:prstDash val="solid"/>
+                      <a:round/>
+                      <a:headEnd type="none" w="med" len="med"/>
+                      <a:tailEnd type="none" w="med" len="med"/>
+                    </a:lnR>
+                    <a:lnT w="12700" cap="flat" cmpd="sng" algn="ctr">
+                      <a:solidFill>
+                        <a:schemeClr val="tx1"/>
+                      </a:solidFill>
+                      <a:prstDash val="solid"/>
+                      <a:round/>
+                      <a:headEnd type="none" w="med" len="med"/>
+                      <a:tailEnd type="none" w="med" len="med"/>
+                    </a:lnT>
+                    <a:lnB w="12700" cap="flat" cmpd="sng" algn="ctr">
+                      <a:solidFill>
+                        <a:schemeClr val="tx1"/>
+                      </a:solidFill>
+                      <a:prstDash val="solid"/>
+                      <a:round/>
+                      <a:headEnd type="none" w="med" len="med"/>
+                      <a:tailEnd type="none" w="med" len="med"/>
+                    </a:lnB>
+                  </a:tcPr>
+                </a:tc>
+                <a:tc>
+                  <a:txBody>
+                    <a:bodyPr/>
+                    <a:lstStyle/>
+                    <a:p>
+                      <a:r>
+                        <a:rPr lang="es-CO" dirty="0"/>
+                        <a:t>^</a:t>
+                      </a:r>
+                    </a:p>
+                  </a:txBody>
+                  <a:tcPr anchor="ctr">
+                    <a:lnL w="12700" cap="flat" cmpd="sng" algn="ctr">
+                      <a:solidFill>
+                        <a:schemeClr val="tx1"/>
+                      </a:solidFill>
+                      <a:prstDash val="solid"/>
+                      <a:round/>
+                      <a:headEnd type="none" w="med" len="med"/>
+                      <a:tailEnd type="none" w="med" len="med"/>
+                    </a:lnL>
+                    <a:lnR w="12700" cap="flat" cmpd="sng" algn="ctr">
+                      <a:solidFill>
+                        <a:schemeClr val="tx1"/>
+                      </a:solidFill>
+                      <a:prstDash val="solid"/>
+                      <a:round/>
+                      <a:headEnd type="none" w="med" len="med"/>
+                      <a:tailEnd type="none" w="med" len="med"/>
+                    </a:lnR>
+                    <a:lnT w="12700" cap="flat" cmpd="sng" algn="ctr">
+                      <a:solidFill>
+                        <a:schemeClr val="tx1"/>
+                      </a:solidFill>
+                      <a:prstDash val="solid"/>
+                      <a:round/>
+                      <a:headEnd type="none" w="med" len="med"/>
+                      <a:tailEnd type="none" w="med" len="med"/>
+                    </a:lnT>
+                    <a:lnB w="12700" cap="flat" cmpd="sng" algn="ctr">
+                      <a:solidFill>
+                        <a:schemeClr val="tx1"/>
+                      </a:solidFill>
+                      <a:prstDash val="solid"/>
+                      <a:round/>
+                      <a:headEnd type="none" w="med" len="med"/>
+                      <a:tailEnd type="none" w="med" len="med"/>
+                    </a:lnB>
+                  </a:tcPr>
+                </a:tc>
+                <a:tc>
+                  <a:txBody>
+                    <a:bodyPr/>
+                    <a:lstStyle/>
+                    <a:p>
+                      <a:r>
+                        <a:rPr lang="es-CO" dirty="0"/>
+                        <a:t>Potencia</a:t>
+                      </a:r>
+                    </a:p>
+                  </a:txBody>
+                  <a:tcPr anchor="ctr">
+                    <a:lnL w="12700" cap="flat" cmpd="sng" algn="ctr">
+                      <a:solidFill>
+                        <a:schemeClr val="tx1"/>
+                      </a:solidFill>
+                      <a:prstDash val="solid"/>
+                      <a:round/>
+                      <a:headEnd type="none" w="med" len="med"/>
+                      <a:tailEnd type="none" w="med" len="med"/>
+                    </a:lnL>
+                    <a:lnR w="12700" cap="flat" cmpd="sng" algn="ctr">
+                      <a:solidFill>
+                        <a:schemeClr val="tx1"/>
+                      </a:solidFill>
+                      <a:prstDash val="solid"/>
+                      <a:round/>
+                      <a:headEnd type="none" w="med" len="med"/>
+                      <a:tailEnd type="none" w="med" len="med"/>
+                    </a:lnR>
+                    <a:lnT w="12700" cap="flat" cmpd="sng" algn="ctr">
+                      <a:solidFill>
+                        <a:schemeClr val="tx1"/>
+                      </a:solidFill>
+                      <a:prstDash val="solid"/>
+                      <a:round/>
+                      <a:headEnd type="none" w="med" len="med"/>
+                      <a:tailEnd type="none" w="med" len="med"/>
+                    </a:lnT>
+                    <a:lnB w="12700" cap="flat" cmpd="sng" algn="ctr">
+                      <a:solidFill>
+                        <a:schemeClr val="tx1"/>
+                      </a:solidFill>
+                      <a:prstDash val="solid"/>
+                      <a:round/>
+                      <a:headEnd type="none" w="med" len="med"/>
+                      <a:tailEnd type="none" w="med" len="med"/>
+                    </a:lnB>
+                  </a:tcPr>
+                </a:tc>
+                <a:extLst>
+                  <a:ext uri="{0D108BD9-81ED-4DB2-BD59-A6C34878D82A}">
+                    <a16:rowId xmlns:a16="http://schemas.microsoft.com/office/drawing/2014/main" val="1466505640"/>
+                  </a:ext>
+                </a:extLst>
+              </a:tr>
+            </a:tbl>
+          </a:graphicData>
+        </a:graphic>
+      </p:graphicFrame>
+    </p:spTree>
+    <p:extLst>
+      <p:ext uri="{BB962C8B-B14F-4D97-AF65-F5344CB8AC3E}">
+        <p14:creationId xmlns:p14="http://schemas.microsoft.com/office/powerpoint/2010/main" val="3261699890"/>
+      </p:ext>
+    </p:extLst>
+  </p:cSld>
+  <p:clrMapOvr>
+    <a:masterClrMapping/>
+  </p:clrMapOvr>
+</p:sld>
+</file>
+
+<file path=ppt/slides/slide29.xml><?xml version="1.0" encoding="utf-8"?>
+<p:sld xmlns:a="http://schemas.openxmlformats.org/drawingml/2006/main" xmlns:r="http://schemas.openxmlformats.org/officeDocument/2006/relationships" xmlns:p="http://schemas.openxmlformats.org/presentationml/2006/main">
+  <p:cSld>
+    <p:spTree>
+      <p:nvGrpSpPr>
+        <p:cNvPr id="1" name=""/>
+        <p:cNvGrpSpPr/>
+        <p:nvPr/>
+      </p:nvGrpSpPr>
+      <p:grpSpPr>
+        <a:xfrm>
+          <a:off x="0" y="0"/>
+          <a:ext cx="0" cy="0"/>
+          <a:chOff x="0" y="0"/>
+          <a:chExt cx="0" cy="0"/>
+        </a:xfrm>
+      </p:grpSpPr>
+      <p:sp>
+        <p:nvSpPr>
+          <p:cNvPr id="5" name="4 Título"/>
+          <p:cNvSpPr>
+            <a:spLocks noGrp="1"/>
+          </p:cNvSpPr>
+          <p:nvPr>
+            <p:ph type="title"/>
+          </p:nvPr>
+        </p:nvSpPr>
+        <p:spPr>
+          <a:xfrm>
+            <a:off x="190054" y="44624"/>
+            <a:ext cx="8229600" cy="766260"/>
+          </a:xfrm>
+        </p:spPr>
+        <p:txBody>
+          <a:bodyPr>
+            <a:noAutofit/>
+          </a:bodyPr>
+          <a:lstStyle/>
+          <a:p>
+            <a:r>
+              <a:rPr lang="es-MX" sz="2800" dirty="0"/>
+              <a:t>Asociatividad — comparación entre lenguajes</a:t>
+            </a:r>
+            <a:endParaRPr lang="es-CO" sz="2800" dirty="0"/>
+          </a:p>
+        </p:txBody>
+      </p:sp>
+      <p:sp>
+        <p:nvSpPr>
+          <p:cNvPr id="8" name="1 Marcador de contenido"/>
+          <p:cNvSpPr>
+            <a:spLocks noGrp="1"/>
+          </p:cNvSpPr>
+          <p:nvPr>
+            <p:ph idx="1"/>
+          </p:nvPr>
+        </p:nvSpPr>
+        <p:spPr>
+          <a:xfrm>
+            <a:off x="162554" y="744352"/>
+            <a:ext cx="8791392" cy="5564968"/>
+          </a:xfrm>
+        </p:spPr>
+        <p:txBody>
+          <a:bodyPr>
+            <a:normAutofit/>
+          </a:bodyPr>
+          <a:lstStyle/>
+          <a:p>
+            <a:pPr marL="0" indent="0">
+              <a:buNone/>
+            </a:pPr>
+            <a:r>
+              <a:rPr lang="es-MX" sz="2200" dirty="0"/>
+              <a:t>La forma en que se agrupan operadores repetidos también cambia:</a:t>
+            </a:r>
+          </a:p>
+          <a:p>
+            <a:r>
+              <a:rPr lang="es-MX" sz="1800" dirty="0"/>
+              <a:t>La potenciación asocia de derecha a izquierda en Python (</a:t>
+            </a:r>
+            <a:r>
+              <a:rPr lang="es-MX" sz="1800" dirty="0">
+                <a:solidFill>
+                  <a:srgbClr val="C00000"/>
+                </a:solidFill>
+                <a:latin typeface="Consolas" panose="020B0609020204030204" pitchFamily="49" charset="0"/>
+              </a:rPr>
+              <a:t>2**3**2 = 2**(3**2)</a:t>
+            </a:r>
+            <a:r>
+              <a:rPr lang="es-MX" sz="1800" dirty="0"/>
+              <a:t>), pero no todos los lenguajes la implementan igual, y C/Java ni siquiera tienen </a:t>
+            </a:r>
+            <a:r>
+              <a:rPr lang="es-MX" sz="1800" dirty="0">
+                <a:solidFill>
+                  <a:srgbClr val="C00000"/>
+                </a:solidFill>
+                <a:latin typeface="Consolas" panose="020B0609020204030204" pitchFamily="49" charset="0"/>
+              </a:rPr>
+              <a:t>**</a:t>
+            </a:r>
+            <a:r>
+              <a:rPr lang="es-MX" sz="1800" dirty="0"/>
+              <a:t>.</a:t>
+            </a:r>
+          </a:p>
+          <a:p>
+            <a:r>
+              <a:rPr lang="es-MX" sz="1800" dirty="0"/>
+              <a:t>Las comparaciones encadenadas (</a:t>
+            </a:r>
+            <a:r>
+              <a:rPr lang="es-MX" sz="1800" dirty="0">
+                <a:solidFill>
+                  <a:srgbClr val="C00000"/>
+                </a:solidFill>
+                <a:latin typeface="Consolas" panose="020B0609020204030204" pitchFamily="49" charset="0"/>
+              </a:rPr>
+              <a:t>a &lt; b &lt; c</a:t>
+            </a:r>
+            <a:r>
+              <a:rPr lang="es-MX" sz="1800" dirty="0"/>
+              <a:t>) son un caso especial en Python; en Java, C y JavaScript no existe esa sintaxis de la misma forma, y si se escribe algo parecido, el resultado es distinto.</a:t>
+            </a:r>
+          </a:p>
+          <a:p>
+            <a:r>
+              <a:rPr lang="es-MX" sz="1800" dirty="0"/>
+              <a:t>La asignación encadenada (</a:t>
+            </a:r>
+            <a:r>
+              <a:rPr lang="es-MX" sz="1800" dirty="0">
+                <a:solidFill>
+                  <a:srgbClr val="C00000"/>
+                </a:solidFill>
+                <a:latin typeface="Consolas" panose="020B0609020204030204" pitchFamily="49" charset="0"/>
+              </a:rPr>
+              <a:t>a = b = c</a:t>
+            </a:r>
+            <a:r>
+              <a:rPr lang="es-MX" sz="1800" dirty="0"/>
+              <a:t>) funciona en Python, C, Java y JavaScript, pero en Python la asignación no es una expresión (es una sentencia), mientras que en los otros sí lo es.</a:t>
+            </a:r>
+          </a:p>
+          <a:p>
+            <a:endParaRPr lang="es-MX" sz="2000" dirty="0"/>
+          </a:p>
+          <a:p>
+            <a:endParaRPr lang="es-MX" sz="2000" dirty="0"/>
+          </a:p>
+          <a:p>
+            <a:endParaRPr lang="es-MX" sz="2000" dirty="0"/>
+          </a:p>
+          <a:p>
+            <a:endParaRPr lang="es-MX" sz="2000" dirty="0"/>
+          </a:p>
+          <a:p>
+            <a:endParaRPr lang="es-MX" sz="2000" dirty="0"/>
+          </a:p>
+          <a:p>
+            <a:endParaRPr lang="es-MX" sz="2000" dirty="0"/>
+          </a:p>
+          <a:p>
+            <a:endParaRPr lang="es-MX" sz="2000" dirty="0"/>
+          </a:p>
+          <a:p>
+            <a:endParaRPr lang="es-MX" sz="1600" dirty="0"/>
+          </a:p>
+          <a:p>
+            <a:endParaRPr lang="es-MX" sz="2000" dirty="0"/>
+          </a:p>
+          <a:p>
+            <a:endParaRPr lang="es-MX" sz="2000" dirty="0"/>
+          </a:p>
+          <a:p>
+            <a:endParaRPr lang="es-MX" sz="2000" dirty="0"/>
+          </a:p>
+          <a:p>
+            <a:endParaRPr lang="es-MX" sz="2000" dirty="0"/>
+          </a:p>
+        </p:txBody>
+      </p:sp>
+      <p:graphicFrame>
+        <p:nvGraphicFramePr>
+          <p:cNvPr id="3" name="Tabla 2">
+            <a:extLst>
+              <a:ext uri="{FF2B5EF4-FFF2-40B4-BE49-F238E27FC236}">
+                <a16:creationId xmlns:a16="http://schemas.microsoft.com/office/drawing/2014/main" id="{A267ED29-17B5-477F-AB81-CAD1B4ACAE88}"/>
+              </a:ext>
+            </a:extLst>
+          </p:cNvPr>
+          <p:cNvGraphicFramePr>
+            <a:graphicFrameLocks noGrp="1"/>
+          </p:cNvGraphicFramePr>
+          <p:nvPr>
+            <p:extLst>
+              <p:ext uri="{D42A27DB-BD31-4B8C-83A1-F6EECF244321}">
+                <p14:modId xmlns:p14="http://schemas.microsoft.com/office/powerpoint/2010/main" val="2169543020"/>
+              </p:ext>
+            </p:extLst>
+          </p:nvPr>
+        </p:nvGraphicFramePr>
+        <p:xfrm>
+          <a:off x="620826" y="3770626"/>
+          <a:ext cx="7902347" cy="2286000"/>
+        </p:xfrm>
+        <a:graphic>
+          <a:graphicData uri="http://schemas.openxmlformats.org/drawingml/2006/table">
+            <a:tbl>
+              <a:tblPr/>
+              <a:tblGrid>
+                <a:gridCol w="1859129">
+                  <a:extLst>
+                    <a:ext uri="{9D8B030D-6E8A-4147-A177-3AD203B41FA5}">
+                      <a16:colId xmlns:a16="http://schemas.microsoft.com/office/drawing/2014/main" val="2926906474"/>
+                    </a:ext>
+                  </a:extLst>
+                </a:gridCol>
+                <a:gridCol w="2627611">
+                  <a:extLst>
+                    <a:ext uri="{9D8B030D-6E8A-4147-A177-3AD203B41FA5}">
+                      <a16:colId xmlns:a16="http://schemas.microsoft.com/office/drawing/2014/main" val="3902197134"/>
+                    </a:ext>
+                  </a:extLst>
+                </a:gridCol>
+                <a:gridCol w="3415607">
+                  <a:extLst>
+                    <a:ext uri="{9D8B030D-6E8A-4147-A177-3AD203B41FA5}">
+                      <a16:colId xmlns:a16="http://schemas.microsoft.com/office/drawing/2014/main" val="3666421047"/>
+                    </a:ext>
+                  </a:extLst>
+                </a:gridCol>
+              </a:tblGrid>
+              <a:tr h="0">
+                <a:tc>
+                  <a:txBody>
+                    <a:bodyPr/>
+                    <a:lstStyle/>
+                    <a:p>
+                      <a:r>
+                        <a:rPr lang="es-CO" b="1">
+                          <a:solidFill>
+                            <a:schemeClr val="bg1"/>
+                          </a:solidFill>
+                        </a:rPr>
+                        <a:t>Caso</a:t>
+                      </a:r>
+                    </a:p>
+                  </a:txBody>
+                  <a:tcPr anchor="ctr">
+                    <a:lnL>
+                      <a:noFill/>
+                    </a:lnL>
+                    <a:lnR>
+                      <a:noFill/>
+                    </a:lnR>
+                    <a:lnT>
+                      <a:noFill/>
+                    </a:lnT>
+                    <a:lnB w="12700" cap="flat" cmpd="sng" algn="ctr">
+                      <a:solidFill>
+                        <a:schemeClr val="tx1"/>
+                      </a:solidFill>
+                      <a:prstDash val="solid"/>
+                      <a:round/>
+                      <a:headEnd type="none" w="med" len="med"/>
+                      <a:tailEnd type="none" w="med" len="med"/>
+                    </a:lnB>
+                    <a:solidFill>
+                      <a:schemeClr val="tx1"/>
+                    </a:solidFill>
+                  </a:tcPr>
+                </a:tc>
+                <a:tc>
+                  <a:txBody>
+                    <a:bodyPr/>
+                    <a:lstStyle/>
+                    <a:p>
+                      <a:r>
+                        <a:rPr lang="es-CO" b="1">
+                          <a:solidFill>
+                            <a:schemeClr val="bg1"/>
+                          </a:solidFill>
+                        </a:rPr>
+                        <a:t>Python</a:t>
+                      </a:r>
+                    </a:p>
+                  </a:txBody>
+                  <a:tcPr anchor="ctr">
+                    <a:lnL>
+                      <a:noFill/>
+                    </a:lnL>
+                    <a:lnR>
+                      <a:noFill/>
+                    </a:lnR>
+                    <a:lnT>
+                      <a:noFill/>
+                    </a:lnT>
+                    <a:lnB w="12700" cap="flat" cmpd="sng" algn="ctr">
+                      <a:solidFill>
+                        <a:schemeClr val="tx1"/>
+                      </a:solidFill>
+                      <a:prstDash val="solid"/>
+                      <a:round/>
+                      <a:headEnd type="none" w="med" len="med"/>
+                      <a:tailEnd type="none" w="med" len="med"/>
+                    </a:lnB>
+                    <a:solidFill>
+                      <a:schemeClr val="tx1"/>
+                    </a:solidFill>
+                  </a:tcPr>
+                </a:tc>
+                <a:tc>
+                  <a:txBody>
+                    <a:bodyPr/>
+                    <a:lstStyle/>
+                    <a:p>
+                      <a:r>
+                        <a:rPr lang="es-CO" b="1" dirty="0">
+                          <a:solidFill>
+                            <a:schemeClr val="bg1"/>
+                          </a:solidFill>
+                        </a:rPr>
+                        <a:t>Java / C / JavaScript</a:t>
+                      </a:r>
+                    </a:p>
+                  </a:txBody>
+                  <a:tcPr anchor="ctr">
+                    <a:lnL>
+                      <a:noFill/>
+                    </a:lnL>
+                    <a:lnR>
+                      <a:noFill/>
+                    </a:lnR>
+                    <a:lnT>
+                      <a:noFill/>
+                    </a:lnT>
+                    <a:lnB w="12700" cap="flat" cmpd="sng" algn="ctr">
+                      <a:solidFill>
+                        <a:schemeClr val="tx1"/>
+                      </a:solidFill>
+                      <a:prstDash val="solid"/>
+                      <a:round/>
+                      <a:headEnd type="none" w="med" len="med"/>
+                      <a:tailEnd type="none" w="med" len="med"/>
+                    </a:lnB>
+                    <a:solidFill>
+                      <a:schemeClr val="tx1"/>
+                    </a:solidFill>
+                  </a:tcPr>
+                </a:tc>
+                <a:extLst>
+                  <a:ext uri="{0D108BD9-81ED-4DB2-BD59-A6C34878D82A}">
+                    <a16:rowId xmlns:a16="http://schemas.microsoft.com/office/drawing/2014/main" val="1498973987"/>
+                  </a:ext>
+                </a:extLst>
+              </a:tr>
+              <a:tr h="0">
+                <a:tc>
+                  <a:txBody>
+                    <a:bodyPr/>
+                    <a:lstStyle/>
+                    <a:p>
+                      <a:r>
+                        <a:rPr lang="es-CO" dirty="0">
+                          <a:solidFill>
+                            <a:srgbClr val="C00000"/>
+                          </a:solidFill>
+                          <a:latin typeface="Consolas" panose="020B0609020204030204" pitchFamily="49" charset="0"/>
+                        </a:rPr>
+                        <a:t>a &lt; b &lt; c</a:t>
+                      </a:r>
+                    </a:p>
+                  </a:txBody>
+                  <a:tcPr anchor="ctr">
+                    <a:lnL w="12700" cap="flat" cmpd="sng" algn="ctr">
+                      <a:solidFill>
+                        <a:schemeClr val="tx1"/>
+                      </a:solidFill>
+                      <a:prstDash val="solid"/>
+                      <a:round/>
+                      <a:headEnd type="none" w="med" len="med"/>
+                      <a:tailEnd type="none" w="med" len="med"/>
+                    </a:lnL>
+                    <a:lnR w="12700" cap="flat" cmpd="sng" algn="ctr">
+                      <a:solidFill>
+                        <a:schemeClr val="tx1"/>
+                      </a:solidFill>
+                      <a:prstDash val="solid"/>
+                      <a:round/>
+                      <a:headEnd type="none" w="med" len="med"/>
+                      <a:tailEnd type="none" w="med" len="med"/>
+                    </a:lnR>
+                    <a:lnT w="12700" cap="flat" cmpd="sng" algn="ctr">
+                      <a:solidFill>
+                        <a:schemeClr val="tx1"/>
+                      </a:solidFill>
+                      <a:prstDash val="solid"/>
+                      <a:round/>
+                      <a:headEnd type="none" w="med" len="med"/>
+                      <a:tailEnd type="none" w="med" len="med"/>
+                    </a:lnT>
+                    <a:lnB w="12700" cap="flat" cmpd="sng" algn="ctr">
+                      <a:solidFill>
+                        <a:schemeClr val="tx1"/>
+                      </a:solidFill>
+                      <a:prstDash val="solid"/>
+                      <a:round/>
+                      <a:headEnd type="none" w="med" len="med"/>
+                      <a:tailEnd type="none" w="med" len="med"/>
+                    </a:lnB>
+                  </a:tcPr>
+                </a:tc>
+                <a:tc>
+                  <a:txBody>
+                    <a:bodyPr/>
+                    <a:lstStyle/>
+                    <a:p>
+                      <a:r>
+                        <a:rPr lang="es-CO" dirty="0"/>
+                        <a:t>Cadena especial: equivale a </a:t>
+                      </a:r>
+                      <a:r>
+                        <a:rPr lang="es-CO" dirty="0">
+                          <a:solidFill>
+                            <a:srgbClr val="C00000"/>
+                          </a:solidFill>
+                          <a:latin typeface="Consolas" panose="020B0609020204030204" pitchFamily="49" charset="0"/>
+                        </a:rPr>
+                        <a:t>(a &lt; b)and(b &lt; c)</a:t>
+                      </a:r>
+                    </a:p>
+                  </a:txBody>
+                  <a:tcPr anchor="ctr">
+                    <a:lnL w="12700" cap="flat" cmpd="sng" algn="ctr">
+                      <a:solidFill>
+                        <a:schemeClr val="tx1"/>
+                      </a:solidFill>
+                      <a:prstDash val="solid"/>
+                      <a:round/>
+                      <a:headEnd type="none" w="med" len="med"/>
+                      <a:tailEnd type="none" w="med" len="med"/>
+                    </a:lnL>
+                    <a:lnR w="12700" cap="flat" cmpd="sng" algn="ctr">
+                      <a:solidFill>
+                        <a:schemeClr val="tx1"/>
+                      </a:solidFill>
+                      <a:prstDash val="solid"/>
+                      <a:round/>
+                      <a:headEnd type="none" w="med" len="med"/>
+                      <a:tailEnd type="none" w="med" len="med"/>
+                    </a:lnR>
+                    <a:lnT w="12700" cap="flat" cmpd="sng" algn="ctr">
+                      <a:solidFill>
+                        <a:schemeClr val="tx1"/>
+                      </a:solidFill>
+                      <a:prstDash val="solid"/>
+                      <a:round/>
+                      <a:headEnd type="none" w="med" len="med"/>
+                      <a:tailEnd type="none" w="med" len="med"/>
+                    </a:lnT>
+                    <a:lnB w="12700" cap="flat" cmpd="sng" algn="ctr">
+                      <a:solidFill>
+                        <a:schemeClr val="tx1"/>
+                      </a:solidFill>
+                      <a:prstDash val="solid"/>
+                      <a:round/>
+                      <a:headEnd type="none" w="med" len="med"/>
+                      <a:tailEnd type="none" w="med" len="med"/>
+                    </a:lnB>
+                  </a:tcPr>
+                </a:tc>
+                <a:tc>
+                  <a:txBody>
+                    <a:bodyPr/>
+                    <a:lstStyle/>
+                    <a:p>
+                      <a:r>
+                        <a:rPr lang="es-MX"/>
+                        <a:t>No existe igual; se evalúa distinto (comparación entre bool y c)</a:t>
+                      </a:r>
+                    </a:p>
+                  </a:txBody>
+                  <a:tcPr anchor="ctr">
+                    <a:lnL w="12700" cap="flat" cmpd="sng" algn="ctr">
+                      <a:solidFill>
+                        <a:schemeClr val="tx1"/>
+                      </a:solidFill>
+                      <a:prstDash val="solid"/>
+                      <a:round/>
+                      <a:headEnd type="none" w="med" len="med"/>
+                      <a:tailEnd type="none" w="med" len="med"/>
+                    </a:lnL>
+                    <a:lnR w="12700" cap="flat" cmpd="sng" algn="ctr">
+                      <a:solidFill>
+                        <a:schemeClr val="tx1"/>
+                      </a:solidFill>
+                      <a:prstDash val="solid"/>
+                      <a:round/>
+                      <a:headEnd type="none" w="med" len="med"/>
+                      <a:tailEnd type="none" w="med" len="med"/>
+                    </a:lnR>
+                    <a:lnT w="12700" cap="flat" cmpd="sng" algn="ctr">
+                      <a:solidFill>
+                        <a:schemeClr val="tx1"/>
+                      </a:solidFill>
+                      <a:prstDash val="solid"/>
+                      <a:round/>
+                      <a:headEnd type="none" w="med" len="med"/>
+                      <a:tailEnd type="none" w="med" len="med"/>
+                    </a:lnT>
+                    <a:lnB w="12700" cap="flat" cmpd="sng" algn="ctr">
+                      <a:solidFill>
+                        <a:schemeClr val="tx1"/>
+                      </a:solidFill>
+                      <a:prstDash val="solid"/>
+                      <a:round/>
+                      <a:headEnd type="none" w="med" len="med"/>
+                      <a:tailEnd type="none" w="med" len="med"/>
+                    </a:lnB>
+                  </a:tcPr>
+                </a:tc>
+                <a:extLst>
+                  <a:ext uri="{0D108BD9-81ED-4DB2-BD59-A6C34878D82A}">
+                    <a16:rowId xmlns:a16="http://schemas.microsoft.com/office/drawing/2014/main" val="2192534344"/>
+                  </a:ext>
+                </a:extLst>
+              </a:tr>
+              <a:tr h="0">
+                <a:tc>
+                  <a:txBody>
+                    <a:bodyPr/>
+                    <a:lstStyle/>
+                    <a:p>
+                      <a:r>
+                        <a:rPr lang="es-CO">
+                          <a:solidFill>
+                            <a:srgbClr val="C00000"/>
+                          </a:solidFill>
+                          <a:latin typeface="Consolas" panose="020B0609020204030204" pitchFamily="49" charset="0"/>
+                        </a:rPr>
+                        <a:t>a = b = c</a:t>
+                      </a:r>
+                    </a:p>
+                  </a:txBody>
+                  <a:tcPr anchor="ctr">
+                    <a:lnL w="12700" cap="flat" cmpd="sng" algn="ctr">
+                      <a:solidFill>
+                        <a:schemeClr val="tx1"/>
+                      </a:solidFill>
+                      <a:prstDash val="solid"/>
+                      <a:round/>
+                      <a:headEnd type="none" w="med" len="med"/>
+                      <a:tailEnd type="none" w="med" len="med"/>
+                    </a:lnL>
+                    <a:lnR w="12700" cap="flat" cmpd="sng" algn="ctr">
+                      <a:solidFill>
+                        <a:schemeClr val="tx1"/>
+                      </a:solidFill>
+                      <a:prstDash val="solid"/>
+                      <a:round/>
+                      <a:headEnd type="none" w="med" len="med"/>
+                      <a:tailEnd type="none" w="med" len="med"/>
+                    </a:lnR>
+                    <a:lnT w="12700" cap="flat" cmpd="sng" algn="ctr">
+                      <a:solidFill>
+                        <a:schemeClr val="tx1"/>
+                      </a:solidFill>
+                      <a:prstDash val="solid"/>
+                      <a:round/>
+                      <a:headEnd type="none" w="med" len="med"/>
+                      <a:tailEnd type="none" w="med" len="med"/>
+                    </a:lnT>
+                    <a:lnB w="12700" cap="flat" cmpd="sng" algn="ctr">
+                      <a:solidFill>
+                        <a:schemeClr val="tx1"/>
+                      </a:solidFill>
+                      <a:prstDash val="solid"/>
+                      <a:round/>
+                      <a:headEnd type="none" w="med" len="med"/>
+                      <a:tailEnd type="none" w="med" len="med"/>
+                    </a:lnB>
+                  </a:tcPr>
+                </a:tc>
+                <a:tc>
+                  <a:txBody>
+                    <a:bodyPr/>
+                    <a:lstStyle/>
+                    <a:p>
+                      <a:r>
+                        <a:rPr lang="es-MX" dirty="0"/>
+                        <a:t>Válido, pero </a:t>
+                      </a:r>
+                      <a:r>
+                        <a:rPr lang="es-MX" dirty="0">
+                          <a:solidFill>
+                            <a:srgbClr val="C00000"/>
+                          </a:solidFill>
+                          <a:latin typeface="Consolas" panose="020B0609020204030204" pitchFamily="49" charset="0"/>
+                        </a:rPr>
+                        <a:t>=</a:t>
+                      </a:r>
+                      <a:r>
+                        <a:rPr lang="es-MX" dirty="0"/>
+                        <a:t> es sentencia, no expresión</a:t>
+                      </a:r>
+                    </a:p>
+                  </a:txBody>
+                  <a:tcPr anchor="ctr">
+                    <a:lnL w="12700" cap="flat" cmpd="sng" algn="ctr">
+                      <a:solidFill>
+                        <a:schemeClr val="tx1"/>
+                      </a:solidFill>
+                      <a:prstDash val="solid"/>
+                      <a:round/>
+                      <a:headEnd type="none" w="med" len="med"/>
+                      <a:tailEnd type="none" w="med" len="med"/>
+                    </a:lnL>
+                    <a:lnR w="12700" cap="flat" cmpd="sng" algn="ctr">
+                      <a:solidFill>
+                        <a:schemeClr val="tx1"/>
+                      </a:solidFill>
+                      <a:prstDash val="solid"/>
+                      <a:round/>
+                      <a:headEnd type="none" w="med" len="med"/>
+                      <a:tailEnd type="none" w="med" len="med"/>
+                    </a:lnR>
+                    <a:lnT w="12700" cap="flat" cmpd="sng" algn="ctr">
+                      <a:solidFill>
+                        <a:schemeClr val="tx1"/>
+                      </a:solidFill>
+                      <a:prstDash val="solid"/>
+                      <a:round/>
+                      <a:headEnd type="none" w="med" len="med"/>
+                      <a:tailEnd type="none" w="med" len="med"/>
+                    </a:lnT>
+                    <a:lnB w="12700" cap="flat" cmpd="sng" algn="ctr">
+                      <a:solidFill>
+                        <a:schemeClr val="tx1"/>
+                      </a:solidFill>
+                      <a:prstDash val="solid"/>
+                      <a:round/>
+                      <a:headEnd type="none" w="med" len="med"/>
+                      <a:tailEnd type="none" w="med" len="med"/>
+                    </a:lnB>
+                  </a:tcPr>
+                </a:tc>
+                <a:tc>
+                  <a:txBody>
+                    <a:bodyPr/>
+                    <a:lstStyle/>
+                    <a:p>
+                      <a:r>
+                        <a:rPr lang="es-MX" dirty="0"/>
+                        <a:t>Válido, </a:t>
+                      </a:r>
+                      <a:r>
+                        <a:rPr lang="es-MX" dirty="0">
+                          <a:solidFill>
+                            <a:srgbClr val="C00000"/>
+                          </a:solidFill>
+                          <a:latin typeface="Consolas" panose="020B0609020204030204" pitchFamily="49" charset="0"/>
+                        </a:rPr>
+                        <a:t>=</a:t>
+                      </a:r>
+                      <a:r>
+                        <a:rPr lang="es-MX" dirty="0"/>
+                        <a:t> es expresión, asocia </a:t>
+                      </a:r>
+                      <a:r>
+                        <a:rPr lang="es-MX" b="1" dirty="0"/>
+                        <a:t>D→I</a:t>
+                      </a:r>
+                    </a:p>
+                  </a:txBody>
+                  <a:tcPr anchor="ctr">
+                    <a:lnL w="12700" cap="flat" cmpd="sng" algn="ctr">
+                      <a:solidFill>
+                        <a:schemeClr val="tx1"/>
+                      </a:solidFill>
+                      <a:prstDash val="solid"/>
+                      <a:round/>
+                      <a:headEnd type="none" w="med" len="med"/>
+                      <a:tailEnd type="none" w="med" len="med"/>
+                    </a:lnL>
+                    <a:lnR w="12700" cap="flat" cmpd="sng" algn="ctr">
+                      <a:solidFill>
+                        <a:schemeClr val="tx1"/>
+                      </a:solidFill>
+                      <a:prstDash val="solid"/>
+                      <a:round/>
+                      <a:headEnd type="none" w="med" len="med"/>
+                      <a:tailEnd type="none" w="med" len="med"/>
+                    </a:lnR>
+                    <a:lnT w="12700" cap="flat" cmpd="sng" algn="ctr">
+                      <a:solidFill>
+                        <a:schemeClr val="tx1"/>
+                      </a:solidFill>
+                      <a:prstDash val="solid"/>
+                      <a:round/>
+                      <a:headEnd type="none" w="med" len="med"/>
+                      <a:tailEnd type="none" w="med" len="med"/>
+                    </a:lnT>
+                    <a:lnB w="12700" cap="flat" cmpd="sng" algn="ctr">
+                      <a:solidFill>
+                        <a:schemeClr val="tx1"/>
+                      </a:solidFill>
+                      <a:prstDash val="solid"/>
+                      <a:round/>
+                      <a:headEnd type="none" w="med" len="med"/>
+                      <a:tailEnd type="none" w="med" len="med"/>
+                    </a:lnB>
+                  </a:tcPr>
+                </a:tc>
+                <a:extLst>
+                  <a:ext uri="{0D108BD9-81ED-4DB2-BD59-A6C34878D82A}">
+                    <a16:rowId xmlns:a16="http://schemas.microsoft.com/office/drawing/2014/main" val="4148685595"/>
+                  </a:ext>
+                </a:extLst>
+              </a:tr>
+              <a:tr h="0">
+                <a:tc>
+                  <a:txBody>
+                    <a:bodyPr/>
+                    <a:lstStyle/>
+                    <a:p>
+                      <a:r>
+                        <a:rPr lang="es-CO" dirty="0">
+                          <a:solidFill>
+                            <a:srgbClr val="C00000"/>
+                          </a:solidFill>
+                          <a:latin typeface="Consolas" panose="020B0609020204030204" pitchFamily="49" charset="0"/>
+                        </a:rPr>
+                        <a:t>2 ** 3 ** 2</a:t>
+                      </a:r>
+                    </a:p>
+                  </a:txBody>
+                  <a:tcPr anchor="ctr">
+                    <a:lnL w="12700" cap="flat" cmpd="sng" algn="ctr">
+                      <a:solidFill>
+                        <a:schemeClr val="tx1"/>
+                      </a:solidFill>
+                      <a:prstDash val="solid"/>
+                      <a:round/>
+                      <a:headEnd type="none" w="med" len="med"/>
+                      <a:tailEnd type="none" w="med" len="med"/>
+                    </a:lnL>
+                    <a:lnR w="12700" cap="flat" cmpd="sng" algn="ctr">
+                      <a:solidFill>
+                        <a:schemeClr val="tx1"/>
+                      </a:solidFill>
+                      <a:prstDash val="solid"/>
+                      <a:round/>
+                      <a:headEnd type="none" w="med" len="med"/>
+                      <a:tailEnd type="none" w="med" len="med"/>
+                    </a:lnR>
+                    <a:lnT w="12700" cap="flat" cmpd="sng" algn="ctr">
+                      <a:solidFill>
+                        <a:schemeClr val="tx1"/>
+                      </a:solidFill>
+                      <a:prstDash val="solid"/>
+                      <a:round/>
+                      <a:headEnd type="none" w="med" len="med"/>
+                      <a:tailEnd type="none" w="med" len="med"/>
+                    </a:lnT>
+                    <a:lnB w="12700" cap="flat" cmpd="sng" algn="ctr">
+                      <a:solidFill>
+                        <a:schemeClr val="tx1"/>
+                      </a:solidFill>
+                      <a:prstDash val="solid"/>
+                      <a:round/>
+                      <a:headEnd type="none" w="med" len="med"/>
+                      <a:tailEnd type="none" w="med" len="med"/>
+                    </a:lnB>
+                  </a:tcPr>
+                </a:tc>
+                <a:tc>
+                  <a:txBody>
+                    <a:bodyPr/>
+                    <a:lstStyle/>
+                    <a:p>
+                      <a:r>
+                        <a:rPr lang="es-CO" dirty="0" err="1"/>
+                        <a:t>Asocis</a:t>
+                      </a:r>
+                      <a:r>
+                        <a:rPr lang="es-CO" dirty="0"/>
+                        <a:t> de </a:t>
+                      </a:r>
+                      <a:r>
+                        <a:rPr lang="es-CO" b="1" dirty="0"/>
+                        <a:t>D→I</a:t>
+                      </a:r>
+                      <a:r>
+                        <a:rPr lang="es-CO" dirty="0"/>
+                        <a:t> es decir da </a:t>
+                      </a:r>
+                      <a:r>
+                        <a:rPr lang="es-CO" dirty="0">
+                          <a:solidFill>
+                            <a:srgbClr val="C00000"/>
+                          </a:solidFill>
+                          <a:latin typeface="Consolas" panose="020B0609020204030204" pitchFamily="49" charset="0"/>
+                        </a:rPr>
+                        <a:t>512</a:t>
+                      </a:r>
+                    </a:p>
+                  </a:txBody>
+                  <a:tcPr anchor="ctr">
+                    <a:lnL w="12700" cap="flat" cmpd="sng" algn="ctr">
+                      <a:solidFill>
+                        <a:schemeClr val="tx1"/>
+                      </a:solidFill>
+                      <a:prstDash val="solid"/>
+                      <a:round/>
+                      <a:headEnd type="none" w="med" len="med"/>
+                      <a:tailEnd type="none" w="med" len="med"/>
+                    </a:lnL>
+                    <a:lnR w="12700" cap="flat" cmpd="sng" algn="ctr">
+                      <a:solidFill>
+                        <a:schemeClr val="tx1"/>
+                      </a:solidFill>
+                      <a:prstDash val="solid"/>
+                      <a:round/>
+                      <a:headEnd type="none" w="med" len="med"/>
+                      <a:tailEnd type="none" w="med" len="med"/>
+                    </a:lnR>
+                    <a:lnT w="12700" cap="flat" cmpd="sng" algn="ctr">
+                      <a:solidFill>
+                        <a:schemeClr val="tx1"/>
+                      </a:solidFill>
+                      <a:prstDash val="solid"/>
+                      <a:round/>
+                      <a:headEnd type="none" w="med" len="med"/>
+                      <a:tailEnd type="none" w="med" len="med"/>
+                    </a:lnT>
+                    <a:lnB w="12700" cap="flat" cmpd="sng" algn="ctr">
+                      <a:solidFill>
+                        <a:schemeClr val="tx1"/>
+                      </a:solidFill>
+                      <a:prstDash val="solid"/>
+                      <a:round/>
+                      <a:headEnd type="none" w="med" len="med"/>
+                      <a:tailEnd type="none" w="med" len="med"/>
+                    </a:lnB>
+                  </a:tcPr>
+                </a:tc>
+                <a:tc>
+                  <a:txBody>
+                    <a:bodyPr/>
+                    <a:lstStyle/>
+                    <a:p>
+                      <a:r>
+                        <a:rPr lang="es-MX" dirty="0"/>
+                        <a:t>No aplica (Java/C sin </a:t>
+                      </a:r>
+                      <a:r>
+                        <a:rPr lang="es-MX" dirty="0">
+                          <a:solidFill>
+                            <a:srgbClr val="C00000"/>
+                          </a:solidFill>
+                        </a:rPr>
+                        <a:t>**</a:t>
+                      </a:r>
+                      <a:r>
+                        <a:rPr lang="es-MX" dirty="0"/>
+                        <a:t>); en JS si aplica, también </a:t>
+                      </a:r>
+                      <a:r>
+                        <a:rPr lang="es-MX" b="1" dirty="0"/>
+                        <a:t>D→I</a:t>
+                      </a:r>
+                    </a:p>
+                  </a:txBody>
+                  <a:tcPr anchor="ctr">
+                    <a:lnL w="12700" cap="flat" cmpd="sng" algn="ctr">
+                      <a:solidFill>
+                        <a:schemeClr val="tx1"/>
+                      </a:solidFill>
+                      <a:prstDash val="solid"/>
+                      <a:round/>
+                      <a:headEnd type="none" w="med" len="med"/>
+                      <a:tailEnd type="none" w="med" len="med"/>
+                    </a:lnL>
+                    <a:lnR w="12700" cap="flat" cmpd="sng" algn="ctr">
+                      <a:solidFill>
+                        <a:schemeClr val="tx1"/>
+                      </a:solidFill>
+                      <a:prstDash val="solid"/>
+                      <a:round/>
+                      <a:headEnd type="none" w="med" len="med"/>
+                      <a:tailEnd type="none" w="med" len="med"/>
+                    </a:lnR>
+                    <a:lnT w="12700" cap="flat" cmpd="sng" algn="ctr">
+                      <a:solidFill>
+                        <a:schemeClr val="tx1"/>
+                      </a:solidFill>
+                      <a:prstDash val="solid"/>
+                      <a:round/>
+                      <a:headEnd type="none" w="med" len="med"/>
+                      <a:tailEnd type="none" w="med" len="med"/>
+                    </a:lnT>
+                    <a:lnB w="12700" cap="flat" cmpd="sng" algn="ctr">
+                      <a:solidFill>
+                        <a:schemeClr val="tx1"/>
+                      </a:solidFill>
+                      <a:prstDash val="solid"/>
+                      <a:round/>
+                      <a:headEnd type="none" w="med" len="med"/>
+                      <a:tailEnd type="none" w="med" len="med"/>
+                    </a:lnB>
+                  </a:tcPr>
+                </a:tc>
+                <a:extLst>
+                  <a:ext uri="{0D108BD9-81ED-4DB2-BD59-A6C34878D82A}">
+                    <a16:rowId xmlns:a16="http://schemas.microsoft.com/office/drawing/2014/main" val="238587059"/>
+                  </a:ext>
+                </a:extLst>
+              </a:tr>
+            </a:tbl>
+          </a:graphicData>
+        </a:graphic>
+      </p:graphicFrame>
+    </p:spTree>
+    <p:extLst>
+      <p:ext uri="{BB962C8B-B14F-4D97-AF65-F5344CB8AC3E}">
+        <p14:creationId xmlns:p14="http://schemas.microsoft.com/office/powerpoint/2010/main" val="845579627"/>
       </p:ext>
     </p:extLst>
   </p:cSld>
@@ -31822,6 +37180,550 @@
     <p:extLst>
       <p:ext uri="{BB962C8B-B14F-4D97-AF65-F5344CB8AC3E}">
         <p14:creationId xmlns:p14="http://schemas.microsoft.com/office/powerpoint/2010/main" val="676691429"/>
+      </p:ext>
+    </p:extLst>
+  </p:cSld>
+  <p:clrMapOvr>
+    <a:masterClrMapping/>
+  </p:clrMapOvr>
+</p:sld>
+</file>
+
+<file path=ppt/slides/slide30.xml><?xml version="1.0" encoding="utf-8"?>
+<p:sld xmlns:a="http://schemas.openxmlformats.org/drawingml/2006/main" xmlns:r="http://schemas.openxmlformats.org/officeDocument/2006/relationships" xmlns:p="http://schemas.openxmlformats.org/presentationml/2006/main">
+  <p:cSld>
+    <p:spTree>
+      <p:nvGrpSpPr>
+        <p:cNvPr id="1" name=""/>
+        <p:cNvGrpSpPr/>
+        <p:nvPr/>
+      </p:nvGrpSpPr>
+      <p:grpSpPr>
+        <a:xfrm>
+          <a:off x="0" y="0"/>
+          <a:ext cx="0" cy="0"/>
+          <a:chOff x="0" y="0"/>
+          <a:chExt cx="0" cy="0"/>
+        </a:xfrm>
+      </p:grpSpPr>
+      <p:sp>
+        <p:nvSpPr>
+          <p:cNvPr id="5" name="4 Título"/>
+          <p:cNvSpPr>
+            <a:spLocks noGrp="1"/>
+          </p:cNvSpPr>
+          <p:nvPr>
+            <p:ph type="title"/>
+          </p:nvPr>
+        </p:nvSpPr>
+        <p:spPr>
+          <a:xfrm>
+            <a:off x="179512" y="381574"/>
+            <a:ext cx="8229600" cy="766260"/>
+          </a:xfrm>
+        </p:spPr>
+        <p:txBody>
+          <a:bodyPr>
+            <a:noAutofit/>
+          </a:bodyPr>
+          <a:lstStyle/>
+          <a:p>
+            <a:r>
+              <a:rPr lang="es-MX" sz="2800" dirty="0"/>
+              <a:t>Referencias adicionales — tablas de precedencia por lenguaje</a:t>
+            </a:r>
+            <a:endParaRPr lang="es-CO" sz="2800" dirty="0"/>
+          </a:p>
+        </p:txBody>
+      </p:sp>
+      <p:sp>
+        <p:nvSpPr>
+          <p:cNvPr id="8" name="1 Marcador de contenido"/>
+          <p:cNvSpPr>
+            <a:spLocks noGrp="1"/>
+          </p:cNvSpPr>
+          <p:nvPr>
+            <p:ph idx="1"/>
+          </p:nvPr>
+        </p:nvSpPr>
+        <p:spPr>
+          <a:xfrm>
+            <a:off x="323528" y="1293032"/>
+            <a:ext cx="8496944" cy="4800264"/>
+          </a:xfrm>
+        </p:spPr>
+        <p:txBody>
+          <a:bodyPr>
+            <a:normAutofit/>
+          </a:bodyPr>
+          <a:lstStyle/>
+          <a:p>
+            <a:pPr marL="0" indent="0">
+              <a:buNone/>
+            </a:pPr>
+            <a:r>
+              <a:rPr lang="es-MX" sz="2200" dirty="0"/>
+              <a:t>Dado que cada lenguaje define sus propias reglas de precedencia, consulte la fuente oficial correspondiente ante cualquier duda:</a:t>
+            </a:r>
+          </a:p>
+          <a:p>
+            <a:pPr marL="342900" indent="-342900">
+              <a:buFont typeface="+mj-lt"/>
+              <a:buAutoNum type="arabicPeriod"/>
+            </a:pPr>
+            <a:r>
+              <a:rPr lang="es-MX" sz="2000" b="1" dirty="0"/>
+              <a:t>Python — </a:t>
+            </a:r>
+            <a:r>
+              <a:rPr lang="es-MX" sz="2000" b="1" dirty="0" err="1"/>
+              <a:t>Operator</a:t>
+            </a:r>
+            <a:r>
+              <a:rPr lang="es-MX" sz="2000" b="1" dirty="0"/>
+              <a:t> </a:t>
+            </a:r>
+            <a:r>
+              <a:rPr lang="es-MX" sz="2000" b="1" dirty="0" err="1"/>
+              <a:t>precedence</a:t>
+            </a:r>
+            <a:r>
+              <a:rPr lang="es-MX" sz="2000" b="1" dirty="0"/>
+              <a:t> (documentación oficial)</a:t>
+            </a:r>
+            <a:r>
+              <a:rPr lang="es-MX" sz="2000" dirty="0"/>
+              <a:t>: </a:t>
+            </a:r>
+            <a:r>
+              <a:rPr lang="es-MX" sz="2000" dirty="0">
+                <a:hlinkClick r:id="rId2"/>
+              </a:rPr>
+              <a:t>https://docs.python.org/3/reference/expressions.html#operator-precedence</a:t>
+            </a:r>
+            <a:r>
+              <a:rPr lang="es-MX" sz="2000" dirty="0"/>
+              <a:t> </a:t>
+            </a:r>
+          </a:p>
+          <a:p>
+            <a:pPr marL="342900" indent="-342900">
+              <a:buFont typeface="+mj-lt"/>
+              <a:buAutoNum type="arabicPeriod"/>
+            </a:pPr>
+            <a:r>
+              <a:rPr lang="es-MX" sz="2000" b="1" dirty="0"/>
+              <a:t>Java — Java </a:t>
+            </a:r>
+            <a:r>
+              <a:rPr lang="es-MX" sz="2000" b="1" dirty="0" err="1"/>
+              <a:t>Language</a:t>
+            </a:r>
+            <a:r>
+              <a:rPr lang="es-MX" sz="2000" b="1" dirty="0"/>
+              <a:t> </a:t>
+            </a:r>
+            <a:r>
+              <a:rPr lang="es-MX" sz="2000" b="1" dirty="0" err="1"/>
+              <a:t>Specification</a:t>
+            </a:r>
+            <a:r>
+              <a:rPr lang="es-MX" sz="2000" b="1" dirty="0"/>
+              <a:t>, cap. 15 (Oracle)</a:t>
+            </a:r>
+            <a:r>
+              <a:rPr lang="es-MX" sz="2000" dirty="0"/>
+              <a:t>: </a:t>
+            </a:r>
+            <a:r>
+              <a:rPr lang="es-MX" sz="2000" dirty="0">
+                <a:hlinkClick r:id="rId3"/>
+              </a:rPr>
+              <a:t>https://docs.oracle.com/javase/specs/jls/se21/html/jls-15.html</a:t>
+            </a:r>
+            <a:r>
+              <a:rPr lang="es-MX" sz="2000" dirty="0"/>
+              <a:t> </a:t>
+            </a:r>
+          </a:p>
+          <a:p>
+            <a:pPr marL="342900" indent="-342900">
+              <a:buFont typeface="+mj-lt"/>
+              <a:buAutoNum type="arabicPeriod"/>
+            </a:pPr>
+            <a:r>
+              <a:rPr lang="es-MX" sz="2000" b="1" dirty="0"/>
+              <a:t>C — </a:t>
+            </a:r>
+            <a:r>
+              <a:rPr lang="es-MX" sz="2000" b="1" dirty="0" err="1"/>
+              <a:t>Operator</a:t>
+            </a:r>
+            <a:r>
+              <a:rPr lang="es-MX" sz="2000" b="1" dirty="0"/>
+              <a:t> </a:t>
+            </a:r>
+            <a:r>
+              <a:rPr lang="es-MX" sz="2000" b="1" dirty="0" err="1"/>
+              <a:t>precedence</a:t>
+            </a:r>
+            <a:r>
+              <a:rPr lang="es-MX" sz="2000" b="1" dirty="0"/>
+              <a:t> (</a:t>
+            </a:r>
+            <a:r>
+              <a:rPr lang="es-MX" sz="2000" b="1" dirty="0" err="1"/>
+              <a:t>cppreference</a:t>
+            </a:r>
+            <a:r>
+              <a:rPr lang="es-MX" sz="2000" b="1" dirty="0"/>
+              <a:t>)</a:t>
+            </a:r>
+            <a:r>
+              <a:rPr lang="es-MX" sz="2000" dirty="0"/>
+              <a:t>: </a:t>
+            </a:r>
+            <a:r>
+              <a:rPr lang="es-MX" sz="2000" dirty="0">
+                <a:hlinkClick r:id="rId4"/>
+              </a:rPr>
+              <a:t>https://en.cppreference.com/w/c/language/operator_precedence</a:t>
+            </a:r>
+            <a:r>
+              <a:rPr lang="es-MX" sz="2000" dirty="0"/>
+              <a:t> </a:t>
+            </a:r>
+          </a:p>
+          <a:p>
+            <a:pPr marL="342900" indent="-342900">
+              <a:buFont typeface="+mj-lt"/>
+              <a:buAutoNum type="arabicPeriod"/>
+            </a:pPr>
+            <a:r>
+              <a:rPr lang="es-MX" sz="2000" b="1" dirty="0"/>
+              <a:t>JavaScript — </a:t>
+            </a:r>
+            <a:r>
+              <a:rPr lang="es-MX" sz="2000" b="1" dirty="0" err="1"/>
+              <a:t>Operator</a:t>
+            </a:r>
+            <a:r>
+              <a:rPr lang="es-MX" sz="2000" b="1" dirty="0"/>
+              <a:t> </a:t>
+            </a:r>
+            <a:r>
+              <a:rPr lang="es-MX" sz="2000" b="1" dirty="0" err="1"/>
+              <a:t>precedence</a:t>
+            </a:r>
+            <a:r>
+              <a:rPr lang="es-MX" sz="2000" b="1" dirty="0"/>
+              <a:t> (MDN)</a:t>
+            </a:r>
+            <a:r>
+              <a:rPr lang="es-MX" sz="2000" dirty="0"/>
+              <a:t>: </a:t>
+            </a:r>
+            <a:r>
+              <a:rPr lang="es-MX" sz="2000" dirty="0">
+                <a:hlinkClick r:id="rId5"/>
+              </a:rPr>
+              <a:t>https://developer.mozilla.org/en-US/docs/Web/JavaScript/Reference/Operators/Operator_precedence</a:t>
+            </a:r>
+            <a:r>
+              <a:rPr lang="es-MX" sz="2000" dirty="0"/>
+              <a:t> </a:t>
+            </a:r>
+            <a:endParaRPr lang="es-MX" sz="2400" dirty="0"/>
+          </a:p>
+          <a:p>
+            <a:endParaRPr lang="es-MX" sz="2000" dirty="0"/>
+          </a:p>
+          <a:p>
+            <a:endParaRPr lang="es-MX" sz="2000" dirty="0"/>
+          </a:p>
+          <a:p>
+            <a:endParaRPr lang="es-MX" sz="2000" dirty="0"/>
+          </a:p>
+          <a:p>
+            <a:endParaRPr lang="es-MX" sz="2000" dirty="0"/>
+          </a:p>
+          <a:p>
+            <a:endParaRPr lang="es-MX" sz="2000" dirty="0"/>
+          </a:p>
+          <a:p>
+            <a:endParaRPr lang="es-MX" sz="2000" dirty="0"/>
+          </a:p>
+          <a:p>
+            <a:endParaRPr lang="es-MX" sz="1600" dirty="0"/>
+          </a:p>
+          <a:p>
+            <a:endParaRPr lang="es-MX" sz="2000" dirty="0"/>
+          </a:p>
+          <a:p>
+            <a:endParaRPr lang="es-MX" sz="2000" dirty="0"/>
+          </a:p>
+          <a:p>
+            <a:endParaRPr lang="es-MX" sz="2000" dirty="0"/>
+          </a:p>
+          <a:p>
+            <a:endParaRPr lang="es-MX" sz="2000" dirty="0"/>
+          </a:p>
+        </p:txBody>
+      </p:sp>
+    </p:spTree>
+    <p:extLst>
+      <p:ext uri="{BB962C8B-B14F-4D97-AF65-F5344CB8AC3E}">
+        <p14:creationId xmlns:p14="http://schemas.microsoft.com/office/powerpoint/2010/main" val="1092726556"/>
+      </p:ext>
+    </p:extLst>
+  </p:cSld>
+  <p:clrMapOvr>
+    <a:masterClrMapping/>
+  </p:clrMapOvr>
+</p:sld>
+</file>
+
+<file path=ppt/slides/slide31.xml><?xml version="1.0" encoding="utf-8"?>
+<p:sld xmlns:a="http://schemas.openxmlformats.org/drawingml/2006/main" xmlns:r="http://schemas.openxmlformats.org/officeDocument/2006/relationships" xmlns:p="http://schemas.openxmlformats.org/presentationml/2006/main">
+  <p:cSld>
+    <p:spTree>
+      <p:nvGrpSpPr>
+        <p:cNvPr id="1" name=""/>
+        <p:cNvGrpSpPr/>
+        <p:nvPr/>
+      </p:nvGrpSpPr>
+      <p:grpSpPr>
+        <a:xfrm>
+          <a:off x="0" y="0"/>
+          <a:ext cx="0" cy="0"/>
+          <a:chOff x="0" y="0"/>
+          <a:chExt cx="0" cy="0"/>
+        </a:xfrm>
+      </p:grpSpPr>
+      <p:sp>
+        <p:nvSpPr>
+          <p:cNvPr id="5" name="Title 4"/>
+          <p:cNvSpPr>
+            <a:spLocks noGrp="1"/>
+          </p:cNvSpPr>
+          <p:nvPr>
+            <p:ph type="title"/>
+          </p:nvPr>
+        </p:nvSpPr>
+        <p:spPr>
+          <a:xfrm>
+            <a:off x="107504" y="23817"/>
+            <a:ext cx="7886700" cy="740887"/>
+          </a:xfrm>
+        </p:spPr>
+        <p:txBody>
+          <a:bodyPr/>
+          <a:lstStyle/>
+          <a:p>
+            <a:r>
+              <a:rPr lang="en-US" sz="2800" dirty="0"/>
+              <a:t>Referencias</a:t>
+            </a:r>
+          </a:p>
+        </p:txBody>
+      </p:sp>
+      <p:sp>
+        <p:nvSpPr>
+          <p:cNvPr id="2" name="Content Placeholder 1"/>
+          <p:cNvSpPr>
+            <a:spLocks noGrp="1"/>
+          </p:cNvSpPr>
+          <p:nvPr>
+            <p:ph idx="1"/>
+          </p:nvPr>
+        </p:nvSpPr>
+        <p:spPr>
+          <a:xfrm>
+            <a:off x="251520" y="764704"/>
+            <a:ext cx="8424936" cy="2880320"/>
+          </a:xfrm>
+        </p:spPr>
+        <p:txBody>
+          <a:bodyPr>
+            <a:normAutofit/>
+          </a:bodyPr>
+          <a:lstStyle/>
+          <a:p>
+            <a:pPr marL="457200" indent="-457200">
+              <a:buFont typeface="+mj-lt"/>
+              <a:buAutoNum type="arabicPeriod"/>
+            </a:pPr>
+            <a:r>
+              <a:rPr lang="es-CO" sz="2000" dirty="0">
+                <a:hlinkClick r:id="rId2"/>
+              </a:rPr>
+              <a:t>https://ellibrodepython.com/</a:t>
+            </a:r>
+            <a:endParaRPr lang="es-CO" sz="2000" dirty="0"/>
+          </a:p>
+          <a:p>
+            <a:pPr marL="457200" indent="-457200">
+              <a:buFont typeface="+mj-lt"/>
+              <a:buAutoNum type="arabicPeriod"/>
+            </a:pPr>
+            <a:r>
+              <a:rPr lang="es-CO" sz="2000" dirty="0">
+                <a:hlinkClick r:id="rId3"/>
+              </a:rPr>
+              <a:t>https://www.w3resource.com/index.php</a:t>
+            </a:r>
+            <a:endParaRPr lang="es-CO" sz="2000" dirty="0"/>
+          </a:p>
+          <a:p>
+            <a:pPr marL="457200" indent="-457200">
+              <a:buFont typeface="+mj-lt"/>
+              <a:buAutoNum type="arabicPeriod"/>
+            </a:pPr>
+            <a:r>
+              <a:rPr lang="es-CO" sz="2000" dirty="0">
+                <a:hlinkClick r:id="rId4"/>
+              </a:rPr>
+              <a:t>https://realpython.com/</a:t>
+            </a:r>
+            <a:endParaRPr lang="es-CO" sz="2000" dirty="0"/>
+          </a:p>
+          <a:p>
+            <a:pPr marL="457200" indent="-457200">
+              <a:buFont typeface="+mj-lt"/>
+              <a:buAutoNum type="arabicPeriod"/>
+            </a:pPr>
+            <a:r>
+              <a:rPr lang="es-CO" sz="2000" dirty="0">
+                <a:hlinkClick r:id="rId5"/>
+              </a:rPr>
+              <a:t>https://curriculumresources.edu.gh/wp-content/uploads/2025/01/</a:t>
+            </a:r>
+            <a:endParaRPr lang="es-CO" sz="2000" dirty="0"/>
+          </a:p>
+          <a:p>
+            <a:pPr marL="457200" indent="-457200">
+              <a:buFont typeface="+mj-lt"/>
+              <a:buAutoNum type="arabicPeriod"/>
+            </a:pPr>
+            <a:r>
+              <a:rPr lang="es-CO" sz="2000" dirty="0">
+                <a:hlinkClick r:id="rId6"/>
+              </a:rPr>
+              <a:t>https://python-course.eu/</a:t>
+            </a:r>
+            <a:endParaRPr lang="es-CO" sz="2000" dirty="0"/>
+          </a:p>
+          <a:p>
+            <a:pPr marL="457200" indent="-457200">
+              <a:buFont typeface="+mj-lt"/>
+              <a:buAutoNum type="arabicPeriod"/>
+            </a:pPr>
+            <a:r>
+              <a:rPr lang="es-CO" sz="2000" dirty="0">
+                <a:hlinkClick r:id="rId7"/>
+              </a:rPr>
+              <a:t>https://realpython.com/cheatsheets/python/</a:t>
+            </a:r>
+            <a:r>
+              <a:rPr lang="es-CO" sz="2000" dirty="0"/>
+              <a:t>    </a:t>
+            </a:r>
+            <a:endParaRPr lang="en-US" sz="2000" dirty="0"/>
+          </a:p>
+        </p:txBody>
+      </p:sp>
+    </p:spTree>
+    <p:extLst>
+      <p:ext uri="{BB962C8B-B14F-4D97-AF65-F5344CB8AC3E}">
+        <p14:creationId xmlns:p14="http://schemas.microsoft.com/office/powerpoint/2010/main" val="1023164851"/>
+      </p:ext>
+    </p:extLst>
+  </p:cSld>
+  <p:clrMapOvr>
+    <a:masterClrMapping/>
+  </p:clrMapOvr>
+</p:sld>
+</file>
+
+<file path=ppt/slides/slide32.xml><?xml version="1.0" encoding="utf-8"?>
+<p:sld xmlns:a="http://schemas.openxmlformats.org/drawingml/2006/main" xmlns:r="http://schemas.openxmlformats.org/officeDocument/2006/relationships" xmlns:p="http://schemas.openxmlformats.org/presentationml/2006/main">
+  <p:cSld>
+    <p:spTree>
+      <p:nvGrpSpPr>
+        <p:cNvPr id="1" name=""/>
+        <p:cNvGrpSpPr/>
+        <p:nvPr/>
+      </p:nvGrpSpPr>
+      <p:grpSpPr>
+        <a:xfrm>
+          <a:off x="0" y="0"/>
+          <a:ext cx="0" cy="0"/>
+          <a:chOff x="0" y="0"/>
+          <a:chExt cx="0" cy="0"/>
+        </a:xfrm>
+      </p:grpSpPr>
+      <p:sp>
+        <p:nvSpPr>
+          <p:cNvPr id="2" name="Title 1"/>
+          <p:cNvSpPr>
+            <a:spLocks noGrp="1"/>
+          </p:cNvSpPr>
+          <p:nvPr>
+            <p:ph type="title"/>
+          </p:nvPr>
+        </p:nvSpPr>
+        <p:spPr>
+          <a:xfrm>
+            <a:off x="628650" y="180616"/>
+            <a:ext cx="7886700" cy="1325563"/>
+          </a:xfrm>
+        </p:spPr>
+        <p:txBody>
+          <a:bodyPr/>
+          <a:lstStyle/>
+          <a:p>
+            <a:r>
+              <a:rPr lang="es-CO" dirty="0"/>
+              <a:t>Eso es todo amigos</a:t>
+            </a:r>
+            <a:endParaRPr lang="en-US" dirty="0"/>
+          </a:p>
+        </p:txBody>
+      </p:sp>
+      <p:pic>
+        <p:nvPicPr>
+          <p:cNvPr id="6" name="Imagen 5">
+            <a:extLst>
+              <a:ext uri="{FF2B5EF4-FFF2-40B4-BE49-F238E27FC236}">
+                <a16:creationId xmlns:a16="http://schemas.microsoft.com/office/drawing/2014/main" id="{EA8C0E6F-D570-4291-9CDE-573064DF74AF}"/>
+              </a:ext>
+            </a:extLst>
+          </p:cNvPr>
+          <p:cNvPicPr>
+            <a:picLocks noChangeAspect="1"/>
+          </p:cNvPicPr>
+          <p:nvPr/>
+        </p:nvPicPr>
+        <p:blipFill>
+          <a:blip r:embed="rId2"/>
+          <a:stretch>
+            <a:fillRect/>
+          </a:stretch>
+        </p:blipFill>
+        <p:spPr>
+          <a:xfrm>
+            <a:off x="530942" y="1196752"/>
+            <a:ext cx="8287104" cy="5219904"/>
+          </a:xfrm>
+          <a:prstGeom prst="rect">
+            <a:avLst/>
+          </a:prstGeom>
+        </p:spPr>
+      </p:pic>
+    </p:spTree>
+    <p:extLst>
+      <p:ext uri="{BB962C8B-B14F-4D97-AF65-F5344CB8AC3E}">
+        <p14:creationId xmlns:p14="http://schemas.microsoft.com/office/powerpoint/2010/main" val="3024962735"/>
       </p:ext>
     </p:extLst>
   </p:cSld>
@@ -35687,7 +41589,7 @@
         <p:spPr>
           <a:xfrm>
             <a:off x="3516894" y="5853784"/>
-            <a:ext cx="2178802" cy="369332"/>
+            <a:ext cx="2811988" cy="369332"/>
           </a:xfrm>
           <a:prstGeom prst="rect">
             <a:avLst/>
@@ -35709,10 +41611,28 @@
               <a:t>Lógicos: </a:t>
             </a:r>
             <a:r>
+              <a:rPr lang="es-CO" dirty="0" err="1">
+                <a:latin typeface="Consolas" panose="020B0609020204030204" pitchFamily="49" charset="0"/>
+              </a:rPr>
+              <a:t>not</a:t>
+            </a:r>
+            <a:r>
               <a:rPr lang="es-CO" dirty="0">
                 <a:latin typeface="Consolas" panose="020B0609020204030204" pitchFamily="49" charset="0"/>
               </a:rPr>
-              <a:t>~, &amp;, | </a:t>
+              <a:t>, and, </a:t>
+            </a:r>
+            <a:r>
+              <a:rPr lang="es-CO" dirty="0" err="1">
+                <a:latin typeface="Consolas" panose="020B0609020204030204" pitchFamily="49" charset="0"/>
+              </a:rPr>
+              <a:t>or</a:t>
+            </a:r>
+            <a:r>
+              <a:rPr lang="es-CO" dirty="0">
+                <a:latin typeface="Consolas" panose="020B0609020204030204" pitchFamily="49" charset="0"/>
+              </a:rPr>
+              <a:t> </a:t>
             </a:r>
             <a:endParaRPr lang="es-CO" dirty="0">
               <a:solidFill>

--- a/clases/4/teoria/clase-04.pptx
+++ b/clases/4/teoria/clase-04.pptx
@@ -3659,7 +3659,7 @@
           <a:p>
             <a:fld id="{30943A3E-55B9-4706-BA6E-9364B5247742}" type="datetimeFigureOut">
               <a:rPr lang="es-CO" smtClean="0"/>
-              <a:t>17/08/2026</a:t>
+              <a:t>21/08/2026</a:t>
             </a:fld>
             <a:endParaRPr lang="es-CO"/>
           </a:p>
@@ -4229,7 +4229,7 @@
           <a:p>
             <a:fld id="{78FAE389-1891-4C1C-AE7B-96446A92669F}" type="datetime1">
               <a:rPr lang="es-CO" smtClean="0"/>
-              <a:t>17/08/2026</a:t>
+              <a:t>21/08/2026</a:t>
             </a:fld>
             <a:endParaRPr lang="es-CO" dirty="0"/>
           </a:p>
@@ -4401,7 +4401,7 @@
           <a:p>
             <a:fld id="{169921E5-6957-4C84-BD80-156D13F58C59}" type="datetime1">
               <a:rPr lang="es-CO" smtClean="0"/>
-              <a:t>17/08/2026</a:t>
+              <a:t>21/08/2026</a:t>
             </a:fld>
             <a:endParaRPr lang="es-CO"/>
           </a:p>
@@ -4581,7 +4581,7 @@
           <a:p>
             <a:fld id="{A7BB61D7-E979-4A0B-B106-A9203ABD6AA5}" type="datetime1">
               <a:rPr lang="es-CO" smtClean="0"/>
-              <a:t>17/08/2026</a:t>
+              <a:t>21/08/2026</a:t>
             </a:fld>
             <a:endParaRPr lang="es-CO"/>
           </a:p>
@@ -4751,7 +4751,7 @@
           <a:p>
             <a:fld id="{BC197211-2E02-4E34-9D1C-742DBBA2E713}" type="datetime1">
               <a:rPr lang="es-CO" smtClean="0"/>
-              <a:t>17/08/2026</a:t>
+              <a:t>21/08/2026</a:t>
             </a:fld>
             <a:endParaRPr lang="es-CO"/>
           </a:p>
@@ -4921,7 +4921,7 @@
           <a:p>
             <a:fld id="{BC197211-2E02-4E34-9D1C-742DBBA2E713}" type="datetime1">
               <a:rPr lang="es-CO" smtClean="0"/>
-              <a:t>17/08/2026</a:t>
+              <a:t>21/08/2026</a:t>
             </a:fld>
             <a:endParaRPr lang="es-CO"/>
           </a:p>
@@ -5165,7 +5165,7 @@
           <a:p>
             <a:fld id="{F84A16AA-8F92-4F8D-9FF5-AE4F5F025475}" type="datetime1">
               <a:rPr lang="es-CO" smtClean="0"/>
-              <a:t>17/08/2026</a:t>
+              <a:t>21/08/2026</a:t>
             </a:fld>
             <a:endParaRPr lang="es-CO"/>
           </a:p>
@@ -5397,7 +5397,7 @@
           <a:p>
             <a:fld id="{58A2889A-C4A3-4C6C-A514-E9566A95FF0B}" type="datetime1">
               <a:rPr lang="es-CO" smtClean="0"/>
-              <a:t>17/08/2026</a:t>
+              <a:t>21/08/2026</a:t>
             </a:fld>
             <a:endParaRPr lang="es-CO"/>
           </a:p>
@@ -5764,7 +5764,7 @@
           <a:p>
             <a:fld id="{CFC549B8-F78E-4015-8DD3-99AC842EEF5C}" type="datetime1">
               <a:rPr lang="es-CO" smtClean="0"/>
-              <a:t>17/08/2026</a:t>
+              <a:t>21/08/2026</a:t>
             </a:fld>
             <a:endParaRPr lang="es-CO"/>
           </a:p>
@@ -5882,7 +5882,7 @@
           <a:p>
             <a:fld id="{78FAE389-1891-4C1C-AE7B-96446A92669F}" type="datetime1">
               <a:rPr lang="es-CO" smtClean="0"/>
-              <a:t>17/08/2026</a:t>
+              <a:t>21/08/2026</a:t>
             </a:fld>
             <a:endParaRPr lang="es-CO" dirty="0"/>
           </a:p>
@@ -5979,7 +5979,7 @@
           <a:p>
             <a:fld id="{C2375FDE-4F9B-4FF4-9D4F-6D3ED15F62CE}" type="datetime1">
               <a:rPr lang="es-CO" smtClean="0"/>
-              <a:t>17/08/2026</a:t>
+              <a:t>21/08/2026</a:t>
             </a:fld>
             <a:endParaRPr lang="es-CO"/>
           </a:p>
@@ -6256,7 +6256,7 @@
           <a:p>
             <a:fld id="{7AF392FA-6414-43D4-857F-1D16849F2AFB}" type="datetime1">
               <a:rPr lang="es-CO" smtClean="0"/>
-              <a:t>17/08/2026</a:t>
+              <a:t>21/08/2026</a:t>
             </a:fld>
             <a:endParaRPr lang="es-CO"/>
           </a:p>
@@ -6513,7 +6513,7 @@
           <a:p>
             <a:fld id="{E2F1ADB1-43E6-4CC5-8BA6-A3F5A7E6EF55}" type="datetime1">
               <a:rPr lang="es-CO" smtClean="0"/>
-              <a:t>17/08/2026</a:t>
+              <a:t>21/08/2026</a:t>
             </a:fld>
             <a:endParaRPr lang="es-CO"/>
           </a:p>
@@ -6726,7 +6726,7 @@
           <a:p>
             <a:fld id="{78FAE389-1891-4C1C-AE7B-96446A92669F}" type="datetime1">
               <a:rPr lang="es-CO" smtClean="0"/>
-              <a:t>17/08/2026</a:t>
+              <a:t>21/08/2026</a:t>
             </a:fld>
             <a:endParaRPr lang="es-CO" dirty="0"/>
           </a:p>
@@ -9941,8 +9941,8 @@
             <a:chExt cx="2004395" cy="1200329"/>
           </a:xfrm>
         </p:grpSpPr>
-        <mc:AlternateContent xmlns:mc="http://schemas.openxmlformats.org/markup-compatibility/2006">
-          <mc:Choice xmlns:a14="http://schemas.microsoft.com/office/drawing/2010/main" Requires="a14">
+        <mc:AlternateContent xmlns:mc="http://schemas.openxmlformats.org/markup-compatibility/2006" xmlns:a14="http://schemas.microsoft.com/office/drawing/2010/main">
+          <mc:Choice Requires="a14">
             <p:sp>
               <p:nvSpPr>
                 <p:cNvPr id="3" name="2 CuadroTexto"/>
@@ -10093,7 +10093,7 @@
               </p:txBody>
             </p:sp>
           </mc:Choice>
-          <mc:Fallback>
+          <mc:Fallback xmlns="">
             <p:sp>
               <p:nvSpPr>
                 <p:cNvPr id="3" name="2 CuadroTexto"/>
@@ -14112,8 +14112,8 @@
           </a:p>
         </p:txBody>
       </p:sp>
-      <mc:AlternateContent xmlns:mc="http://schemas.openxmlformats.org/markup-compatibility/2006">
-        <mc:Choice xmlns:a14="http://schemas.microsoft.com/office/drawing/2010/main" Requires="a14">
+      <mc:AlternateContent xmlns:mc="http://schemas.openxmlformats.org/markup-compatibility/2006" xmlns:a14="http://schemas.microsoft.com/office/drawing/2010/main">
+        <mc:Choice Requires="a14">
           <p:graphicFrame>
             <p:nvGraphicFramePr>
               <p:cNvPr id="7" name="6 Tabla"/>
@@ -15495,7 +15495,7 @@
             </a:graphic>
           </p:graphicFrame>
         </mc:Choice>
-        <mc:Fallback>
+        <mc:Fallback xmlns="">
           <p:graphicFrame>
             <p:nvGraphicFramePr>
               <p:cNvPr id="7" name="6 Tabla"/>
@@ -21323,7 +21323,7 @@
           <p:nvPr>
             <p:extLst>
               <p:ext uri="{D42A27DB-BD31-4B8C-83A1-F6EECF244321}">
-                <p14:modId xmlns:p14="http://schemas.microsoft.com/office/powerpoint/2010/main" val="1255463270"/>
+                <p14:modId xmlns:p14="http://schemas.microsoft.com/office/powerpoint/2010/main" val="721612873"/>
               </p:ext>
             </p:extLst>
           </p:nvPr>
@@ -21768,12 +21768,28 @@
                     <a:bodyPr/>
                     <a:lstStyle/>
                     <a:p>
-                      <a:pPr algn="ctr"/>
+                      <a:pPr marL="0" marR="0" lvl="0" indent="0" algn="ctr" defTabSz="914400" rtl="0" eaLnBrk="1" fontAlgn="auto" latinLnBrk="0" hangingPunct="1">
+                        <a:lnSpc>
+                          <a:spcPct val="100000"/>
+                        </a:lnSpc>
+                        <a:spcBef>
+                          <a:spcPts val="0"/>
+                        </a:spcBef>
+                        <a:spcAft>
+                          <a:spcPts val="0"/>
+                        </a:spcAft>
+                        <a:buClrTx/>
+                        <a:buSzTx/>
+                        <a:buFontTx/>
+                        <a:buNone/>
+                        <a:tabLst/>
+                        <a:defRPr/>
+                      </a:pPr>
                       <a:r>
                         <a:rPr lang="es-CO" sz="1600" dirty="0">
                           <a:latin typeface="Consolas" panose="020B0609020204030204" pitchFamily="49" charset="0"/>
                         </a:rPr>
-                        <a:t>+ (unitario), - (unitario), not</a:t>
+                        <a:t>**</a:t>
                       </a:r>
                     </a:p>
                   </a:txBody>
@@ -21826,20 +21842,7 @@
                         <a:rPr lang="es-CO" sz="1600" dirty="0">
                           <a:latin typeface="Consolas" panose="020B0609020204030204" pitchFamily="49" charset="0"/>
                         </a:rPr>
-                        <a:t>(+,-) </a:t>
-                      </a:r>
-                      <a:r>
-                        <a:rPr lang="es-CO" sz="1600" dirty="0">
-                          <a:latin typeface="Consolas" panose="020B0609020204030204" pitchFamily="49" charset="0"/>
-                          <a:sym typeface="Wingdings" panose="05000000000000000000" pitchFamily="2" charset="2"/>
-                        </a:rPr>
-                        <a:t> </a:t>
-                      </a:r>
-                      <a:r>
-                        <a:rPr lang="es-CO" sz="1600" dirty="0">
-                          <a:latin typeface="Consolas" panose="020B0609020204030204" pitchFamily="49" charset="0"/>
-                        </a:rPr>
-                        <a:t>-----, not D </a:t>
+                        <a:t>D </a:t>
                       </a:r>
                       <a:r>
                         <a:rPr lang="es-CO" sz="1600" dirty="0">
@@ -21848,9 +21851,6 @@
                         </a:rPr>
                         <a:t> I</a:t>
                       </a:r>
-                      <a:endParaRPr lang="es-CO" sz="1600" dirty="0">
-                        <a:latin typeface="Consolas" panose="020B0609020204030204" pitchFamily="49" charset="0"/>
-                      </a:endParaRPr>
                     </a:p>
                   </a:txBody>
                   <a:tcPr>
@@ -21973,12 +21973,28 @@
                     <a:bodyPr/>
                     <a:lstStyle/>
                     <a:p>
-                      <a:pPr algn="ctr"/>
+                      <a:pPr marL="0" marR="0" lvl="0" indent="0" algn="ctr" defTabSz="914400" rtl="0" eaLnBrk="1" fontAlgn="auto" latinLnBrk="0" hangingPunct="1">
+                        <a:lnSpc>
+                          <a:spcPct val="100000"/>
+                        </a:lnSpc>
+                        <a:spcBef>
+                          <a:spcPts val="0"/>
+                        </a:spcBef>
+                        <a:spcAft>
+                          <a:spcPts val="0"/>
+                        </a:spcAft>
+                        <a:buClrTx/>
+                        <a:buSzTx/>
+                        <a:buFontTx/>
+                        <a:buNone/>
+                        <a:tabLst/>
+                        <a:defRPr/>
+                      </a:pPr>
                       <a:r>
                         <a:rPr lang="es-CO" sz="1600" dirty="0">
                           <a:latin typeface="Consolas" panose="020B0609020204030204" pitchFamily="49" charset="0"/>
                         </a:rPr>
-                        <a:t>**</a:t>
+                        <a:t>+ (unitario), - (unitario)</a:t>
                       </a:r>
                     </a:p>
                   </a:txBody>
@@ -22040,9 +22056,6 @@
                         </a:rPr>
                         <a:t> I</a:t>
                       </a:r>
-                      <a:endParaRPr lang="es-CO" sz="1600" dirty="0">
-                        <a:latin typeface="Consolas" panose="020B0609020204030204" pitchFamily="49" charset="0"/>
-                      </a:endParaRPr>
                     </a:p>
                   </a:txBody>
                   <a:tcPr>
@@ -22345,7 +22358,7 @@
                         <a:rPr lang="es-CO" sz="1600" dirty="0">
                           <a:latin typeface="Consolas" panose="020B0609020204030204" pitchFamily="49" charset="0"/>
                         </a:rPr>
-                        <a:t>+, -</a:t>
+                        <a:t>+, - (binarios)</a:t>
                       </a:r>
                     </a:p>
                   </a:txBody>
@@ -22538,60 +22551,7 @@
                     <a:bodyPr/>
                     <a:lstStyle/>
                     <a:p>
-                      <a:pPr algn="ctr"/>
-                      <a:r>
-                        <a:rPr lang="es-CO" sz="1600" dirty="0">
-                          <a:latin typeface="Consolas" panose="020B0609020204030204" pitchFamily="49" charset="0"/>
-                        </a:rPr>
-                        <a:t>&gt;, &gt;=, &lt;, &lt;=</a:t>
-                      </a:r>
-                    </a:p>
-                  </a:txBody>
-                  <a:tcPr>
-                    <a:lnL w="12700" cap="flat" cmpd="sng" algn="ctr">
-                      <a:solidFill>
-                        <a:schemeClr val="tx1"/>
-                      </a:solidFill>
-                      <a:prstDash val="solid"/>
-                      <a:round/>
-                      <a:headEnd type="none" w="med" len="med"/>
-                      <a:tailEnd type="none" w="med" len="med"/>
-                    </a:lnL>
-                    <a:lnR w="12700" cap="flat" cmpd="sng" algn="ctr">
-                      <a:solidFill>
-                        <a:schemeClr val="tx1"/>
-                      </a:solidFill>
-                      <a:prstDash val="solid"/>
-                      <a:round/>
-                      <a:headEnd type="none" w="med" len="med"/>
-                      <a:tailEnd type="none" w="med" len="med"/>
-                    </a:lnR>
-                    <a:lnT w="12700" cap="flat" cmpd="sng" algn="ctr">
-                      <a:solidFill>
-                        <a:schemeClr val="tx1"/>
-                      </a:solidFill>
-                      <a:prstDash val="solid"/>
-                      <a:round/>
-                      <a:headEnd type="none" w="med" len="med"/>
-                      <a:tailEnd type="none" w="med" len="med"/>
-                    </a:lnT>
-                    <a:lnB w="12700" cap="flat" cmpd="sng" algn="ctr">
-                      <a:solidFill>
-                        <a:schemeClr val="tx1"/>
-                      </a:solidFill>
-                      <a:prstDash val="solid"/>
-                      <a:round/>
-                      <a:headEnd type="none" w="med" len="med"/>
-                      <a:tailEnd type="none" w="med" len="med"/>
-                    </a:lnB>
-                  </a:tcPr>
-                </a:tc>
-                <a:tc>
-                  <a:txBody>
-                    <a:bodyPr/>
-                    <a:lstStyle/>
-                    <a:p>
-                      <a:pPr marL="0" marR="0" indent="0" algn="ctr" defTabSz="914400" rtl="0" eaLnBrk="1" fontAlgn="auto" latinLnBrk="0" hangingPunct="1">
+                      <a:pPr marL="0" marR="0" lvl="0" indent="0" algn="ctr" defTabSz="914400" rtl="0" eaLnBrk="1" fontAlgn="auto" latinLnBrk="0" hangingPunct="1">
                         <a:lnSpc>
                           <a:spcPct val="100000"/>
                         </a:lnSpc>
@@ -22612,8 +22572,93 @@
                         <a:rPr lang="es-CO" sz="1600" dirty="0">
                           <a:latin typeface="Consolas" panose="020B0609020204030204" pitchFamily="49" charset="0"/>
                         </a:rPr>
-                        <a:t>----</a:t>
+                        <a:t>&gt;, &gt;=, &lt;, &lt;=, !=, ==</a:t>
                       </a:r>
+                    </a:p>
+                  </a:txBody>
+                  <a:tcPr>
+                    <a:lnL w="12700" cap="flat" cmpd="sng" algn="ctr">
+                      <a:solidFill>
+                        <a:schemeClr val="tx1"/>
+                      </a:solidFill>
+                      <a:prstDash val="solid"/>
+                      <a:round/>
+                      <a:headEnd type="none" w="med" len="med"/>
+                      <a:tailEnd type="none" w="med" len="med"/>
+                    </a:lnL>
+                    <a:lnR w="12700" cap="flat" cmpd="sng" algn="ctr">
+                      <a:solidFill>
+                        <a:schemeClr val="tx1"/>
+                      </a:solidFill>
+                      <a:prstDash val="solid"/>
+                      <a:round/>
+                      <a:headEnd type="none" w="med" len="med"/>
+                      <a:tailEnd type="none" w="med" len="med"/>
+                    </a:lnR>
+                    <a:lnT w="12700" cap="flat" cmpd="sng" algn="ctr">
+                      <a:solidFill>
+                        <a:schemeClr val="tx1"/>
+                      </a:solidFill>
+                      <a:prstDash val="solid"/>
+                      <a:round/>
+                      <a:headEnd type="none" w="med" len="med"/>
+                      <a:tailEnd type="none" w="med" len="med"/>
+                    </a:lnT>
+                    <a:lnB w="12700" cap="flat" cmpd="sng" algn="ctr">
+                      <a:solidFill>
+                        <a:schemeClr val="tx1"/>
+                      </a:solidFill>
+                      <a:prstDash val="solid"/>
+                      <a:round/>
+                      <a:headEnd type="none" w="med" len="med"/>
+                      <a:tailEnd type="none" w="med" len="med"/>
+                    </a:lnB>
+                  </a:tcPr>
+                </a:tc>
+                <a:tc>
+                  <a:txBody>
+                    <a:bodyPr/>
+                    <a:lstStyle/>
+                    <a:p>
+                      <a:pPr marL="0" marR="0" lvl="0" indent="0" algn="ctr" defTabSz="914400" rtl="0" eaLnBrk="1" fontAlgn="auto" latinLnBrk="0" hangingPunct="1">
+                        <a:lnSpc>
+                          <a:spcPct val="100000"/>
+                        </a:lnSpc>
+                        <a:spcBef>
+                          <a:spcPts val="0"/>
+                        </a:spcBef>
+                        <a:spcAft>
+                          <a:spcPts val="0"/>
+                        </a:spcAft>
+                        <a:buClrTx/>
+                        <a:buSzTx/>
+                        <a:buFontTx/>
+                        <a:buNone/>
+                        <a:tabLst/>
+                        <a:defRPr/>
+                      </a:pPr>
+                      <a:r>
+                        <a:rPr lang="es-CO" sz="1600" dirty="0">
+                          <a:latin typeface="Consolas" panose="020B0609020204030204" pitchFamily="49" charset="0"/>
+                        </a:rPr>
+                        <a:t>I</a:t>
+                      </a:r>
+                      <a:r>
+                        <a:rPr lang="es-CO" sz="1600" baseline="0" dirty="0">
+                          <a:latin typeface="Consolas" panose="020B0609020204030204" pitchFamily="49" charset="0"/>
+                        </a:rPr>
+                        <a:t> </a:t>
+                      </a:r>
+                      <a:r>
+                        <a:rPr lang="es-CO" sz="1600" baseline="0" dirty="0">
+                          <a:latin typeface="Consolas" panose="020B0609020204030204" pitchFamily="49" charset="0"/>
+                          <a:sym typeface="Wingdings" panose="05000000000000000000" pitchFamily="2" charset="2"/>
+                        </a:rPr>
+                        <a:t> D (encadenados)</a:t>
+                      </a:r>
+                      <a:endParaRPr lang="es-CO" sz="1600" dirty="0">
+                        <a:latin typeface="Consolas" panose="020B0609020204030204" pitchFamily="49" charset="0"/>
+                      </a:endParaRPr>
                     </a:p>
                   </a:txBody>
                   <a:tcPr>
@@ -22720,7 +22765,63 @@
                     <a:bodyPr/>
                     <a:lstStyle/>
                     <a:p>
-                      <a:pPr marL="0" marR="0" indent="0" algn="ctr" defTabSz="914400" rtl="0" eaLnBrk="1" fontAlgn="auto" latinLnBrk="0" hangingPunct="1">
+                      <a:pPr algn="ctr"/>
+                      <a:r>
+                        <a:rPr lang="es-CO" sz="1600" dirty="0" err="1">
+                          <a:latin typeface="Consolas" panose="020B0609020204030204" pitchFamily="49" charset="0"/>
+                        </a:rPr>
+                        <a:t>not</a:t>
+                      </a:r>
+                      <a:endParaRPr lang="es-CO" sz="1600" dirty="0">
+                        <a:latin typeface="Consolas" panose="020B0609020204030204" pitchFamily="49" charset="0"/>
+                      </a:endParaRPr>
+                    </a:p>
+                  </a:txBody>
+                  <a:tcPr>
+                    <a:lnL w="12700" cap="flat" cmpd="sng" algn="ctr">
+                      <a:solidFill>
+                        <a:schemeClr val="tx1"/>
+                      </a:solidFill>
+                      <a:prstDash val="solid"/>
+                      <a:round/>
+                      <a:headEnd type="none" w="med" len="med"/>
+                      <a:tailEnd type="none" w="med" len="med"/>
+                    </a:lnL>
+                    <a:lnR w="12700" cap="flat" cmpd="sng" algn="ctr">
+                      <a:solidFill>
+                        <a:schemeClr val="tx1"/>
+                      </a:solidFill>
+                      <a:prstDash val="solid"/>
+                      <a:round/>
+                      <a:headEnd type="none" w="med" len="med"/>
+                      <a:tailEnd type="none" w="med" len="med"/>
+                    </a:lnR>
+                    <a:lnT w="12700" cap="flat" cmpd="sng" algn="ctr">
+                      <a:solidFill>
+                        <a:schemeClr val="tx1"/>
+                      </a:solidFill>
+                      <a:prstDash val="solid"/>
+                      <a:round/>
+                      <a:headEnd type="none" w="med" len="med"/>
+                      <a:tailEnd type="none" w="med" len="med"/>
+                    </a:lnT>
+                    <a:lnB w="12700" cap="flat" cmpd="sng" algn="ctr">
+                      <a:solidFill>
+                        <a:schemeClr val="tx1"/>
+                      </a:solidFill>
+                      <a:prstDash val="solid"/>
+                      <a:round/>
+                      <a:headEnd type="none" w="med" len="med"/>
+                      <a:tailEnd type="none" w="med" len="med"/>
+                    </a:lnB>
+                  </a:tcPr>
+                </a:tc>
+                <a:tc>
+                  <a:txBody>
+                    <a:bodyPr/>
+                    <a:lstStyle/>
+                    <a:p>
+                      <a:pPr marL="0" marR="0" lvl="0" indent="0" algn="ctr" defTabSz="914400" rtl="0" eaLnBrk="1" fontAlgn="auto" latinLnBrk="0" hangingPunct="1">
                         <a:lnSpc>
                           <a:spcPct val="100000"/>
                         </a:lnSpc>
@@ -22741,77 +22842,18 @@
                         <a:rPr lang="es-CO" sz="1600" dirty="0">
                           <a:latin typeface="Consolas" panose="020B0609020204030204" pitchFamily="49" charset="0"/>
                         </a:rPr>
-                        <a:t>!=, ==</a:t>
+                        <a:t>D </a:t>
                       </a:r>
-                    </a:p>
-                  </a:txBody>
-                  <a:tcPr>
-                    <a:lnL w="12700" cap="flat" cmpd="sng" algn="ctr">
-                      <a:solidFill>
-                        <a:schemeClr val="tx1"/>
-                      </a:solidFill>
-                      <a:prstDash val="solid"/>
-                      <a:round/>
-                      <a:headEnd type="none" w="med" len="med"/>
-                      <a:tailEnd type="none" w="med" len="med"/>
-                    </a:lnL>
-                    <a:lnR w="12700" cap="flat" cmpd="sng" algn="ctr">
-                      <a:solidFill>
-                        <a:schemeClr val="tx1"/>
-                      </a:solidFill>
-                      <a:prstDash val="solid"/>
-                      <a:round/>
-                      <a:headEnd type="none" w="med" len="med"/>
-                      <a:tailEnd type="none" w="med" len="med"/>
-                    </a:lnR>
-                    <a:lnT w="12700" cap="flat" cmpd="sng" algn="ctr">
-                      <a:solidFill>
-                        <a:schemeClr val="tx1"/>
-                      </a:solidFill>
-                      <a:prstDash val="solid"/>
-                      <a:round/>
-                      <a:headEnd type="none" w="med" len="med"/>
-                      <a:tailEnd type="none" w="med" len="med"/>
-                    </a:lnT>
-                    <a:lnB w="12700" cap="flat" cmpd="sng" algn="ctr">
-                      <a:solidFill>
-                        <a:schemeClr val="tx1"/>
-                      </a:solidFill>
-                      <a:prstDash val="solid"/>
-                      <a:round/>
-                      <a:headEnd type="none" w="med" len="med"/>
-                      <a:tailEnd type="none" w="med" len="med"/>
-                    </a:lnB>
-                  </a:tcPr>
-                </a:tc>
-                <a:tc>
-                  <a:txBody>
-                    <a:bodyPr/>
-                    <a:lstStyle/>
-                    <a:p>
-                      <a:pPr marL="0" marR="0" indent="0" algn="ctr" defTabSz="914400" rtl="0" eaLnBrk="1" fontAlgn="auto" latinLnBrk="0" hangingPunct="1">
-                        <a:lnSpc>
-                          <a:spcPct val="100000"/>
-                        </a:lnSpc>
-                        <a:spcBef>
-                          <a:spcPts val="0"/>
-                        </a:spcBef>
-                        <a:spcAft>
-                          <a:spcPts val="0"/>
-                        </a:spcAft>
-                        <a:buClrTx/>
-                        <a:buSzTx/>
-                        <a:buFontTx/>
-                        <a:buNone/>
-                        <a:tabLst/>
-                        <a:defRPr/>
-                      </a:pPr>
                       <a:r>
                         <a:rPr lang="es-CO" sz="1600" dirty="0">
                           <a:latin typeface="Consolas" panose="020B0609020204030204" pitchFamily="49" charset="0"/>
+                          <a:sym typeface="Wingdings" panose="05000000000000000000" pitchFamily="2" charset="2"/>
                         </a:rPr>
-                        <a:t>----</a:t>
+                        <a:t> I</a:t>
                       </a:r>
+                      <a:endParaRPr lang="es-CO" sz="1600" dirty="0">
+                        <a:latin typeface="Consolas" panose="020B0609020204030204" pitchFamily="49" charset="0"/>
+                      </a:endParaRPr>
                     </a:p>
                   </a:txBody>
                   <a:tcPr>
@@ -22855,7 +22897,7 @@
                 </a:tc>
                 <a:extLst>
                   <a:ext uri="{0D108BD9-81ED-4DB2-BD59-A6C34878D82A}">
-                    <a16:rowId xmlns:a16="http://schemas.microsoft.com/office/drawing/2014/main" val="10007"/>
+                    <a16:rowId xmlns:a16="http://schemas.microsoft.com/office/drawing/2014/main" val="3761170458"/>
                   </a:ext>
                 </a:extLst>
               </a:tr>
@@ -23386,8 +23428,8 @@
           </a:p>
         </p:txBody>
       </p:sp>
-      <mc:AlternateContent xmlns:mc="http://schemas.openxmlformats.org/markup-compatibility/2006">
-        <mc:Choice xmlns:a14="http://schemas.microsoft.com/office/drawing/2010/main" Requires="a14">
+      <mc:AlternateContent xmlns:mc="http://schemas.openxmlformats.org/markup-compatibility/2006" xmlns:a14="http://schemas.microsoft.com/office/drawing/2010/main">
+        <mc:Choice Requires="a14">
           <p:sp>
             <p:nvSpPr>
               <p:cNvPr id="3" name="2 CuadroTexto"/>
@@ -23600,7 +23642,7 @@
                       <m:dPr>
                         <m:ctrlPr>
                           <a:rPr lang="es-MX" i="1">
-                            <a:latin typeface="Cambria Math"/>
+                            <a:latin typeface="Cambria Math" panose="02040503050406030204" pitchFamily="18" charset="0"/>
                           </a:rPr>
                         </m:ctrlPr>
                       </m:dPr>
@@ -23860,7 +23902,7 @@
             </p:txBody>
           </p:sp>
         </mc:Choice>
-        <mc:Fallback>
+        <mc:Fallback xmlns="">
           <p:sp>
             <p:nvSpPr>
               <p:cNvPr id="3" name="2 CuadroTexto"/>
@@ -25615,8 +25657,8 @@
             <a:chExt cx="2406171" cy="1200329"/>
           </a:xfrm>
         </p:grpSpPr>
-        <mc:AlternateContent xmlns:mc="http://schemas.openxmlformats.org/markup-compatibility/2006">
-          <mc:Choice xmlns:a14="http://schemas.microsoft.com/office/drawing/2010/main" Requires="a14">
+        <mc:AlternateContent xmlns:mc="http://schemas.openxmlformats.org/markup-compatibility/2006" xmlns:a14="http://schemas.microsoft.com/office/drawing/2010/main">
+          <mc:Choice Requires="a14">
             <p:sp>
               <p:nvSpPr>
                 <p:cNvPr id="8" name="7 CuadroTexto"/>
@@ -25849,7 +25891,7 @@
               </p:txBody>
             </p:sp>
           </mc:Choice>
-          <mc:Fallback>
+          <mc:Fallback xmlns="">
             <p:sp>
               <p:nvSpPr>
                 <p:cNvPr id="8" name="7 CuadroTexto"/>
@@ -27153,8 +27195,8 @@
           </a:p>
         </p:txBody>
       </p:sp>
-      <mc:AlternateContent xmlns:mc="http://schemas.openxmlformats.org/markup-compatibility/2006">
-        <mc:Choice xmlns:a14="http://schemas.microsoft.com/office/drawing/2010/main" Requires="a14">
+      <mc:AlternateContent xmlns:mc="http://schemas.openxmlformats.org/markup-compatibility/2006" xmlns:a14="http://schemas.microsoft.com/office/drawing/2010/main">
+        <mc:Choice Requires="a14">
           <p:sp>
             <p:nvSpPr>
               <p:cNvPr id="2" name="Content Placeholder 1"/>
@@ -27751,7 +27793,7 @@
             </p:txBody>
           </p:sp>
         </mc:Choice>
-        <mc:Fallback>
+        <mc:Fallback xmlns="">
           <p:sp>
             <p:nvSpPr>
               <p:cNvPr id="2" name="Content Placeholder 1"/>
@@ -27870,8 +27912,8 @@
           </a:p>
         </p:txBody>
       </p:sp>
-      <mc:AlternateContent xmlns:mc="http://schemas.openxmlformats.org/markup-compatibility/2006">
-        <mc:Choice xmlns:a14="http://schemas.microsoft.com/office/drawing/2010/main" Requires="a14">
+      <mc:AlternateContent xmlns:mc="http://schemas.openxmlformats.org/markup-compatibility/2006" xmlns:a14="http://schemas.microsoft.com/office/drawing/2010/main">
+        <mc:Choice Requires="a14">
           <p:sp>
             <p:nvSpPr>
               <p:cNvPr id="2" name="Content Placeholder 1"/>
@@ -28198,7 +28240,7 @@
             </p:txBody>
           </p:sp>
         </mc:Choice>
-        <mc:Fallback>
+        <mc:Fallback xmlns="">
           <p:sp>
             <p:nvSpPr>
               <p:cNvPr id="2" name="Content Placeholder 1"/>
@@ -28317,8 +28359,8 @@
           </a:p>
         </p:txBody>
       </p:sp>
-      <mc:AlternateContent xmlns:mc="http://schemas.openxmlformats.org/markup-compatibility/2006">
-        <mc:Choice xmlns:a14="http://schemas.microsoft.com/office/drawing/2010/main" Requires="a14">
+      <mc:AlternateContent xmlns:mc="http://schemas.openxmlformats.org/markup-compatibility/2006" xmlns:a14="http://schemas.microsoft.com/office/drawing/2010/main">
+        <mc:Choice Requires="a14">
           <p:sp>
             <p:nvSpPr>
               <p:cNvPr id="2" name="Content Placeholder 1"/>
@@ -28828,7 +28870,7 @@
             </p:txBody>
           </p:sp>
         </mc:Choice>
-        <mc:Fallback>
+        <mc:Fallback xmlns="">
           <p:sp>
             <p:nvSpPr>
               <p:cNvPr id="2" name="Content Placeholder 1"/>
